--- a/proposal.pptx
+++ b/proposal.pptx
@@ -1685,23 +1685,23 @@
         <p:spPr>
           <a:xfrm>
             <a:off x="548640" y="868680"/>
-            <a:ext cx="4206240" cy="731520"/>
-          </a:xfrm>
-          <a:prstGeom prst="rect">
-            <a:avLst/>
-          </a:prstGeom>
-          <a:noFill/>
-          <a:ln/>
-        </p:spPr>
-        <p:txBody>
-          <a:bodyPr wrap="square" lIns="0" tIns="0" rIns="0" bIns="0" rtlCol="0" anchor="t"/>
-          <a:lstStyle/>
-          <a:p>
-            <a:pPr indent="0" marL="0">
-              <a:buNone/>
-            </a:pPr>
-            <a:r>
-              <a:rPr lang="en-US" sz="4200" b="1" dirty="0">
+            <a:ext cx="4114800" cy="1005840"/>
+          </a:xfrm>
+          <a:prstGeom prst="rect">
+            <a:avLst/>
+          </a:prstGeom>
+          <a:noFill/>
+          <a:ln/>
+        </p:spPr>
+        <p:txBody>
+          <a:bodyPr wrap="square" lIns="0" tIns="0" rIns="0" bIns="0" rtlCol="0" anchor="t"/>
+          <a:lstStyle/>
+          <a:p>
+            <a:pPr indent="0" marL="0">
+              <a:buNone/>
+            </a:pPr>
+            <a:r>
+              <a:rPr lang="en-US" sz="3000" b="1" dirty="0">
                 <a:solidFill>
                   <a:srgbClr val="FFFFFF"/>
                 </a:solidFill>
@@ -1709,9 +1709,9 @@
                 <a:ea typeface="Calibri" pitchFamily="34" charset="-122"/>
                 <a:cs typeface="Calibri" pitchFamily="34" charset="-120"/>
               </a:rPr>
-              <a:t>Reading the Smile</a:t>
-            </a:r>
-            <a:endParaRPr lang="en-US" sz="4200" dirty="0"/>
+              <a:t>Do Traders Overestimate Stock Moves?</a:t>
+            </a:r>
+            <a:endParaRPr lang="en-US" sz="3000" dirty="0"/>
           </a:p>
         </p:txBody>
       </p:sp>
@@ -1723,7 +1723,7 @@
         </p:nvSpPr>
         <p:spPr>
           <a:xfrm>
-            <a:off x="548640" y="1691640"/>
+            <a:off x="548640" y="2011680"/>
             <a:ext cx="3931920" cy="640080"/>
           </a:xfrm>
           <a:prstGeom prst="rect">
@@ -2704,7 +2704,7 @@
                 <a:ea typeface="Calibri" pitchFamily="34" charset="-122"/>
                 <a:cs typeface="Calibri" pitchFamily="34" charset="-120"/>
               </a:rPr>
-              <a:t>If traders guess too high again and again, people buying options keep overpaying. That matters to anyone using options to protect their savings.</a:t>
+              <a:t>If traders consistently guess too high, people buying options keep overpaying. That matters to anyone using options to protect their savings.</a:t>
             </a:r>
             <a:endParaRPr lang="en-US" sz="1150" dirty="0"/>
           </a:p>
@@ -3324,7 +3324,7 @@
                 <a:ea typeface="Calibri" pitchFamily="34" charset="-122"/>
                 <a:cs typeface="Calibri" pitchFamily="34" charset="-120"/>
               </a:rPr>
-              <a:t>Free, public, and already in hand</a:t>
+              <a:t>DoltHub options database, 2019 to 2026</a:t>
             </a:r>
             <a:endParaRPr lang="en-US" sz="3000" dirty="0"/>
           </a:p>
@@ -3833,24 +3833,24 @@
         </p:nvSpPr>
         <p:spPr>
           <a:xfrm>
-            <a:off x="5212080" y="1444752"/>
-            <a:ext cx="3200400" cy="228600"/>
-          </a:xfrm>
-          <a:prstGeom prst="rect">
-            <a:avLst/>
-          </a:prstGeom>
-          <a:noFill/>
-          <a:ln/>
-        </p:spPr>
-        <p:txBody>
-          <a:bodyPr wrap="square" lIns="0" tIns="0" rIns="0" bIns="0" rtlCol="0" anchor="t"/>
-          <a:lstStyle/>
-          <a:p>
-            <a:pPr indent="0" marL="0">
-              <a:buNone/>
-            </a:pPr>
-            <a:r>
-              <a:rPr lang="en-US" sz="1250" b="1" dirty="0">
+            <a:off x="5166360" y="1463040"/>
+            <a:ext cx="3337560" cy="228600"/>
+          </a:xfrm>
+          <a:prstGeom prst="rect">
+            <a:avLst/>
+          </a:prstGeom>
+          <a:noFill/>
+          <a:ln/>
+        </p:spPr>
+        <p:txBody>
+          <a:bodyPr wrap="square" lIns="0" tIns="0" rIns="0" bIns="0" rtlCol="0" anchor="t"/>
+          <a:lstStyle/>
+          <a:p>
+            <a:pPr indent="0" marL="0">
+              <a:buNone/>
+            </a:pPr>
+            <a:r>
+              <a:rPr lang="en-US" sz="1050" b="1" dirty="0">
                 <a:solidFill>
                   <a:srgbClr val="0F2A2A"/>
                 </a:solidFill>
@@ -3858,9 +3858,9 @@
                 <a:ea typeface="Calibri" pitchFamily="34" charset="-122"/>
                 <a:cs typeface="Calibri" pitchFamily="34" charset="-120"/>
               </a:rPr>
-              <a:t>Apple's "smile" on Sep 30, 2026</a:t>
-            </a:r>
-            <a:endParaRPr lang="en-US" sz="1250" dirty="0"/>
+              <a:t>Apple: expected move by strike price, Sep 30, 2026</a:t>
+            </a:r>
+            <a:endParaRPr lang="en-US" sz="1050" dirty="0"/>
           </a:p>
         </p:txBody>
       </p:sp>
@@ -3913,7 +3913,7 @@
                 <a:ea typeface="Calibri" pitchFamily="34" charset="-122"/>
                 <a:cs typeface="Calibri" pitchFamily="34" charset="-120"/>
               </a:rPr>
-              <a:t>Each dot is a real option expiring Oct 30. Options far from today's price (~$335) are priced for bigger moves, so the curve bends up like a smile.</a:t>
+              <a:t>Each dot is a real option expiring Oct 30. Options far from today's price (~$335) are priced for bigger moves, so the curve rises at both ends.</a:t>
             </a:r>
             <a:endParaRPr lang="en-US" sz="950" dirty="0"/>
           </a:p>
@@ -4361,7 +4361,7 @@
                 <a:ea typeface="Calibri" pitchFamily="34" charset="-122"/>
                 <a:cs typeface="Calibri" pitchFamily="34" charset="-120"/>
               </a:rPr>
-              <a:t>Chart each stock's smile, then see how it shifts over time and around big news.</a:t>
+              <a:t>Chart each stock's curve, then see how it shifts over time and around big news.</a:t>
             </a:r>
             <a:endParaRPr lang="en-US" sz="1050" dirty="0"/>
           </a:p>
@@ -4660,7 +4660,7 @@
                 <a:ea typeface="Calibri" pitchFamily="34" charset="-122"/>
                 <a:cs typeface="Calibri" pitchFamily="34" charset="-120"/>
               </a:rPr>
-              <a:t>Share</a:t>
+              <a:t>Build</a:t>
             </a:r>
             <a:endParaRPr lang="en-US" sz="1400" dirty="0"/>
           </a:p>
@@ -4699,7 +4699,7 @@
                 <a:ea typeface="Calibri" pitchFamily="34" charset="-122"/>
                 <a:cs typeface="Calibri" pitchFamily="34" charset="-120"/>
               </a:rPr>
-              <a:t>An interactive page: pick a stock and date, see its smile and whether we think traders guessed too high.</a:t>
+              <a:t>An interactive page: pick a stock and date, see its curve and whether we think traders guessed too high.</a:t>
             </a:r>
             <a:endParaRPr lang="en-US" sz="1050" dirty="0"/>
           </a:p>
@@ -4965,7 +4965,7 @@
                 <a:ea typeface="Calibri" pitchFamily="34" charset="-122"/>
                 <a:cs typeface="Calibri" pitchFamily="34" charset="-120"/>
               </a:rPr>
-              <a:t>What we'll deliver, and who does what</a:t>
+              <a:t>Progress report goals and roles</a:t>
             </a:r>
             <a:endParaRPr lang="en-US" sz="3000" dirty="0"/>
           </a:p>
@@ -5338,7 +5338,7 @@
                 <a:ea typeface="Calibri" pitchFamily="34" charset="-122"/>
                 <a:cs typeface="Calibri" pitchFamily="34" charset="-120"/>
               </a:rPr>
-              <a:t>Pick the stock list, pull the data, and draw the first smile charts.</a:t>
+              <a:t>Pick the stock list, pull the data, and draw the first charts.</a:t>
             </a:r>
             <a:endParaRPr lang="en-US" sz="1250" dirty="0"/>
           </a:p>
@@ -5690,7 +5690,7 @@
                           <a:ea typeface="Calibri" pitchFamily="34" charset="-122"/>
                           <a:cs typeface="Calibri" pitchFamily="34" charset="-120"/>
                         </a:rPr>
-                        <a:t>Fit a curve to the smile shape</a:t>
+                        <a:t>Curve fit: expected move vs. strike price</a:t>
                       </a:r>
                       <a:endParaRPr lang="en-US" sz="1050" dirty="0">
                         <a:latin typeface="Calibri" charset="0"/>
@@ -5758,7 +5758,7 @@
                           <a:ea typeface="Calibri" pitchFamily="34" charset="-122"/>
                           <a:cs typeface="Calibri" pitchFamily="34" charset="-120"/>
                         </a:rPr>
-                        <a:t>Smile chart; fit vs. actual</a:t>
+                        <a:t>Curve chart; fit vs. actual</a:t>
                       </a:r>
                       <a:endParaRPr lang="en-US" sz="1050" dirty="0">
                         <a:latin typeface="Calibri" charset="0"/>
@@ -6308,7 +6308,7 @@
                           <a:ea typeface="Calibri" pitchFamily="34" charset="-122"/>
                           <a:cs typeface="Calibri" pitchFamily="34" charset="-120"/>
                         </a:rPr>
-                        <a:t>Clustering stocks by smile shape</a:t>
+                        <a:t>Clustering stocks by curve shape</a:t>
                       </a:r>
                       <a:endParaRPr lang="en-US" sz="1050" dirty="0">
                         <a:latin typeface="Calibri" charset="0"/>
@@ -6376,7 +6376,7 @@
                           <a:ea typeface="Calibri" pitchFamily="34" charset="-122"/>
                           <a:cs typeface="Calibri" pitchFamily="34" charset="-120"/>
                         </a:rPr>
-                        <a:t>Cluster map; smiles by group</a:t>
+                        <a:t>Cluster map; curves by group</a:t>
                       </a:r>
                       <a:endParaRPr lang="en-US" sz="1050" dirty="0">
                         <a:latin typeface="Calibri" charset="0"/>

--- a/proposal.pptx
+++ b/proposal.pptx
@@ -138,11 +138,11 @@
           </c:tx>
           <c:spPr>
             <a:solidFill>
-              <a:srgbClr val="FF6B4A"/>
+              <a:srgbClr val="0071E3"/>
             </a:solidFill>
-            <a:ln w="28575" cap="flat">
+            <a:ln w="25400" cap="flat">
               <a:solidFill>
-                <a:srgbClr val="FF6B4A"/>
+                <a:srgbClr val="0071E3"/>
               </a:solidFill>
               <a:prstDash val="solid"/>
               <a:round/>
@@ -151,14 +151,14 @@
           </c:spPr>
           <c:marker>
             <c:symbol val="circle"/>
-            <c:size val="5"/>
+            <c:size val="4"/>
             <c:spPr>
               <a:solidFill>
-                <a:srgbClr val="FF6B4A"/>
+                <a:srgbClr val="0071E3"/>
               </a:solidFill>
               <a:ln w="9525" cap="flat">
                 <a:solidFill>
-                  <a:srgbClr val="FF6B4A"/>
+                  <a:srgbClr val="0071E3"/>
                 </a:solidFill>
                 <a:prstDash val="solid"/>
                 <a:round/>
@@ -356,7 +356,7 @@
                 <a:pPr>
                   <a:defRPr sz="900" b="0" i="0" u="none" strike="noStrike">
                     <a:solidFill>
-                      <a:srgbClr val="5F7371"/>
+                      <a:srgbClr val="6E6E73"/>
                     </a:solidFill>
                     <a:latin typeface="Arial"/>
                   </a:defRPr>
@@ -364,7 +364,7 @@
                 <a:r>
                   <a:rPr sz="900" b="0" i="0" u="none" strike="noStrike">
                     <a:solidFill>
-                      <a:srgbClr val="5F7371"/>
+                      <a:srgbClr val="6E6E73"/>
                     </a:solidFill>
                     <a:latin typeface="Arial"/>
                   </a:rPr>
@@ -396,9 +396,9 @@
             <a:pPr>
               <a:defRPr sz="900" b="0" i="0" u="none" strike="noStrike">
                 <a:solidFill>
-                  <a:srgbClr val="5F7371"/>
-                </a:solidFill>
-                <a:latin typeface="Arial"/>
+                  <a:srgbClr val="6E6E73"/>
+                </a:solidFill>
+                <a:latin typeface="Helvetica Neue"/>
               </a:defRPr>
             </a:pPr>
             <a:endParaRPr lang="en-US"/>
@@ -423,7 +423,7 @@
           <c:spPr>
             <a:ln w="6350" cap="flat">
               <a:solidFill>
-                <a:srgbClr val="CFE0DD"/>
+                <a:srgbClr val="D2D2D7"/>
               </a:solidFill>
               <a:prstDash val="solid"/>
               <a:round/>
@@ -439,7 +439,7 @@
                 <a:pPr>
                   <a:defRPr sz="900" b="0" i="0" u="none" strike="noStrike">
                     <a:solidFill>
-                      <a:srgbClr val="5F7371"/>
+                      <a:srgbClr val="6E6E73"/>
                     </a:solidFill>
                     <a:latin typeface="Arial"/>
                   </a:defRPr>
@@ -447,7 +447,7 @@
                 <a:r>
                   <a:rPr sz="900" b="0" i="0" u="none" strike="noStrike">
                     <a:solidFill>
-                      <a:srgbClr val="5F7371"/>
+                      <a:srgbClr val="6E6E73"/>
                     </a:solidFill>
                     <a:latin typeface="Arial"/>
                   </a:rPr>
@@ -479,9 +479,9 @@
             <a:pPr>
               <a:defRPr sz="900" b="0" i="0" u="none" strike="noStrike">
                 <a:solidFill>
-                  <a:srgbClr val="5F7371"/>
-                </a:solidFill>
-                <a:latin typeface="Arial"/>
+                  <a:srgbClr val="6E6E73"/>
+                </a:solidFill>
+                <a:latin typeface="Helvetica Neue"/>
               </a:defRPr>
             </a:pPr>
             <a:endParaRPr lang="en-US"/>
@@ -1088,7 +1088,7 @@
           <a:p>
             <a:r>
               <a:rPr lang="en-US" dirty="0"/>
-              <a:t>Stress that the data is free and we already pulled it. Point at the chart: this is real Apple data from yesterday's snapshot. Be upfront about the two limits. About 90 seconds.</a:t>
+              <a:t>Stress that the data is free and we already pulled it. Point at the chart: this is real Apple data from the latest snapshot. Be upfront about the two limits. About 90 seconds.</a:t>
             </a:r>
             <a:endParaRPr lang="en-US" dirty="0"/>
           </a:p>
@@ -1619,7 +1619,7 @@
     <p:bg>
       <p:bgPr>
         <a:solidFill>
-          <a:srgbClr val="0F2A2A"/>
+          <a:srgbClr val="000000"/>
         </a:solidFill>
       </p:bgPr>
     </p:bg>
@@ -1645,34 +1645,34 @@
         </p:nvSpPr>
         <p:spPr>
           <a:xfrm>
-            <a:off x="548640" y="502920"/>
-            <a:ext cx="4114800" cy="228600"/>
-          </a:xfrm>
-          <a:prstGeom prst="rect">
-            <a:avLst/>
-          </a:prstGeom>
-          <a:noFill/>
-          <a:ln/>
-        </p:spPr>
-        <p:txBody>
-          <a:bodyPr wrap="square" lIns="0" tIns="0" rIns="0" bIns="0" rtlCol="0" anchor="t"/>
-          <a:lstStyle/>
-          <a:p>
-            <a:pPr indent="0" marL="0">
-              <a:buNone/>
-            </a:pPr>
-            <a:r>
-              <a:rPr lang="en-US" sz="1100" b="1" spc="300" kern="0" dirty="0">
-                <a:solidFill>
-                  <a:srgbClr val="FF6B4A"/>
-                </a:solidFill>
-                <a:latin typeface="Calibri" pitchFamily="34" charset="0"/>
-                <a:ea typeface="Calibri" pitchFamily="34" charset="-122"/>
-                <a:cs typeface="Calibri" pitchFamily="34" charset="-120"/>
-              </a:rPr>
-              <a:t>CS 418 · FINAL PROJECT PROPOSAL</a:t>
-            </a:r>
-            <a:endParaRPr lang="en-US" sz="1100" dirty="0"/>
+            <a:off x="548640" y="548640"/>
+            <a:ext cx="8046720" cy="228600"/>
+          </a:xfrm>
+          <a:prstGeom prst="rect">
+            <a:avLst/>
+          </a:prstGeom>
+          <a:noFill/>
+          <a:ln/>
+        </p:spPr>
+        <p:txBody>
+          <a:bodyPr wrap="square" lIns="0" tIns="0" rIns="0" bIns="0" rtlCol="0" anchor="t"/>
+          <a:lstStyle/>
+          <a:p>
+            <a:pPr algn="ctr" indent="0" marL="0">
+              <a:buNone/>
+            </a:pPr>
+            <a:r>
+              <a:rPr lang="en-US" sz="1200" dirty="0">
+                <a:solidFill>
+                  <a:srgbClr val="A1A1A6"/>
+                </a:solidFill>
+                <a:latin typeface="Helvetica Neue" pitchFamily="34" charset="0"/>
+                <a:ea typeface="Helvetica Neue" pitchFamily="34" charset="-122"/>
+                <a:cs typeface="Helvetica Neue" pitchFamily="34" charset="-120"/>
+              </a:rPr>
+              <a:t>CS 418 Final Project Proposal  ·  Team UIC Traders</a:t>
+            </a:r>
+            <a:endParaRPr lang="en-US" sz="1200" dirty="0"/>
           </a:p>
         </p:txBody>
       </p:sp>
@@ -1684,34 +1684,34 @@
         </p:nvSpPr>
         <p:spPr>
           <a:xfrm>
-            <a:off x="548640" y="868680"/>
-            <a:ext cx="4114800" cy="1005840"/>
-          </a:xfrm>
-          <a:prstGeom prst="rect">
-            <a:avLst/>
-          </a:prstGeom>
-          <a:noFill/>
-          <a:ln/>
-        </p:spPr>
-        <p:txBody>
-          <a:bodyPr wrap="square" lIns="0" tIns="0" rIns="0" bIns="0" rtlCol="0" anchor="t"/>
-          <a:lstStyle/>
-          <a:p>
-            <a:pPr indent="0" marL="0">
-              <a:buNone/>
-            </a:pPr>
-            <a:r>
-              <a:rPr lang="en-US" sz="3000" b="1" dirty="0">
+            <a:off x="914400" y="1005840"/>
+            <a:ext cx="7315200" cy="1234440"/>
+          </a:xfrm>
+          <a:prstGeom prst="rect">
+            <a:avLst/>
+          </a:prstGeom>
+          <a:noFill/>
+          <a:ln/>
+        </p:spPr>
+        <p:txBody>
+          <a:bodyPr wrap="square" lIns="0" tIns="0" rIns="0" bIns="0" rtlCol="0" anchor="t"/>
+          <a:lstStyle/>
+          <a:p>
+            <a:pPr algn="ctr" indent="0" marL="0">
+              <a:buNone/>
+            </a:pPr>
+            <a:r>
+              <a:rPr lang="en-US" sz="4000" b="1" dirty="0">
                 <a:solidFill>
                   <a:srgbClr val="FFFFFF"/>
                 </a:solidFill>
-                <a:latin typeface="Calibri" pitchFamily="34" charset="0"/>
-                <a:ea typeface="Calibri" pitchFamily="34" charset="-122"/>
-                <a:cs typeface="Calibri" pitchFamily="34" charset="-120"/>
+                <a:latin typeface="Helvetica Neue" pitchFamily="34" charset="0"/>
+                <a:ea typeface="Helvetica Neue" pitchFamily="34" charset="-122"/>
+                <a:cs typeface="Helvetica Neue" pitchFamily="34" charset="-120"/>
               </a:rPr>
               <a:t>Do Traders Overestimate Stock Moves?</a:t>
             </a:r>
-            <a:endParaRPr lang="en-US" sz="3000" dirty="0"/>
+            <a:endParaRPr lang="en-US" sz="4000" dirty="0"/>
           </a:p>
         </p:txBody>
       </p:sp>
@@ -1723,30 +1723,30 @@
         </p:nvSpPr>
         <p:spPr>
           <a:xfrm>
-            <a:off x="548640" y="2011680"/>
-            <a:ext cx="3931920" cy="640080"/>
-          </a:xfrm>
-          <a:prstGeom prst="rect">
-            <a:avLst/>
-          </a:prstGeom>
-          <a:noFill/>
-          <a:ln/>
-        </p:spPr>
-        <p:txBody>
-          <a:bodyPr wrap="square" lIns="0" tIns="0" rIns="0" bIns="0" rtlCol="0" anchor="t"/>
-          <a:lstStyle/>
-          <a:p>
-            <a:pPr indent="0" marL="0">
+            <a:off x="548640" y="2331720"/>
+            <a:ext cx="8046720" cy="320040"/>
+          </a:xfrm>
+          <a:prstGeom prst="rect">
+            <a:avLst/>
+          </a:prstGeom>
+          <a:noFill/>
+          <a:ln/>
+        </p:spPr>
+        <p:txBody>
+          <a:bodyPr wrap="square" lIns="0" tIns="0" rIns="0" bIns="0" rtlCol="0" anchor="t"/>
+          <a:lstStyle/>
+          <a:p>
+            <a:pPr algn="ctr" indent="0" marL="0">
               <a:buNone/>
             </a:pPr>
             <a:r>
               <a:rPr lang="en-US" sz="1700" dirty="0">
                 <a:solidFill>
-                  <a:srgbClr val="B7D3CE"/>
-                </a:solidFill>
-                <a:latin typeface="Calibri" pitchFamily="34" charset="0"/>
-                <a:ea typeface="Calibri" pitchFamily="34" charset="-122"/>
-                <a:cs typeface="Calibri" pitchFamily="34" charset="-120"/>
+                  <a:srgbClr val="A1A1A6"/>
+                </a:solidFill>
+                <a:latin typeface="Helvetica Neue" pitchFamily="34" charset="0"/>
+                <a:ea typeface="Helvetica Neue" pitchFamily="34" charset="-122"/>
+                <a:cs typeface="Helvetica Neue" pitchFamily="34" charset="-120"/>
               </a:rPr>
               <a:t>Do traders overestimate how much stocks will move?</a:t>
             </a:r>
@@ -1756,260 +1756,22 @@
       </p:sp>
       <p:sp>
         <p:nvSpPr>
-          <p:cNvPr id="5" name="Text 3"/>
-          <p:cNvSpPr txBox="1"/>
-          <p:nvPr/>
-        </p:nvSpPr>
-        <p:spPr>
-          <a:xfrm>
-            <a:off x="548640" y="2926080"/>
-            <a:ext cx="3931920" cy="182880"/>
-          </a:xfrm>
-          <a:prstGeom prst="rect">
-            <a:avLst/>
-          </a:prstGeom>
-          <a:noFill/>
-          <a:ln/>
-        </p:spPr>
-        <p:txBody>
-          <a:bodyPr wrap="square" lIns="0" tIns="0" rIns="0" bIns="0" rtlCol="0" anchor="t"/>
-          <a:lstStyle/>
-          <a:p>
-            <a:pPr indent="0" marL="0">
-              <a:buNone/>
-            </a:pPr>
-            <a:r>
-              <a:rPr lang="en-US" sz="950" b="1" spc="200" kern="0" dirty="0">
-                <a:solidFill>
-                  <a:srgbClr val="B7D3CE"/>
-                </a:solidFill>
-                <a:latin typeface="Calibri" pitchFamily="34" charset="0"/>
-                <a:ea typeface="Calibri" pitchFamily="34" charset="-122"/>
-                <a:cs typeface="Calibri" pitchFamily="34" charset="-120"/>
-              </a:rPr>
-              <a:t>TEAM NAME</a:t>
-            </a:r>
-            <a:endParaRPr lang="en-US" sz="950" dirty="0"/>
-          </a:p>
-        </p:txBody>
-      </p:sp>
-      <p:sp>
-        <p:nvSpPr>
-          <p:cNvPr id="6" name="Text 4"/>
-          <p:cNvSpPr txBox="1"/>
-          <p:nvPr/>
-        </p:nvSpPr>
-        <p:spPr>
-          <a:xfrm>
-            <a:off x="548640" y="3118104"/>
-            <a:ext cx="3931920" cy="256032"/>
-          </a:xfrm>
-          <a:prstGeom prst="rect">
-            <a:avLst/>
-          </a:prstGeom>
-          <a:noFill/>
-          <a:ln/>
-        </p:spPr>
-        <p:txBody>
-          <a:bodyPr wrap="square" lIns="0" tIns="0" rIns="0" bIns="0" rtlCol="0" anchor="t"/>
-          <a:lstStyle/>
-          <a:p>
-            <a:pPr indent="0" marL="0">
-              <a:buNone/>
-            </a:pPr>
-            <a:r>
-              <a:rPr lang="en-US" sz="1400" dirty="0">
-                <a:solidFill>
-                  <a:srgbClr val="FF6B4A"/>
-                </a:solidFill>
-                <a:latin typeface="Calibri" pitchFamily="34" charset="0"/>
-                <a:ea typeface="Calibri" pitchFamily="34" charset="-122"/>
-                <a:cs typeface="Calibri" pitchFamily="34" charset="-120"/>
-              </a:rPr>
-              <a:t>[ TEAM NAME ]</a:t>
-            </a:r>
-            <a:endParaRPr lang="en-US" sz="1400" dirty="0"/>
-          </a:p>
-        </p:txBody>
-      </p:sp>
-      <p:sp>
-        <p:nvSpPr>
-          <p:cNvPr id="7" name="Text 5"/>
-          <p:cNvSpPr txBox="1"/>
-          <p:nvPr/>
-        </p:nvSpPr>
-        <p:spPr>
-          <a:xfrm>
-            <a:off x="548640" y="3456432"/>
-            <a:ext cx="3931920" cy="182880"/>
-          </a:xfrm>
-          <a:prstGeom prst="rect">
-            <a:avLst/>
-          </a:prstGeom>
-          <a:noFill/>
-          <a:ln/>
-        </p:spPr>
-        <p:txBody>
-          <a:bodyPr wrap="square" lIns="0" tIns="0" rIns="0" bIns="0" rtlCol="0" anchor="t"/>
-          <a:lstStyle/>
-          <a:p>
-            <a:pPr indent="0" marL="0">
-              <a:buNone/>
-            </a:pPr>
-            <a:r>
-              <a:rPr lang="en-US" sz="950" b="1" spc="200" kern="0" dirty="0">
-                <a:solidFill>
-                  <a:srgbClr val="B7D3CE"/>
-                </a:solidFill>
-                <a:latin typeface="Calibri" pitchFamily="34" charset="0"/>
-                <a:ea typeface="Calibri" pitchFamily="34" charset="-122"/>
-                <a:cs typeface="Calibri" pitchFamily="34" charset="-120"/>
-              </a:rPr>
-              <a:t>GITHUB REPO</a:t>
-            </a:r>
-            <a:endParaRPr lang="en-US" sz="950" dirty="0"/>
-          </a:p>
-        </p:txBody>
-      </p:sp>
-      <p:sp>
-        <p:nvSpPr>
-          <p:cNvPr id="8" name="Text 6"/>
-          <p:cNvSpPr txBox="1"/>
-          <p:nvPr/>
-        </p:nvSpPr>
-        <p:spPr>
-          <a:xfrm>
-            <a:off x="548640" y="3648456"/>
-            <a:ext cx="3931920" cy="256032"/>
-          </a:xfrm>
-          <a:prstGeom prst="rect">
-            <a:avLst/>
-          </a:prstGeom>
-          <a:noFill/>
-          <a:ln/>
-        </p:spPr>
-        <p:txBody>
-          <a:bodyPr wrap="square" lIns="0" tIns="0" rIns="0" bIns="0" rtlCol="0" anchor="t"/>
-          <a:lstStyle/>
-          <a:p>
-            <a:pPr indent="0" marL="0">
-              <a:buNone/>
-            </a:pPr>
-            <a:r>
-              <a:rPr lang="en-US" sz="1400" dirty="0">
-                <a:solidFill>
-                  <a:srgbClr val="FF6B4A"/>
-                </a:solidFill>
-                <a:latin typeface="Calibri" pitchFamily="34" charset="0"/>
-                <a:ea typeface="Calibri" pitchFamily="34" charset="-122"/>
-                <a:cs typeface="Calibri" pitchFamily="34" charset="-120"/>
-              </a:rPr>
-              <a:t>[ paste repo link ]</a:t>
-            </a:r>
-            <a:endParaRPr lang="en-US" sz="1400" dirty="0"/>
-          </a:p>
-        </p:txBody>
-      </p:sp>
-      <p:sp>
-        <p:nvSpPr>
-          <p:cNvPr id="9" name="Text 7"/>
-          <p:cNvSpPr txBox="1"/>
-          <p:nvPr/>
-        </p:nvSpPr>
-        <p:spPr>
-          <a:xfrm>
-            <a:off x="548640" y="3986784"/>
-            <a:ext cx="3931920" cy="182880"/>
-          </a:xfrm>
-          <a:prstGeom prst="rect">
-            <a:avLst/>
-          </a:prstGeom>
-          <a:noFill/>
-          <a:ln/>
-        </p:spPr>
-        <p:txBody>
-          <a:bodyPr wrap="square" lIns="0" tIns="0" rIns="0" bIns="0" rtlCol="0" anchor="t"/>
-          <a:lstStyle/>
-          <a:p>
-            <a:pPr indent="0" marL="0">
-              <a:buNone/>
-            </a:pPr>
-            <a:r>
-              <a:rPr lang="en-US" sz="950" b="1" spc="200" kern="0" dirty="0">
-                <a:solidFill>
-                  <a:srgbClr val="B7D3CE"/>
-                </a:solidFill>
-                <a:latin typeface="Calibri" pitchFamily="34" charset="0"/>
-                <a:ea typeface="Calibri" pitchFamily="34" charset="-122"/>
-                <a:cs typeface="Calibri" pitchFamily="34" charset="-120"/>
-              </a:rPr>
-              <a:t>PITCH RECORDING</a:t>
-            </a:r>
-            <a:endParaRPr lang="en-US" sz="950" dirty="0"/>
-          </a:p>
-        </p:txBody>
-      </p:sp>
-      <p:sp>
-        <p:nvSpPr>
-          <p:cNvPr id="10" name="Text 8"/>
-          <p:cNvSpPr txBox="1"/>
-          <p:nvPr/>
-        </p:nvSpPr>
-        <p:spPr>
-          <a:xfrm>
-            <a:off x="548640" y="4178808"/>
-            <a:ext cx="3931920" cy="256032"/>
-          </a:xfrm>
-          <a:prstGeom prst="rect">
-            <a:avLst/>
-          </a:prstGeom>
-          <a:noFill/>
-          <a:ln/>
-        </p:spPr>
-        <p:txBody>
-          <a:bodyPr wrap="square" lIns="0" tIns="0" rIns="0" bIns="0" rtlCol="0" anchor="t"/>
-          <a:lstStyle/>
-          <a:p>
-            <a:pPr indent="0" marL="0">
-              <a:buNone/>
-            </a:pPr>
-            <a:r>
-              <a:rPr lang="en-US" sz="1400" dirty="0">
-                <a:solidFill>
-                  <a:srgbClr val="FF6B4A"/>
-                </a:solidFill>
-                <a:latin typeface="Calibri" pitchFamily="34" charset="0"/>
-                <a:ea typeface="Calibri" pitchFamily="34" charset="-122"/>
-                <a:cs typeface="Calibri" pitchFamily="34" charset="-120"/>
-              </a:rPr>
-              <a:t>[ paste Zoom cloud link ]</a:t>
-            </a:r>
-            <a:endParaRPr lang="en-US" sz="1400" dirty="0"/>
-          </a:p>
-        </p:txBody>
-      </p:sp>
-      <p:sp>
-        <p:nvSpPr>
-          <p:cNvPr id="11" name="Shape 9"/>
+          <p:cNvPr id="5" name="Shape 3"/>
           <p:cNvSpPr/>
           <p:nvPr/>
         </p:nvSpPr>
         <p:spPr>
           <a:xfrm>
-            <a:off x="4937760" y="502920"/>
-            <a:ext cx="3657600" cy="4114800"/>
-          </a:xfrm>
-          <a:prstGeom prst="roundRect">
-            <a:avLst>
-              <a:gd name="adj" fmla="val 2000"/>
-            </a:avLst>
-          </a:prstGeom>
-          <a:solidFill>
-            <a:srgbClr val="173B3A"/>
-          </a:solidFill>
-          <a:ln w="12700">
+            <a:off x="548640" y="3017520"/>
+            <a:ext cx="8046720" cy="0"/>
+          </a:xfrm>
+          <a:prstGeom prst="line">
+            <a:avLst/>
+          </a:prstGeom>
+          <a:noFill/>
+          <a:ln w="6350">
             <a:solidFill>
-              <a:srgbClr val="173B3A"/>
+              <a:srgbClr val="3A3A3C"/>
             </a:solidFill>
             <a:prstDash val="solid"/>
           </a:ln>
@@ -2017,40 +1779,274 @@
       </p:sp>
       <p:sp>
         <p:nvSpPr>
+          <p:cNvPr id="6" name="Text 4"/>
+          <p:cNvSpPr txBox="1"/>
+          <p:nvPr/>
+        </p:nvSpPr>
+        <p:spPr>
+          <a:xfrm>
+            <a:off x="548640" y="3200400"/>
+            <a:ext cx="1609344" cy="237744"/>
+          </a:xfrm>
+          <a:prstGeom prst="rect">
+            <a:avLst/>
+          </a:prstGeom>
+          <a:noFill/>
+          <a:ln/>
+        </p:spPr>
+        <p:txBody>
+          <a:bodyPr wrap="square" lIns="0" tIns="0" rIns="0" bIns="0" rtlCol="0" anchor="t"/>
+          <a:lstStyle/>
+          <a:p>
+            <a:pPr algn="ctr" indent="0" marL="0">
+              <a:buNone/>
+            </a:pPr>
+            <a:r>
+              <a:rPr lang="en-US" sz="1250" b="1" dirty="0">
+                <a:solidFill>
+                  <a:srgbClr val="FFFFFF"/>
+                </a:solidFill>
+                <a:latin typeface="Helvetica Neue" pitchFamily="34" charset="0"/>
+                <a:ea typeface="Helvetica Neue" pitchFamily="34" charset="-122"/>
+                <a:cs typeface="Helvetica Neue" pitchFamily="34" charset="-120"/>
+              </a:rPr>
+              <a:t>Kaled Dahleh</a:t>
+            </a:r>
+            <a:endParaRPr lang="en-US" sz="1250" dirty="0"/>
+          </a:p>
+        </p:txBody>
+      </p:sp>
+      <p:sp>
+        <p:nvSpPr>
+          <p:cNvPr id="7" name="Text 5"/>
+          <p:cNvSpPr txBox="1"/>
+          <p:nvPr/>
+        </p:nvSpPr>
+        <p:spPr>
+          <a:xfrm>
+            <a:off x="548640" y="3465576"/>
+            <a:ext cx="1609344" cy="182880"/>
+          </a:xfrm>
+          <a:prstGeom prst="rect">
+            <a:avLst/>
+          </a:prstGeom>
+          <a:noFill/>
+          <a:ln/>
+        </p:spPr>
+        <p:txBody>
+          <a:bodyPr wrap="square" lIns="0" tIns="0" rIns="0" bIns="0" rtlCol="0" anchor="t"/>
+          <a:lstStyle/>
+          <a:p>
+            <a:pPr algn="ctr" indent="0" marL="0">
+              <a:buNone/>
+            </a:pPr>
+            <a:r>
+              <a:rPr lang="en-US" sz="950" dirty="0">
+                <a:solidFill>
+                  <a:srgbClr val="A1A1A6"/>
+                </a:solidFill>
+                <a:latin typeface="Helvetica Neue" pitchFamily="34" charset="0"/>
+                <a:ea typeface="Helvetica Neue" pitchFamily="34" charset="-122"/>
+                <a:cs typeface="Helvetica Neue" pitchFamily="34" charset="-120"/>
+              </a:rPr>
+              <a:t>kdahl3@uic.edu</a:t>
+            </a:r>
+            <a:endParaRPr lang="en-US" sz="950" dirty="0"/>
+          </a:p>
+        </p:txBody>
+      </p:sp>
+      <p:sp>
+        <p:nvSpPr>
+          <p:cNvPr id="8" name="Text 6"/>
+          <p:cNvSpPr txBox="1"/>
+          <p:nvPr/>
+        </p:nvSpPr>
+        <p:spPr>
+          <a:xfrm>
+            <a:off x="548640" y="3648456"/>
+            <a:ext cx="1609344" cy="182880"/>
+          </a:xfrm>
+          <a:prstGeom prst="rect">
+            <a:avLst/>
+          </a:prstGeom>
+          <a:noFill/>
+          <a:ln/>
+        </p:spPr>
+        <p:txBody>
+          <a:bodyPr wrap="square" lIns="0" tIns="0" rIns="0" bIns="0" rtlCol="0" anchor="t"/>
+          <a:lstStyle/>
+          <a:p>
+            <a:pPr algn="ctr" indent="0" marL="0">
+              <a:buNone/>
+            </a:pPr>
+            <a:r>
+              <a:rPr lang="en-US" sz="950" dirty="0">
+                <a:solidFill>
+                  <a:srgbClr val="A1A1A6"/>
+                </a:solidFill>
+                <a:latin typeface="Helvetica Neue" pitchFamily="34" charset="0"/>
+                <a:ea typeface="Helvetica Neue" pitchFamily="34" charset="-122"/>
+                <a:cs typeface="Helvetica Neue" pitchFamily="34" charset="-120"/>
+              </a:rPr>
+              <a:t>github.com/KaledDahleh</a:t>
+            </a:r>
+            <a:endParaRPr lang="en-US" sz="950" dirty="0"/>
+          </a:p>
+        </p:txBody>
+      </p:sp>
+      <p:sp>
+        <p:nvSpPr>
+          <p:cNvPr id="9" name="Text 7"/>
+          <p:cNvSpPr txBox="1"/>
+          <p:nvPr/>
+        </p:nvSpPr>
+        <p:spPr>
+          <a:xfrm>
+            <a:off x="2157984" y="3200400"/>
+            <a:ext cx="1609344" cy="237744"/>
+          </a:xfrm>
+          <a:prstGeom prst="rect">
+            <a:avLst/>
+          </a:prstGeom>
+          <a:noFill/>
+          <a:ln/>
+        </p:spPr>
+        <p:txBody>
+          <a:bodyPr wrap="square" lIns="0" tIns="0" rIns="0" bIns="0" rtlCol="0" anchor="t"/>
+          <a:lstStyle/>
+          <a:p>
+            <a:pPr algn="ctr" indent="0" marL="0">
+              <a:buNone/>
+            </a:pPr>
+            <a:r>
+              <a:rPr lang="en-US" sz="1250" b="1" dirty="0">
+                <a:solidFill>
+                  <a:srgbClr val="FFFFFF"/>
+                </a:solidFill>
+                <a:latin typeface="Helvetica Neue" pitchFamily="34" charset="0"/>
+                <a:ea typeface="Helvetica Neue" pitchFamily="34" charset="-122"/>
+                <a:cs typeface="Helvetica Neue" pitchFamily="34" charset="-120"/>
+              </a:rPr>
+              <a:t>Musa Tabally</a:t>
+            </a:r>
+            <a:endParaRPr lang="en-US" sz="1250" dirty="0"/>
+          </a:p>
+        </p:txBody>
+      </p:sp>
+      <p:sp>
+        <p:nvSpPr>
+          <p:cNvPr id="10" name="Text 8"/>
+          <p:cNvSpPr txBox="1"/>
+          <p:nvPr/>
+        </p:nvSpPr>
+        <p:spPr>
+          <a:xfrm>
+            <a:off x="2157984" y="3465576"/>
+            <a:ext cx="1609344" cy="182880"/>
+          </a:xfrm>
+          <a:prstGeom prst="rect">
+            <a:avLst/>
+          </a:prstGeom>
+          <a:noFill/>
+          <a:ln/>
+        </p:spPr>
+        <p:txBody>
+          <a:bodyPr wrap="square" lIns="0" tIns="0" rIns="0" bIns="0" rtlCol="0" anchor="t"/>
+          <a:lstStyle/>
+          <a:p>
+            <a:pPr algn="ctr" indent="0" marL="0">
+              <a:buNone/>
+            </a:pPr>
+            <a:r>
+              <a:rPr lang="en-US" sz="950" dirty="0">
+                <a:solidFill>
+                  <a:srgbClr val="A1A1A6"/>
+                </a:solidFill>
+                <a:latin typeface="Helvetica Neue" pitchFamily="34" charset="0"/>
+                <a:ea typeface="Helvetica Neue" pitchFamily="34" charset="-122"/>
+                <a:cs typeface="Helvetica Neue" pitchFamily="34" charset="-120"/>
+              </a:rPr>
+              <a:t>mtaba4@uic.edu</a:t>
+            </a:r>
+            <a:endParaRPr lang="en-US" sz="950" dirty="0"/>
+          </a:p>
+        </p:txBody>
+      </p:sp>
+      <p:sp>
+        <p:nvSpPr>
+          <p:cNvPr id="11" name="Text 9"/>
+          <p:cNvSpPr txBox="1"/>
+          <p:nvPr/>
+        </p:nvSpPr>
+        <p:spPr>
+          <a:xfrm>
+            <a:off x="2157984" y="3648456"/>
+            <a:ext cx="1609344" cy="182880"/>
+          </a:xfrm>
+          <a:prstGeom prst="rect">
+            <a:avLst/>
+          </a:prstGeom>
+          <a:noFill/>
+          <a:ln/>
+        </p:spPr>
+        <p:txBody>
+          <a:bodyPr wrap="square" lIns="0" tIns="0" rIns="0" bIns="0" rtlCol="0" anchor="t"/>
+          <a:lstStyle/>
+          <a:p>
+            <a:pPr algn="ctr" indent="0" marL="0">
+              <a:buNone/>
+            </a:pPr>
+            <a:r>
+              <a:rPr lang="en-US" sz="950" dirty="0">
+                <a:solidFill>
+                  <a:srgbClr val="A1A1A6"/>
+                </a:solidFill>
+                <a:latin typeface="Helvetica Neue" pitchFamily="34" charset="0"/>
+                <a:ea typeface="Helvetica Neue" pitchFamily="34" charset="-122"/>
+                <a:cs typeface="Helvetica Neue" pitchFamily="34" charset="-120"/>
+              </a:rPr>
+              <a:t>github.com/MusaTabally</a:t>
+            </a:r>
+            <a:endParaRPr lang="en-US" sz="950" dirty="0"/>
+          </a:p>
+        </p:txBody>
+      </p:sp>
+      <p:sp>
+        <p:nvSpPr>
           <p:cNvPr id="12" name="Text 10"/>
           <p:cNvSpPr txBox="1"/>
           <p:nvPr/>
         </p:nvSpPr>
         <p:spPr>
           <a:xfrm>
-            <a:off x="5212080" y="713232"/>
-            <a:ext cx="3108960" cy="201168"/>
-          </a:xfrm>
-          <a:prstGeom prst="rect">
-            <a:avLst/>
-          </a:prstGeom>
-          <a:noFill/>
-          <a:ln/>
-        </p:spPr>
-        <p:txBody>
-          <a:bodyPr wrap="square" lIns="0" tIns="0" rIns="0" bIns="0" rtlCol="0" anchor="t"/>
-          <a:lstStyle/>
-          <a:p>
-            <a:pPr indent="0" marL="0">
-              <a:buNone/>
-            </a:pPr>
-            <a:r>
-              <a:rPr lang="en-US" sz="1000" b="1" spc="300" kern="0" dirty="0">
-                <a:solidFill>
-                  <a:srgbClr val="B7D3CE"/>
-                </a:solidFill>
-                <a:latin typeface="Calibri" pitchFamily="34" charset="0"/>
-                <a:ea typeface="Calibri" pitchFamily="34" charset="-122"/>
-                <a:cs typeface="Calibri" pitchFamily="34" charset="-120"/>
-              </a:rPr>
-              <a:t>TEAM</a:t>
-            </a:r>
-            <a:endParaRPr lang="en-US" sz="1000" dirty="0"/>
+            <a:off x="3767328" y="3200400"/>
+            <a:ext cx="1609344" cy="237744"/>
+          </a:xfrm>
+          <a:prstGeom prst="rect">
+            <a:avLst/>
+          </a:prstGeom>
+          <a:noFill/>
+          <a:ln/>
+        </p:spPr>
+        <p:txBody>
+          <a:bodyPr wrap="square" lIns="0" tIns="0" rIns="0" bIns="0" rtlCol="0" anchor="t"/>
+          <a:lstStyle/>
+          <a:p>
+            <a:pPr algn="ctr" indent="0" marL="0">
+              <a:buNone/>
+            </a:pPr>
+            <a:r>
+              <a:rPr lang="en-US" sz="1250" b="1" dirty="0">
+                <a:solidFill>
+                  <a:srgbClr val="FFFFFF"/>
+                </a:solidFill>
+                <a:latin typeface="Helvetica Neue" pitchFamily="34" charset="0"/>
+                <a:ea typeface="Helvetica Neue" pitchFamily="34" charset="-122"/>
+                <a:cs typeface="Helvetica Neue" pitchFamily="34" charset="-120"/>
+              </a:rPr>
+              <a:t>Neo Uy</a:t>
+            </a:r>
+            <a:endParaRPr lang="en-US" sz="1250" dirty="0"/>
           </a:p>
         </p:txBody>
       </p:sp>
@@ -2062,385 +2058,411 @@
         </p:nvSpPr>
         <p:spPr>
           <a:xfrm>
-            <a:off x="5212080" y="1051560"/>
-            <a:ext cx="3108960" cy="274320"/>
-          </a:xfrm>
-          <a:prstGeom prst="rect">
-            <a:avLst/>
-          </a:prstGeom>
-          <a:noFill/>
-          <a:ln/>
-        </p:spPr>
-        <p:txBody>
-          <a:bodyPr wrap="square" lIns="0" tIns="0" rIns="0" bIns="0" rtlCol="0" anchor="t"/>
-          <a:lstStyle/>
-          <a:p>
-            <a:pPr indent="0" marL="0">
-              <a:buNone/>
-            </a:pPr>
-            <a:r>
-              <a:rPr lang="en-US" sz="1600" b="1" dirty="0">
+            <a:off x="3767328" y="3465576"/>
+            <a:ext cx="1609344" cy="182880"/>
+          </a:xfrm>
+          <a:prstGeom prst="rect">
+            <a:avLst/>
+          </a:prstGeom>
+          <a:noFill/>
+          <a:ln/>
+        </p:spPr>
+        <p:txBody>
+          <a:bodyPr wrap="square" lIns="0" tIns="0" rIns="0" bIns="0" rtlCol="0" anchor="t"/>
+          <a:lstStyle/>
+          <a:p>
+            <a:pPr algn="ctr" indent="0" marL="0">
+              <a:buNone/>
+            </a:pPr>
+            <a:r>
+              <a:rPr lang="en-US" sz="950" dirty="0">
+                <a:solidFill>
+                  <a:srgbClr val="A1A1A6"/>
+                </a:solidFill>
+                <a:latin typeface="Helvetica Neue" pitchFamily="34" charset="0"/>
+                <a:ea typeface="Helvetica Neue" pitchFamily="34" charset="-122"/>
+                <a:cs typeface="Helvetica Neue" pitchFamily="34" charset="-120"/>
+              </a:rPr>
+              <a:t>nuy@uic.edu</a:t>
+            </a:r>
+            <a:endParaRPr lang="en-US" sz="950" dirty="0"/>
+          </a:p>
+        </p:txBody>
+      </p:sp>
+      <p:sp>
+        <p:nvSpPr>
+          <p:cNvPr id="14" name="Text 12"/>
+          <p:cNvSpPr txBox="1"/>
+          <p:nvPr/>
+        </p:nvSpPr>
+        <p:spPr>
+          <a:xfrm>
+            <a:off x="3767328" y="3648456"/>
+            <a:ext cx="1609344" cy="182880"/>
+          </a:xfrm>
+          <a:prstGeom prst="rect">
+            <a:avLst/>
+          </a:prstGeom>
+          <a:noFill/>
+          <a:ln/>
+        </p:spPr>
+        <p:txBody>
+          <a:bodyPr wrap="square" lIns="0" tIns="0" rIns="0" bIns="0" rtlCol="0" anchor="t"/>
+          <a:lstStyle/>
+          <a:p>
+            <a:pPr algn="ctr" indent="0" marL="0">
+              <a:buNone/>
+            </a:pPr>
+            <a:r>
+              <a:rPr lang="en-US" sz="950" dirty="0">
+                <a:solidFill>
+                  <a:srgbClr val="A1A1A6"/>
+                </a:solidFill>
+                <a:latin typeface="Helvetica Neue" pitchFamily="34" charset="0"/>
+                <a:ea typeface="Helvetica Neue" pitchFamily="34" charset="-122"/>
+                <a:cs typeface="Helvetica Neue" pitchFamily="34" charset="-120"/>
+              </a:rPr>
+              <a:t>github.com/NeoUy19</a:t>
+            </a:r>
+            <a:endParaRPr lang="en-US" sz="950" dirty="0"/>
+          </a:p>
+        </p:txBody>
+      </p:sp>
+      <p:sp>
+        <p:nvSpPr>
+          <p:cNvPr id="15" name="Text 13"/>
+          <p:cNvSpPr txBox="1"/>
+          <p:nvPr/>
+        </p:nvSpPr>
+        <p:spPr>
+          <a:xfrm>
+            <a:off x="5376672" y="3200400"/>
+            <a:ext cx="1609344" cy="237744"/>
+          </a:xfrm>
+          <a:prstGeom prst="rect">
+            <a:avLst/>
+          </a:prstGeom>
+          <a:noFill/>
+          <a:ln/>
+        </p:spPr>
+        <p:txBody>
+          <a:bodyPr wrap="square" lIns="0" tIns="0" rIns="0" bIns="0" rtlCol="0" anchor="t"/>
+          <a:lstStyle/>
+          <a:p>
+            <a:pPr algn="ctr" indent="0" marL="0">
+              <a:buNone/>
+            </a:pPr>
+            <a:r>
+              <a:rPr lang="en-US" sz="1250" b="1" dirty="0">
                 <a:solidFill>
                   <a:srgbClr val="FFFFFF"/>
                 </a:solidFill>
-                <a:latin typeface="Calibri" pitchFamily="34" charset="0"/>
-                <a:ea typeface="Calibri" pitchFamily="34" charset="-122"/>
-                <a:cs typeface="Calibri" pitchFamily="34" charset="-120"/>
-              </a:rPr>
-              <a:t>Kaled Dahleh</a:t>
-            </a:r>
-            <a:endParaRPr lang="en-US" sz="1600" dirty="0"/>
-          </a:p>
-        </p:txBody>
-      </p:sp>
-      <p:sp>
-        <p:nvSpPr>
-          <p:cNvPr id="14" name="Text 12"/>
-          <p:cNvSpPr txBox="1"/>
-          <p:nvPr/>
-        </p:nvSpPr>
-        <p:spPr>
-          <a:xfrm>
-            <a:off x="5212080" y="1344168"/>
-            <a:ext cx="3108960" cy="219456"/>
-          </a:xfrm>
-          <a:prstGeom prst="rect">
-            <a:avLst/>
-          </a:prstGeom>
-          <a:noFill/>
-          <a:ln/>
-        </p:spPr>
-        <p:txBody>
-          <a:bodyPr wrap="square" lIns="0" tIns="0" rIns="0" bIns="0" rtlCol="0" anchor="t"/>
-          <a:lstStyle/>
-          <a:p>
-            <a:pPr indent="0" marL="0">
-              <a:buNone/>
-            </a:pPr>
-            <a:r>
-              <a:rPr lang="en-US" sz="1100" dirty="0">
-                <a:solidFill>
-                  <a:srgbClr val="FF6B4A"/>
-                </a:solidFill>
-                <a:latin typeface="Calibri" pitchFamily="34" charset="0"/>
-                <a:ea typeface="Calibri" pitchFamily="34" charset="-122"/>
-                <a:cs typeface="Calibri" pitchFamily="34" charset="-120"/>
-              </a:rPr>
-              <a:t>[ netid ]@uic.edu   ·   github.com/[ handle ]</a:t>
-            </a:r>
-            <a:endParaRPr lang="en-US" sz="1100" dirty="0"/>
-          </a:p>
-        </p:txBody>
-      </p:sp>
-      <p:sp>
-        <p:nvSpPr>
-          <p:cNvPr id="15" name="Text 13"/>
-          <p:cNvSpPr txBox="1"/>
-          <p:nvPr/>
-        </p:nvSpPr>
-        <p:spPr>
-          <a:xfrm>
-            <a:off x="5212080" y="1746504"/>
-            <a:ext cx="3108960" cy="274320"/>
-          </a:xfrm>
-          <a:prstGeom prst="rect">
-            <a:avLst/>
-          </a:prstGeom>
-          <a:noFill/>
-          <a:ln/>
-        </p:spPr>
-        <p:txBody>
-          <a:bodyPr wrap="square" lIns="0" tIns="0" rIns="0" bIns="0" rtlCol="0" anchor="t"/>
-          <a:lstStyle/>
-          <a:p>
-            <a:pPr indent="0" marL="0">
-              <a:buNone/>
-            </a:pPr>
-            <a:r>
-              <a:rPr lang="en-US" sz="1600" b="1" dirty="0">
+                <a:latin typeface="Helvetica Neue" pitchFamily="34" charset="0"/>
+                <a:ea typeface="Helvetica Neue" pitchFamily="34" charset="-122"/>
+                <a:cs typeface="Helvetica Neue" pitchFamily="34" charset="-120"/>
+              </a:rPr>
+              <a:t>Anlil Iwas</a:t>
+            </a:r>
+            <a:endParaRPr lang="en-US" sz="1250" dirty="0"/>
+          </a:p>
+        </p:txBody>
+      </p:sp>
+      <p:sp>
+        <p:nvSpPr>
+          <p:cNvPr id="16" name="Text 14"/>
+          <p:cNvSpPr txBox="1"/>
+          <p:nvPr/>
+        </p:nvSpPr>
+        <p:spPr>
+          <a:xfrm>
+            <a:off x="5376672" y="3465576"/>
+            <a:ext cx="1609344" cy="182880"/>
+          </a:xfrm>
+          <a:prstGeom prst="rect">
+            <a:avLst/>
+          </a:prstGeom>
+          <a:noFill/>
+          <a:ln/>
+        </p:spPr>
+        <p:txBody>
+          <a:bodyPr wrap="square" lIns="0" tIns="0" rIns="0" bIns="0" rtlCol="0" anchor="t"/>
+          <a:lstStyle/>
+          <a:p>
+            <a:pPr algn="ctr" indent="0" marL="0">
+              <a:buNone/>
+            </a:pPr>
+            <a:r>
+              <a:rPr lang="en-US" sz="950" dirty="0">
+                <a:solidFill>
+                  <a:srgbClr val="A1A1A6"/>
+                </a:solidFill>
+                <a:latin typeface="Helvetica Neue" pitchFamily="34" charset="0"/>
+                <a:ea typeface="Helvetica Neue" pitchFamily="34" charset="-122"/>
+                <a:cs typeface="Helvetica Neue" pitchFamily="34" charset="-120"/>
+              </a:rPr>
+              <a:t>aiwas2@uic.edu</a:t>
+            </a:r>
+            <a:endParaRPr lang="en-US" sz="950" dirty="0"/>
+          </a:p>
+        </p:txBody>
+      </p:sp>
+      <p:sp>
+        <p:nvSpPr>
+          <p:cNvPr id="17" name="Text 15"/>
+          <p:cNvSpPr txBox="1"/>
+          <p:nvPr/>
+        </p:nvSpPr>
+        <p:spPr>
+          <a:xfrm>
+            <a:off x="5376672" y="3648456"/>
+            <a:ext cx="1609344" cy="182880"/>
+          </a:xfrm>
+          <a:prstGeom prst="rect">
+            <a:avLst/>
+          </a:prstGeom>
+          <a:noFill/>
+          <a:ln/>
+        </p:spPr>
+        <p:txBody>
+          <a:bodyPr wrap="square" lIns="0" tIns="0" rIns="0" bIns="0" rtlCol="0" anchor="t"/>
+          <a:lstStyle/>
+          <a:p>
+            <a:pPr algn="ctr" indent="0" marL="0">
+              <a:buNone/>
+            </a:pPr>
+            <a:r>
+              <a:rPr lang="en-US" sz="950" dirty="0">
+                <a:solidFill>
+                  <a:srgbClr val="A1A1A6"/>
+                </a:solidFill>
+                <a:latin typeface="Helvetica Neue" pitchFamily="34" charset="0"/>
+                <a:ea typeface="Helvetica Neue" pitchFamily="34" charset="-122"/>
+                <a:cs typeface="Helvetica Neue" pitchFamily="34" charset="-120"/>
+              </a:rPr>
+              <a:t>github.com/Iwas1512</a:t>
+            </a:r>
+            <a:endParaRPr lang="en-US" sz="950" dirty="0"/>
+          </a:p>
+        </p:txBody>
+      </p:sp>
+      <p:sp>
+        <p:nvSpPr>
+          <p:cNvPr id="18" name="Text 16"/>
+          <p:cNvSpPr txBox="1"/>
+          <p:nvPr/>
+        </p:nvSpPr>
+        <p:spPr>
+          <a:xfrm>
+            <a:off x="6986016" y="3200400"/>
+            <a:ext cx="1609344" cy="237744"/>
+          </a:xfrm>
+          <a:prstGeom prst="rect">
+            <a:avLst/>
+          </a:prstGeom>
+          <a:noFill/>
+          <a:ln/>
+        </p:spPr>
+        <p:txBody>
+          <a:bodyPr wrap="square" lIns="0" tIns="0" rIns="0" bIns="0" rtlCol="0" anchor="t"/>
+          <a:lstStyle/>
+          <a:p>
+            <a:pPr algn="ctr" indent="0" marL="0">
+              <a:buNone/>
+            </a:pPr>
+            <a:r>
+              <a:rPr lang="en-US" sz="1250" b="1" dirty="0">
                 <a:solidFill>
                   <a:srgbClr val="FFFFFF"/>
                 </a:solidFill>
-                <a:latin typeface="Calibri" pitchFamily="34" charset="0"/>
-                <a:ea typeface="Calibri" pitchFamily="34" charset="-122"/>
-                <a:cs typeface="Calibri" pitchFamily="34" charset="-120"/>
-              </a:rPr>
-              <a:t>Musa Tabally</a:t>
-            </a:r>
-            <a:endParaRPr lang="en-US" sz="1600" dirty="0"/>
-          </a:p>
-        </p:txBody>
-      </p:sp>
-      <p:sp>
-        <p:nvSpPr>
-          <p:cNvPr id="16" name="Text 14"/>
-          <p:cNvSpPr txBox="1"/>
-          <p:nvPr/>
-        </p:nvSpPr>
-        <p:spPr>
-          <a:xfrm>
-            <a:off x="5212080" y="2039112"/>
-            <a:ext cx="3108960" cy="219456"/>
-          </a:xfrm>
-          <a:prstGeom prst="rect">
-            <a:avLst/>
-          </a:prstGeom>
-          <a:noFill/>
-          <a:ln/>
-        </p:spPr>
-        <p:txBody>
-          <a:bodyPr wrap="square" lIns="0" tIns="0" rIns="0" bIns="0" rtlCol="0" anchor="t"/>
-          <a:lstStyle/>
-          <a:p>
-            <a:pPr indent="0" marL="0">
-              <a:buNone/>
-            </a:pPr>
-            <a:r>
-              <a:rPr lang="en-US" sz="1100" dirty="0">
-                <a:solidFill>
-                  <a:srgbClr val="FF6B4A"/>
-                </a:solidFill>
-                <a:latin typeface="Calibri" pitchFamily="34" charset="0"/>
-                <a:ea typeface="Calibri" pitchFamily="34" charset="-122"/>
-                <a:cs typeface="Calibri" pitchFamily="34" charset="-120"/>
-              </a:rPr>
-              <a:t>[ netid ]@uic.edu   ·   github.com/[ handle ]</a:t>
-            </a:r>
-            <a:endParaRPr lang="en-US" sz="1100" dirty="0"/>
-          </a:p>
-        </p:txBody>
-      </p:sp>
-      <p:sp>
-        <p:nvSpPr>
-          <p:cNvPr id="17" name="Text 15"/>
-          <p:cNvSpPr txBox="1"/>
-          <p:nvPr/>
-        </p:nvSpPr>
-        <p:spPr>
-          <a:xfrm>
-            <a:off x="5212080" y="2441448"/>
-            <a:ext cx="3108960" cy="274320"/>
-          </a:xfrm>
-          <a:prstGeom prst="rect">
-            <a:avLst/>
-          </a:prstGeom>
-          <a:noFill/>
-          <a:ln/>
-        </p:spPr>
-        <p:txBody>
-          <a:bodyPr wrap="square" lIns="0" tIns="0" rIns="0" bIns="0" rtlCol="0" anchor="t"/>
-          <a:lstStyle/>
-          <a:p>
-            <a:pPr indent="0" marL="0">
-              <a:buNone/>
-            </a:pPr>
-            <a:r>
-              <a:rPr lang="en-US" sz="1600" b="1" dirty="0">
+                <a:latin typeface="Helvetica Neue" pitchFamily="34" charset="0"/>
+                <a:ea typeface="Helvetica Neue" pitchFamily="34" charset="-122"/>
+                <a:cs typeface="Helvetica Neue" pitchFamily="34" charset="-120"/>
+              </a:rPr>
+              <a:t>Adi Latic</a:t>
+            </a:r>
+            <a:endParaRPr lang="en-US" sz="1250" dirty="0"/>
+          </a:p>
+        </p:txBody>
+      </p:sp>
+      <p:sp>
+        <p:nvSpPr>
+          <p:cNvPr id="19" name="Text 17"/>
+          <p:cNvSpPr txBox="1"/>
+          <p:nvPr/>
+        </p:nvSpPr>
+        <p:spPr>
+          <a:xfrm>
+            <a:off x="6986016" y="3465576"/>
+            <a:ext cx="1609344" cy="182880"/>
+          </a:xfrm>
+          <a:prstGeom prst="rect">
+            <a:avLst/>
+          </a:prstGeom>
+          <a:noFill/>
+          <a:ln/>
+        </p:spPr>
+        <p:txBody>
+          <a:bodyPr wrap="square" lIns="0" tIns="0" rIns="0" bIns="0" rtlCol="0" anchor="t"/>
+          <a:lstStyle/>
+          <a:p>
+            <a:pPr algn="ctr" indent="0" marL="0">
+              <a:buNone/>
+            </a:pPr>
+            <a:r>
+              <a:rPr lang="en-US" sz="950" dirty="0">
+                <a:solidFill>
+                  <a:srgbClr val="A1A1A6"/>
+                </a:solidFill>
+                <a:latin typeface="Helvetica Neue" pitchFamily="34" charset="0"/>
+                <a:ea typeface="Helvetica Neue" pitchFamily="34" charset="-122"/>
+                <a:cs typeface="Helvetica Neue" pitchFamily="34" charset="-120"/>
+              </a:rPr>
+              <a:t>alatic2@uic.edu</a:t>
+            </a:r>
+            <a:endParaRPr lang="en-US" sz="950" dirty="0"/>
+          </a:p>
+        </p:txBody>
+      </p:sp>
+      <p:sp>
+        <p:nvSpPr>
+          <p:cNvPr id="20" name="Text 18"/>
+          <p:cNvSpPr txBox="1"/>
+          <p:nvPr/>
+        </p:nvSpPr>
+        <p:spPr>
+          <a:xfrm>
+            <a:off x="6986016" y="3648456"/>
+            <a:ext cx="1609344" cy="182880"/>
+          </a:xfrm>
+          <a:prstGeom prst="rect">
+            <a:avLst/>
+          </a:prstGeom>
+          <a:noFill/>
+          <a:ln/>
+        </p:spPr>
+        <p:txBody>
+          <a:bodyPr wrap="square" lIns="0" tIns="0" rIns="0" bIns="0" rtlCol="0" anchor="t"/>
+          <a:lstStyle/>
+          <a:p>
+            <a:pPr algn="ctr" indent="0" marL="0">
+              <a:buNone/>
+            </a:pPr>
+            <a:r>
+              <a:rPr lang="en-US" sz="950" dirty="0">
+                <a:solidFill>
+                  <a:srgbClr val="A1A1A6"/>
+                </a:solidFill>
+                <a:latin typeface="Helvetica Neue" pitchFamily="34" charset="0"/>
+                <a:ea typeface="Helvetica Neue" pitchFamily="34" charset="-122"/>
+                <a:cs typeface="Helvetica Neue" pitchFamily="34" charset="-120"/>
+              </a:rPr>
+              <a:t>github.com/ADILATIC</a:t>
+            </a:r>
+            <a:endParaRPr lang="en-US" sz="950" dirty="0"/>
+          </a:p>
+        </p:txBody>
+      </p:sp>
+      <p:sp>
+        <p:nvSpPr>
+          <p:cNvPr id="21" name="Shape 19"/>
+          <p:cNvSpPr/>
+          <p:nvPr/>
+        </p:nvSpPr>
+        <p:spPr>
+          <a:xfrm>
+            <a:off x="548640" y="4023360"/>
+            <a:ext cx="8046720" cy="0"/>
+          </a:xfrm>
+          <a:prstGeom prst="line">
+            <a:avLst/>
+          </a:prstGeom>
+          <a:noFill/>
+          <a:ln w="6350">
+            <a:solidFill>
+              <a:srgbClr val="3A3A3C"/>
+            </a:solidFill>
+            <a:prstDash val="solid"/>
+          </a:ln>
+        </p:spPr>
+      </p:sp>
+      <p:sp>
+        <p:nvSpPr>
+          <p:cNvPr id="22" name="Text 20"/>
+          <p:cNvSpPr txBox="1"/>
+          <p:nvPr/>
+        </p:nvSpPr>
+        <p:spPr>
+          <a:xfrm>
+            <a:off x="548640" y="4224528"/>
+            <a:ext cx="8046720" cy="228600"/>
+          </a:xfrm>
+          <a:prstGeom prst="rect">
+            <a:avLst/>
+          </a:prstGeom>
+          <a:noFill/>
+          <a:ln/>
+        </p:spPr>
+        <p:txBody>
+          <a:bodyPr wrap="square" lIns="0" tIns="0" rIns="0" bIns="0" rtlCol="0" anchor="ctr"/>
+          <a:lstStyle/>
+          <a:p>
+            <a:pPr algn="ctr" indent="0" marL="0">
+              <a:buNone/>
+            </a:pPr>
+            <a:r>
+              <a:rPr lang="en-US" sz="1050" dirty="0">
+                <a:solidFill>
+                  <a:srgbClr val="A1A1A6"/>
+                </a:solidFill>
+                <a:latin typeface="Helvetica Neue" pitchFamily="34" charset="0"/>
+                <a:ea typeface="Helvetica Neue" pitchFamily="34" charset="-122"/>
+                <a:cs typeface="Helvetica Neue" pitchFamily="34" charset="-120"/>
+              </a:rPr>
+              <a:t>Repo  </a:t>
+            </a:r>
+            <a:pPr algn="ctr" indent="0" marL="0">
+              <a:buNone/>
+            </a:pPr>
+            <a:r>
+              <a:rPr lang="en-US" sz="1050" dirty="0">
                 <a:solidFill>
                   <a:srgbClr val="FFFFFF"/>
                 </a:solidFill>
-                <a:latin typeface="Calibri" pitchFamily="34" charset="0"/>
-                <a:ea typeface="Calibri" pitchFamily="34" charset="-122"/>
-                <a:cs typeface="Calibri" pitchFamily="34" charset="-120"/>
-              </a:rPr>
-              <a:t>Neo Uy</a:t>
-            </a:r>
-            <a:endParaRPr lang="en-US" sz="1600" dirty="0"/>
-          </a:p>
-        </p:txBody>
-      </p:sp>
-      <p:sp>
-        <p:nvSpPr>
-          <p:cNvPr id="18" name="Text 16"/>
-          <p:cNvSpPr txBox="1"/>
-          <p:nvPr/>
-        </p:nvSpPr>
-        <p:spPr>
-          <a:xfrm>
-            <a:off x="5212080" y="2734056"/>
-            <a:ext cx="3108960" cy="219456"/>
-          </a:xfrm>
-          <a:prstGeom prst="rect">
-            <a:avLst/>
-          </a:prstGeom>
-          <a:noFill/>
-          <a:ln/>
-        </p:spPr>
-        <p:txBody>
-          <a:bodyPr wrap="square" lIns="0" tIns="0" rIns="0" bIns="0" rtlCol="0" anchor="t"/>
-          <a:lstStyle/>
-          <a:p>
-            <a:pPr indent="0" marL="0">
-              <a:buNone/>
-            </a:pPr>
-            <a:r>
-              <a:rPr lang="en-US" sz="1100" dirty="0">
-                <a:solidFill>
-                  <a:srgbClr val="FF6B4A"/>
-                </a:solidFill>
-                <a:latin typeface="Calibri" pitchFamily="34" charset="0"/>
-                <a:ea typeface="Calibri" pitchFamily="34" charset="-122"/>
-                <a:cs typeface="Calibri" pitchFamily="34" charset="-120"/>
-              </a:rPr>
-              <a:t>[ netid ]@uic.edu   ·   github.com/[ handle ]</a:t>
-            </a:r>
-            <a:endParaRPr lang="en-US" sz="1100" dirty="0"/>
-          </a:p>
-        </p:txBody>
-      </p:sp>
-      <p:sp>
-        <p:nvSpPr>
-          <p:cNvPr id="19" name="Text 17"/>
-          <p:cNvSpPr txBox="1"/>
-          <p:nvPr/>
-        </p:nvSpPr>
-        <p:spPr>
-          <a:xfrm>
-            <a:off x="5212080" y="3136392"/>
-            <a:ext cx="3108960" cy="274320"/>
-          </a:xfrm>
-          <a:prstGeom prst="rect">
-            <a:avLst/>
-          </a:prstGeom>
-          <a:noFill/>
-          <a:ln/>
-        </p:spPr>
-        <p:txBody>
-          <a:bodyPr wrap="square" lIns="0" tIns="0" rIns="0" bIns="0" rtlCol="0" anchor="t"/>
-          <a:lstStyle/>
-          <a:p>
-            <a:pPr indent="0" marL="0">
-              <a:buNone/>
-            </a:pPr>
-            <a:r>
-              <a:rPr lang="en-US" sz="1600" b="1" dirty="0">
-                <a:solidFill>
-                  <a:srgbClr val="FFFFFF"/>
-                </a:solidFill>
-                <a:latin typeface="Calibri" pitchFamily="34" charset="0"/>
-                <a:ea typeface="Calibri" pitchFamily="34" charset="-122"/>
-                <a:cs typeface="Calibri" pitchFamily="34" charset="-120"/>
-              </a:rPr>
-              <a:t>Anlil Iwas</a:t>
-            </a:r>
-            <a:endParaRPr lang="en-US" sz="1600" dirty="0"/>
-          </a:p>
-        </p:txBody>
-      </p:sp>
-      <p:sp>
-        <p:nvSpPr>
-          <p:cNvPr id="20" name="Text 18"/>
-          <p:cNvSpPr txBox="1"/>
-          <p:nvPr/>
-        </p:nvSpPr>
-        <p:spPr>
-          <a:xfrm>
-            <a:off x="5212080" y="3429000"/>
-            <a:ext cx="3108960" cy="219456"/>
-          </a:xfrm>
-          <a:prstGeom prst="rect">
-            <a:avLst/>
-          </a:prstGeom>
-          <a:noFill/>
-          <a:ln/>
-        </p:spPr>
-        <p:txBody>
-          <a:bodyPr wrap="square" lIns="0" tIns="0" rIns="0" bIns="0" rtlCol="0" anchor="t"/>
-          <a:lstStyle/>
-          <a:p>
-            <a:pPr indent="0" marL="0">
-              <a:buNone/>
-            </a:pPr>
-            <a:r>
-              <a:rPr lang="en-US" sz="1100" dirty="0">
-                <a:solidFill>
-                  <a:srgbClr val="FF6B4A"/>
-                </a:solidFill>
-                <a:latin typeface="Calibri" pitchFamily="34" charset="0"/>
-                <a:ea typeface="Calibri" pitchFamily="34" charset="-122"/>
-                <a:cs typeface="Calibri" pitchFamily="34" charset="-120"/>
-              </a:rPr>
-              <a:t>[ netid ]@uic.edu   ·   github.com/[ handle ]</a:t>
-            </a:r>
-            <a:endParaRPr lang="en-US" sz="1100" dirty="0"/>
-          </a:p>
-        </p:txBody>
-      </p:sp>
-      <p:sp>
-        <p:nvSpPr>
-          <p:cNvPr id="21" name="Text 19"/>
-          <p:cNvSpPr txBox="1"/>
-          <p:nvPr/>
-        </p:nvSpPr>
-        <p:spPr>
-          <a:xfrm>
-            <a:off x="5212080" y="3831336"/>
-            <a:ext cx="3108960" cy="274320"/>
-          </a:xfrm>
-          <a:prstGeom prst="rect">
-            <a:avLst/>
-          </a:prstGeom>
-          <a:noFill/>
-          <a:ln/>
-        </p:spPr>
-        <p:txBody>
-          <a:bodyPr wrap="square" lIns="0" tIns="0" rIns="0" bIns="0" rtlCol="0" anchor="t"/>
-          <a:lstStyle/>
-          <a:p>
-            <a:pPr indent="0" marL="0">
-              <a:buNone/>
-            </a:pPr>
-            <a:r>
-              <a:rPr lang="en-US" sz="1600" b="1" dirty="0">
-                <a:solidFill>
-                  <a:srgbClr val="FFFFFF"/>
-                </a:solidFill>
-                <a:latin typeface="Calibri" pitchFamily="34" charset="0"/>
-                <a:ea typeface="Calibri" pitchFamily="34" charset="-122"/>
-                <a:cs typeface="Calibri" pitchFamily="34" charset="-120"/>
-              </a:rPr>
-              <a:t>Adi Latic</a:t>
-            </a:r>
-            <a:endParaRPr lang="en-US" sz="1600" dirty="0"/>
-          </a:p>
-        </p:txBody>
-      </p:sp>
-      <p:sp>
-        <p:nvSpPr>
-          <p:cNvPr id="22" name="Text 20"/>
-          <p:cNvSpPr txBox="1"/>
-          <p:nvPr/>
-        </p:nvSpPr>
-        <p:spPr>
-          <a:xfrm>
-            <a:off x="5212080" y="4123944"/>
-            <a:ext cx="3108960" cy="219456"/>
-          </a:xfrm>
-          <a:prstGeom prst="rect">
-            <a:avLst/>
-          </a:prstGeom>
-          <a:noFill/>
-          <a:ln/>
-        </p:spPr>
-        <p:txBody>
-          <a:bodyPr wrap="square" lIns="0" tIns="0" rIns="0" bIns="0" rtlCol="0" anchor="t"/>
-          <a:lstStyle/>
-          <a:p>
-            <a:pPr indent="0" marL="0">
-              <a:buNone/>
-            </a:pPr>
-            <a:r>
-              <a:rPr lang="en-US" sz="1100" dirty="0">
-                <a:solidFill>
-                  <a:srgbClr val="FF6B4A"/>
-                </a:solidFill>
-                <a:latin typeface="Calibri" pitchFamily="34" charset="0"/>
-                <a:ea typeface="Calibri" pitchFamily="34" charset="-122"/>
-                <a:cs typeface="Calibri" pitchFamily="34" charset="-120"/>
-              </a:rPr>
-              <a:t>[ netid ]@uic.edu   ·   github.com/[ handle ]</a:t>
-            </a:r>
-            <a:endParaRPr lang="en-US" sz="1100" dirty="0"/>
+                <a:latin typeface="Helvetica Neue" pitchFamily="34" charset="0"/>
+                <a:ea typeface="Helvetica Neue" pitchFamily="34" charset="-122"/>
+                <a:cs typeface="Helvetica Neue" pitchFamily="34" charset="-120"/>
+              </a:rPr>
+              <a:t>github.com/Iwas1512/UnDetermined-Data-Modeling</a:t>
+            </a:r>
+            <a:pPr algn="ctr" indent="0" marL="0">
+              <a:buNone/>
+            </a:pPr>
+            <a:r>
+              <a:rPr lang="en-US" sz="1050" dirty="0">
+                <a:solidFill>
+                  <a:srgbClr val="A1A1A6"/>
+                </a:solidFill>
+                <a:latin typeface="Helvetica Neue" pitchFamily="34" charset="0"/>
+                <a:ea typeface="Helvetica Neue" pitchFamily="34" charset="-122"/>
+                <a:cs typeface="Helvetica Neue" pitchFamily="34" charset="-120"/>
+              </a:rPr>
+              <a:t>        Pitch recording  </a:t>
+            </a:r>
+            <a:pPr algn="ctr" indent="0" marL="0">
+              <a:buNone/>
+            </a:pPr>
+            <a:r>
+              <a:rPr lang="en-US" sz="1050" dirty="0">
+                <a:solidFill>
+                  <a:srgbClr val="2997FF"/>
+                </a:solidFill>
+                <a:latin typeface="Helvetica Neue" pitchFamily="34" charset="0"/>
+                <a:ea typeface="Helvetica Neue" pitchFamily="34" charset="-122"/>
+                <a:cs typeface="Helvetica Neue" pitchFamily="34" charset="-120"/>
+              </a:rPr>
+              <a:t>[ paste Zoom cloud link ]</a:t>
+            </a:r>
+            <a:endParaRPr lang="en-US" sz="1050" dirty="0"/>
           </a:p>
         </p:txBody>
       </p:sp>
@@ -2484,7 +2506,7 @@
         </p:nvSpPr>
         <p:spPr>
           <a:xfrm>
-            <a:off x="548640" y="365760"/>
+            <a:off x="548640" y="411480"/>
             <a:ext cx="8046720" cy="228600"/>
           </a:xfrm>
           <a:prstGeom prst="rect">
@@ -2501,15 +2523,132 @@
               <a:buNone/>
             </a:pPr>
             <a:r>
-              <a:rPr lang="en-US" sz="1100" b="1" spc="300" kern="0" dirty="0">
-                <a:solidFill>
-                  <a:srgbClr val="FF6B4A"/>
-                </a:solidFill>
-                <a:latin typeface="Calibri" pitchFamily="34" charset="0"/>
-                <a:ea typeface="Calibri" pitchFamily="34" charset="-122"/>
-                <a:cs typeface="Calibri" pitchFamily="34" charset="-120"/>
-              </a:rPr>
-              <a:t>THE PROBLEM</a:t>
+              <a:rPr lang="en-US" sz="1300" dirty="0">
+                <a:solidFill>
+                  <a:srgbClr val="6E6E73"/>
+                </a:solidFill>
+                <a:latin typeface="Helvetica Neue" pitchFamily="34" charset="0"/>
+                <a:ea typeface="Helvetica Neue" pitchFamily="34" charset="-122"/>
+                <a:cs typeface="Helvetica Neue" pitchFamily="34" charset="-120"/>
+              </a:rPr>
+              <a:t>Problem</a:t>
+            </a:r>
+            <a:endParaRPr lang="en-US" sz="1300" dirty="0"/>
+          </a:p>
+        </p:txBody>
+      </p:sp>
+      <p:sp>
+        <p:nvSpPr>
+          <p:cNvPr id="3" name="Text 1"/>
+          <p:cNvSpPr txBox="1"/>
+          <p:nvPr/>
+        </p:nvSpPr>
+        <p:spPr>
+          <a:xfrm>
+            <a:off x="548640" y="676656"/>
+            <a:ext cx="8046720" cy="502920"/>
+          </a:xfrm>
+          <a:prstGeom prst="rect">
+            <a:avLst/>
+          </a:prstGeom>
+          <a:noFill/>
+          <a:ln/>
+        </p:spPr>
+        <p:txBody>
+          <a:bodyPr wrap="square" lIns="0" tIns="0" rIns="0" bIns="0" rtlCol="0" anchor="t"/>
+          <a:lstStyle/>
+          <a:p>
+            <a:pPr indent="0" marL="0">
+              <a:buNone/>
+            </a:pPr>
+            <a:r>
+              <a:rPr lang="en-US" sz="3000" b="1" dirty="0">
+                <a:solidFill>
+                  <a:srgbClr val="1D1D1F"/>
+                </a:solidFill>
+                <a:latin typeface="Helvetica Neue" pitchFamily="34" charset="0"/>
+                <a:ea typeface="Helvetica Neue" pitchFamily="34" charset="-122"/>
+                <a:cs typeface="Helvetica Neue" pitchFamily="34" charset="-120"/>
+              </a:rPr>
+              <a:t>Do traders overestimate stock moves?</a:t>
+            </a:r>
+            <a:endParaRPr lang="en-US" sz="3000" dirty="0"/>
+          </a:p>
+        </p:txBody>
+      </p:sp>
+      <p:sp>
+        <p:nvSpPr>
+          <p:cNvPr id="4" name="Text 2"/>
+          <p:cNvSpPr txBox="1"/>
+          <p:nvPr/>
+        </p:nvSpPr>
+        <p:spPr>
+          <a:xfrm>
+            <a:off x="548640" y="1353312"/>
+            <a:ext cx="4617720" cy="219456"/>
+          </a:xfrm>
+          <a:prstGeom prst="rect">
+            <a:avLst/>
+          </a:prstGeom>
+          <a:noFill/>
+          <a:ln/>
+        </p:spPr>
+        <p:txBody>
+          <a:bodyPr wrap="square" lIns="0" tIns="0" rIns="0" bIns="0" rtlCol="0" anchor="t"/>
+          <a:lstStyle/>
+          <a:p>
+            <a:pPr indent="0" marL="0">
+              <a:buNone/>
+            </a:pPr>
+            <a:r>
+              <a:rPr lang="en-US" sz="1300" b="1" dirty="0">
+                <a:solidFill>
+                  <a:srgbClr val="1D1D1F"/>
+                </a:solidFill>
+                <a:latin typeface="Helvetica Neue" pitchFamily="34" charset="0"/>
+                <a:ea typeface="Helvetica Neue" pitchFamily="34" charset="-122"/>
+                <a:cs typeface="Helvetica Neue" pitchFamily="34" charset="-120"/>
+              </a:rPr>
+              <a:t>The question</a:t>
+            </a:r>
+            <a:endParaRPr lang="en-US" sz="1300" dirty="0"/>
+          </a:p>
+        </p:txBody>
+      </p:sp>
+      <p:sp>
+        <p:nvSpPr>
+          <p:cNvPr id="5" name="Text 3"/>
+          <p:cNvSpPr txBox="1"/>
+          <p:nvPr/>
+        </p:nvSpPr>
+        <p:spPr>
+          <a:xfrm>
+            <a:off x="548640" y="1600200"/>
+            <a:ext cx="4617720" cy="530352"/>
+          </a:xfrm>
+          <a:prstGeom prst="rect">
+            <a:avLst/>
+          </a:prstGeom>
+          <a:noFill/>
+          <a:ln/>
+        </p:spPr>
+        <p:txBody>
+          <a:bodyPr wrap="square" lIns="0" tIns="0" rIns="0" bIns="0" rtlCol="0" anchor="t"/>
+          <a:lstStyle/>
+          <a:p>
+            <a:pPr indent="0" marL="0">
+              <a:buNone/>
+            </a:pPr>
+            <a:r>
+              <a:rPr lang="en-US" sz="1100" dirty="0">
+                <a:solidFill>
+                  <a:srgbClr val="424245"/>
+                </a:solidFill>
+                <a:latin typeface="Helvetica Neue" pitchFamily="34" charset="0"/>
+                <a:ea typeface="Helvetica Neue" pitchFamily="34" charset="-122"/>
+                <a:cs typeface="Helvetica Neue" pitchFamily="34" charset="-120"/>
+              </a:rPr>
+              <a:t>Option prices show how much traders think a stock will move over the next month. We compare that guess to how much the stock actually moved. Do traders usually guess too high, and can we predict when?</a:t>
             </a:r>
             <a:endParaRPr lang="en-US" sz="1100" dirty="0"/>
           </a:p>
@@ -2517,14 +2656,14 @@
       </p:sp>
       <p:sp>
         <p:nvSpPr>
-          <p:cNvPr id="3" name="Text 1"/>
-          <p:cNvSpPr txBox="1"/>
-          <p:nvPr/>
-        </p:nvSpPr>
-        <p:spPr>
-          <a:xfrm>
-            <a:off x="548640" y="621792"/>
-            <a:ext cx="8046720" cy="502920"/>
+          <p:cNvPr id="6" name="Text 4"/>
+          <p:cNvSpPr txBox="1"/>
+          <p:nvPr/>
+        </p:nvSpPr>
+        <p:spPr>
+          <a:xfrm>
+            <a:off x="548640" y="2176272"/>
+            <a:ext cx="4617720" cy="219456"/>
           </a:xfrm>
           <a:prstGeom prst="rect">
             <a:avLst/>
@@ -2540,30 +2679,30 @@
               <a:buNone/>
             </a:pPr>
             <a:r>
-              <a:rPr lang="en-US" sz="3000" b="1" dirty="0">
-                <a:solidFill>
-                  <a:srgbClr val="1F2A2A"/>
-                </a:solidFill>
-                <a:latin typeface="Calibri" pitchFamily="34" charset="0"/>
-                <a:ea typeface="Calibri" pitchFamily="34" charset="-122"/>
-                <a:cs typeface="Calibri" pitchFamily="34" charset="-120"/>
-              </a:rPr>
-              <a:t>Do traders overestimate stock moves?</a:t>
-            </a:r>
-            <a:endParaRPr lang="en-US" sz="3000" dirty="0"/>
-          </a:p>
-        </p:txBody>
-      </p:sp>
-      <p:sp>
-        <p:nvSpPr>
-          <p:cNvPr id="4" name="Text 2"/>
-          <p:cNvSpPr txBox="1"/>
-          <p:nvPr/>
-        </p:nvSpPr>
-        <p:spPr>
-          <a:xfrm>
-            <a:off x="548640" y="1280160"/>
-            <a:ext cx="4754880" cy="219456"/>
+              <a:rPr lang="en-US" sz="1300" b="1" dirty="0">
+                <a:solidFill>
+                  <a:srgbClr val="1D1D1F"/>
+                </a:solidFill>
+                <a:latin typeface="Helvetica Neue" pitchFamily="34" charset="0"/>
+                <a:ea typeface="Helvetica Neue" pitchFamily="34" charset="-122"/>
+                <a:cs typeface="Helvetica Neue" pitchFamily="34" charset="-120"/>
+              </a:rPr>
+              <a:t>Why it matters</a:t>
+            </a:r>
+            <a:endParaRPr lang="en-US" sz="1300" dirty="0"/>
+          </a:p>
+        </p:txBody>
+      </p:sp>
+      <p:sp>
+        <p:nvSpPr>
+          <p:cNvPr id="7" name="Text 5"/>
+          <p:cNvSpPr txBox="1"/>
+          <p:nvPr/>
+        </p:nvSpPr>
+        <p:spPr>
+          <a:xfrm>
+            <a:off x="548640" y="2423160"/>
+            <a:ext cx="4617720" cy="530352"/>
           </a:xfrm>
           <a:prstGeom prst="rect">
             <a:avLst/>
@@ -2579,15 +2718,54 @@
               <a:buNone/>
             </a:pPr>
             <a:r>
+              <a:rPr lang="en-US" sz="1100" dirty="0">
+                <a:solidFill>
+                  <a:srgbClr val="424245"/>
+                </a:solidFill>
+                <a:latin typeface="Helvetica Neue" pitchFamily="34" charset="0"/>
+                <a:ea typeface="Helvetica Neue" pitchFamily="34" charset="-122"/>
+                <a:cs typeface="Helvetica Neue" pitchFamily="34" charset="-120"/>
+              </a:rPr>
+              <a:t>If traders consistently guess too high, people buying options keep overpaying. That matters to anyone using options to protect their savings.</a:t>
+            </a:r>
+            <a:endParaRPr lang="en-US" sz="1100" dirty="0"/>
+          </a:p>
+        </p:txBody>
+      </p:sp>
+      <p:sp>
+        <p:nvSpPr>
+          <p:cNvPr id="8" name="Text 6"/>
+          <p:cNvSpPr txBox="1"/>
+          <p:nvPr/>
+        </p:nvSpPr>
+        <p:spPr>
+          <a:xfrm>
+            <a:off x="548640" y="2999232"/>
+            <a:ext cx="4617720" cy="219456"/>
+          </a:xfrm>
+          <a:prstGeom prst="rect">
+            <a:avLst/>
+          </a:prstGeom>
+          <a:noFill/>
+          <a:ln/>
+        </p:spPr>
+        <p:txBody>
+          <a:bodyPr wrap="square" lIns="0" tIns="0" rIns="0" bIns="0" rtlCol="0" anchor="t"/>
+          <a:lstStyle/>
+          <a:p>
+            <a:pPr indent="0" marL="0">
+              <a:buNone/>
+            </a:pPr>
+            <a:r>
               <a:rPr lang="en-US" sz="1300" b="1" dirty="0">
                 <a:solidFill>
-                  <a:srgbClr val="0F2A2A"/>
-                </a:solidFill>
-                <a:latin typeface="Calibri" pitchFamily="34" charset="0"/>
-                <a:ea typeface="Calibri" pitchFamily="34" charset="-122"/>
-                <a:cs typeface="Calibri" pitchFamily="34" charset="-120"/>
-              </a:rPr>
-              <a:t>The question</a:t>
+                  <a:srgbClr val="1D1D1F"/>
+                </a:solidFill>
+                <a:latin typeface="Helvetica Neue" pitchFamily="34" charset="0"/>
+                <a:ea typeface="Helvetica Neue" pitchFamily="34" charset="-122"/>
+                <a:cs typeface="Helvetica Neue" pitchFamily="34" charset="-120"/>
+              </a:rPr>
+              <a:t>How we picked it</a:t>
             </a:r>
             <a:endParaRPr lang="en-US" sz="1300" dirty="0"/>
           </a:p>
@@ -2595,14 +2773,14 @@
       </p:sp>
       <p:sp>
         <p:nvSpPr>
-          <p:cNvPr id="5" name="Text 3"/>
-          <p:cNvSpPr txBox="1"/>
-          <p:nvPr/>
-        </p:nvSpPr>
-        <p:spPr>
-          <a:xfrm>
-            <a:off x="548640" y="1508760"/>
-            <a:ext cx="4754880" cy="502920"/>
+          <p:cNvPr id="9" name="Text 7"/>
+          <p:cNvSpPr txBox="1"/>
+          <p:nvPr/>
+        </p:nvSpPr>
+        <p:spPr>
+          <a:xfrm>
+            <a:off x="548640" y="3246120"/>
+            <a:ext cx="4617720" cy="530352"/>
           </a:xfrm>
           <a:prstGeom prst="rect">
             <a:avLst/>
@@ -2618,173 +2796,17 @@
               <a:buNone/>
             </a:pPr>
             <a:r>
-              <a:rPr lang="en-US" sz="1150" dirty="0">
-                <a:solidFill>
-                  <a:srgbClr val="1F2A2A"/>
-                </a:solidFill>
-                <a:latin typeface="Calibri" pitchFamily="34" charset="0"/>
-                <a:ea typeface="Calibri" pitchFamily="34" charset="-122"/>
-                <a:cs typeface="Calibri" pitchFamily="34" charset="-120"/>
-              </a:rPr>
-              <a:t>Option prices show how much traders think a stock will move over the next month. We compare that guess to how much the stock actually moved. Do traders usually guess too high, and can we predict when?</a:t>
-            </a:r>
-            <a:endParaRPr lang="en-US" sz="1150" dirty="0"/>
-          </a:p>
-        </p:txBody>
-      </p:sp>
-      <p:sp>
-        <p:nvSpPr>
-          <p:cNvPr id="6" name="Text 4"/>
-          <p:cNvSpPr txBox="1"/>
-          <p:nvPr/>
-        </p:nvSpPr>
-        <p:spPr>
-          <a:xfrm>
-            <a:off x="548640" y="2103120"/>
-            <a:ext cx="4754880" cy="219456"/>
-          </a:xfrm>
-          <a:prstGeom prst="rect">
-            <a:avLst/>
-          </a:prstGeom>
-          <a:noFill/>
-          <a:ln/>
-        </p:spPr>
-        <p:txBody>
-          <a:bodyPr wrap="square" lIns="0" tIns="0" rIns="0" bIns="0" rtlCol="0" anchor="t"/>
-          <a:lstStyle/>
-          <a:p>
-            <a:pPr indent="0" marL="0">
-              <a:buNone/>
-            </a:pPr>
-            <a:r>
-              <a:rPr lang="en-US" sz="1300" b="1" dirty="0">
-                <a:solidFill>
-                  <a:srgbClr val="0F2A2A"/>
-                </a:solidFill>
-                <a:latin typeface="Calibri" pitchFamily="34" charset="0"/>
-                <a:ea typeface="Calibri" pitchFamily="34" charset="-122"/>
-                <a:cs typeface="Calibri" pitchFamily="34" charset="-120"/>
-              </a:rPr>
-              <a:t>Why it matters</a:t>
-            </a:r>
-            <a:endParaRPr lang="en-US" sz="1300" dirty="0"/>
-          </a:p>
-        </p:txBody>
-      </p:sp>
-      <p:sp>
-        <p:nvSpPr>
-          <p:cNvPr id="7" name="Text 5"/>
-          <p:cNvSpPr txBox="1"/>
-          <p:nvPr/>
-        </p:nvSpPr>
-        <p:spPr>
-          <a:xfrm>
-            <a:off x="548640" y="2331720"/>
-            <a:ext cx="4754880" cy="502920"/>
-          </a:xfrm>
-          <a:prstGeom prst="rect">
-            <a:avLst/>
-          </a:prstGeom>
-          <a:noFill/>
-          <a:ln/>
-        </p:spPr>
-        <p:txBody>
-          <a:bodyPr wrap="square" lIns="0" tIns="0" rIns="0" bIns="0" rtlCol="0" anchor="t"/>
-          <a:lstStyle/>
-          <a:p>
-            <a:pPr indent="0" marL="0">
-              <a:buNone/>
-            </a:pPr>
-            <a:r>
-              <a:rPr lang="en-US" sz="1150" dirty="0">
-                <a:solidFill>
-                  <a:srgbClr val="1F2A2A"/>
-                </a:solidFill>
-                <a:latin typeface="Calibri" pitchFamily="34" charset="0"/>
-                <a:ea typeface="Calibri" pitchFamily="34" charset="-122"/>
-                <a:cs typeface="Calibri" pitchFamily="34" charset="-120"/>
-              </a:rPr>
-              <a:t>If traders consistently guess too high, people buying options keep overpaying. That matters to anyone using options to protect their savings.</a:t>
-            </a:r>
-            <a:endParaRPr lang="en-US" sz="1150" dirty="0"/>
-          </a:p>
-        </p:txBody>
-      </p:sp>
-      <p:sp>
-        <p:nvSpPr>
-          <p:cNvPr id="8" name="Text 6"/>
-          <p:cNvSpPr txBox="1"/>
-          <p:nvPr/>
-        </p:nvSpPr>
-        <p:spPr>
-          <a:xfrm>
-            <a:off x="548640" y="2926080"/>
-            <a:ext cx="4754880" cy="219456"/>
-          </a:xfrm>
-          <a:prstGeom prst="rect">
-            <a:avLst/>
-          </a:prstGeom>
-          <a:noFill/>
-          <a:ln/>
-        </p:spPr>
-        <p:txBody>
-          <a:bodyPr wrap="square" lIns="0" tIns="0" rIns="0" bIns="0" rtlCol="0" anchor="t"/>
-          <a:lstStyle/>
-          <a:p>
-            <a:pPr indent="0" marL="0">
-              <a:buNone/>
-            </a:pPr>
-            <a:r>
-              <a:rPr lang="en-US" sz="1300" b="1" dirty="0">
-                <a:solidFill>
-                  <a:srgbClr val="0F2A2A"/>
-                </a:solidFill>
-                <a:latin typeface="Calibri" pitchFamily="34" charset="0"/>
-                <a:ea typeface="Calibri" pitchFamily="34" charset="-122"/>
-                <a:cs typeface="Calibri" pitchFamily="34" charset="-120"/>
-              </a:rPr>
-              <a:t>How we picked it</a:t>
-            </a:r>
-            <a:endParaRPr lang="en-US" sz="1300" dirty="0"/>
-          </a:p>
-        </p:txBody>
-      </p:sp>
-      <p:sp>
-        <p:nvSpPr>
-          <p:cNvPr id="9" name="Text 7"/>
-          <p:cNvSpPr txBox="1"/>
-          <p:nvPr/>
-        </p:nvSpPr>
-        <p:spPr>
-          <a:xfrm>
-            <a:off x="548640" y="3154680"/>
-            <a:ext cx="4754880" cy="502920"/>
-          </a:xfrm>
-          <a:prstGeom prst="rect">
-            <a:avLst/>
-          </a:prstGeom>
-          <a:noFill/>
-          <a:ln/>
-        </p:spPr>
-        <p:txBody>
-          <a:bodyPr wrap="square" lIns="0" tIns="0" rIns="0" bIns="0" rtlCol="0" anchor="t"/>
-          <a:lstStyle/>
-          <a:p>
-            <a:pPr indent="0" marL="0">
-              <a:buNone/>
-            </a:pPr>
-            <a:r>
-              <a:rPr lang="en-US" sz="1150" dirty="0">
-                <a:solidFill>
-                  <a:srgbClr val="1F2A2A"/>
-                </a:solidFill>
-                <a:latin typeface="Calibri" pitchFamily="34" charset="0"/>
-                <a:ea typeface="Calibri" pitchFamily="34" charset="-122"/>
-                <a:cs typeface="Calibri" pitchFamily="34" charset="-120"/>
+              <a:rPr lang="en-US" sz="1100" dirty="0">
+                <a:solidFill>
+                  <a:srgbClr val="424245"/>
+                </a:solidFill>
+                <a:latin typeface="Helvetica Neue" pitchFamily="34" charset="0"/>
+                <a:ea typeface="Helvetica Neue" pitchFamily="34" charset="-122"/>
+                <a:cs typeface="Helvetica Neue" pitchFamily="34" charset="-120"/>
               </a:rPr>
               <a:t>One of us interned at an options trading firm this summer and wanted to test this with free, public data.</a:t>
             </a:r>
-            <a:endParaRPr lang="en-US" sz="1150" dirty="0"/>
+            <a:endParaRPr lang="en-US" sz="1100" dirty="0"/>
           </a:p>
         </p:txBody>
       </p:sp>
@@ -2796,20 +2818,20 @@
         </p:nvSpPr>
         <p:spPr>
           <a:xfrm>
-            <a:off x="5669280" y="1325880"/>
-            <a:ext cx="2926080" cy="2194560"/>
+            <a:off x="5394960" y="1371600"/>
+            <a:ext cx="3200400" cy="960120"/>
           </a:xfrm>
           <a:prstGeom prst="roundRect">
             <a:avLst>
-              <a:gd name="adj" fmla="val 3333"/>
+              <a:gd name="adj" fmla="val 15238"/>
             </a:avLst>
           </a:prstGeom>
           <a:solidFill>
-            <a:srgbClr val="E8F3F1"/>
+            <a:srgbClr val="F5F5F7"/>
           </a:solidFill>
           <a:ln w="12700">
             <a:solidFill>
-              <a:srgbClr val="E8F3F1"/>
+              <a:srgbClr val="F5F5F7"/>
             </a:solidFill>
             <a:prstDash val="solid"/>
           </a:ln>
@@ -2823,34 +2845,34 @@
         </p:nvSpPr>
         <p:spPr>
           <a:xfrm>
-            <a:off x="5897880" y="1463040"/>
-            <a:ext cx="2468880" cy="502920"/>
-          </a:xfrm>
-          <a:prstGeom prst="rect">
-            <a:avLst/>
-          </a:prstGeom>
-          <a:noFill/>
-          <a:ln/>
-        </p:spPr>
-        <p:txBody>
-          <a:bodyPr wrap="square" lIns="0" tIns="0" rIns="0" bIns="0" rtlCol="0" anchor="t"/>
+            <a:off x="5623560" y="1554480"/>
+            <a:ext cx="1600200" cy="594360"/>
+          </a:xfrm>
+          <a:prstGeom prst="rect">
+            <a:avLst/>
+          </a:prstGeom>
+          <a:noFill/>
+          <a:ln/>
+        </p:spPr>
+        <p:txBody>
+          <a:bodyPr wrap="square" lIns="0" tIns="0" rIns="0" bIns="0" rtlCol="0" anchor="ctr"/>
           <a:lstStyle/>
           <a:p>
             <a:pPr indent="0" marL="0">
               <a:buNone/>
             </a:pPr>
             <a:r>
-              <a:rPr lang="en-US" sz="3600" b="1" dirty="0">
-                <a:solidFill>
-                  <a:srgbClr val="0F2A2A"/>
-                </a:solidFill>
-                <a:latin typeface="Calibri" pitchFamily="34" charset="0"/>
-                <a:ea typeface="Calibri" pitchFamily="34" charset="-122"/>
-                <a:cs typeface="Calibri" pitchFamily="34" charset="-120"/>
+              <a:rPr lang="en-US" sz="3400" b="1" dirty="0">
+                <a:solidFill>
+                  <a:srgbClr val="1D1D1F"/>
+                </a:solidFill>
+                <a:latin typeface="Helvetica Neue" pitchFamily="34" charset="0"/>
+                <a:ea typeface="Helvetica Neue" pitchFamily="34" charset="-122"/>
+                <a:cs typeface="Helvetica Neue" pitchFamily="34" charset="-120"/>
               </a:rPr>
               <a:t>26.6%</a:t>
             </a:r>
-            <a:endParaRPr lang="en-US" sz="3600" dirty="0"/>
+            <a:endParaRPr lang="en-US" sz="3400" dirty="0"/>
           </a:p>
         </p:txBody>
       </p:sp>
@@ -2862,176 +2884,59 @@
         </p:nvSpPr>
         <p:spPr>
           <a:xfrm>
-            <a:off x="5897880" y="1965960"/>
-            <a:ext cx="2468880" cy="201168"/>
-          </a:xfrm>
-          <a:prstGeom prst="rect">
-            <a:avLst/>
-          </a:prstGeom>
-          <a:noFill/>
-          <a:ln/>
-        </p:spPr>
-        <p:txBody>
-          <a:bodyPr wrap="square" lIns="0" tIns="0" rIns="0" bIns="0" rtlCol="0" anchor="t"/>
+            <a:off x="7223760" y="1554480"/>
+            <a:ext cx="1234440" cy="594360"/>
+          </a:xfrm>
+          <a:prstGeom prst="rect">
+            <a:avLst/>
+          </a:prstGeom>
+          <a:noFill/>
+          <a:ln/>
+        </p:spPr>
+        <p:txBody>
+          <a:bodyPr wrap="square" lIns="0" tIns="0" rIns="0" bIns="0" rtlCol="0" anchor="ctr"/>
           <a:lstStyle/>
           <a:p>
             <a:pPr indent="0" marL="0">
               <a:buNone/>
             </a:pPr>
             <a:r>
-              <a:rPr lang="en-US" sz="1050" dirty="0">
-                <a:solidFill>
-                  <a:srgbClr val="5F7371"/>
-                </a:solidFill>
-                <a:latin typeface="Calibri" pitchFamily="34" charset="0"/>
-                <a:ea typeface="Calibri" pitchFamily="34" charset="-122"/>
-                <a:cs typeface="Calibri" pitchFamily="34" charset="-120"/>
+              <a:rPr lang="en-US" sz="1100" dirty="0">
+                <a:solidFill>
+                  <a:srgbClr val="6E6E73"/>
+                </a:solidFill>
+                <a:latin typeface="Helvetica Neue" pitchFamily="34" charset="0"/>
+                <a:ea typeface="Helvetica Neue" pitchFamily="34" charset="-122"/>
+                <a:cs typeface="Helvetica Neue" pitchFamily="34" charset="-120"/>
               </a:rPr>
               <a:t>what traders expected</a:t>
             </a:r>
-            <a:endParaRPr lang="en-US" sz="1050" dirty="0"/>
-          </a:p>
-        </p:txBody>
-      </p:sp>
-      <p:sp>
-        <p:nvSpPr>
-          <p:cNvPr id="13" name="Text 11"/>
-          <p:cNvSpPr txBox="1"/>
-          <p:nvPr/>
-        </p:nvSpPr>
-        <p:spPr>
-          <a:xfrm>
-            <a:off x="5897880" y="2286000"/>
-            <a:ext cx="2468880" cy="502920"/>
-          </a:xfrm>
-          <a:prstGeom prst="rect">
-            <a:avLst/>
-          </a:prstGeom>
-          <a:noFill/>
-          <a:ln/>
-        </p:spPr>
-        <p:txBody>
-          <a:bodyPr wrap="square" lIns="0" tIns="0" rIns="0" bIns="0" rtlCol="0" anchor="t"/>
-          <a:lstStyle/>
-          <a:p>
-            <a:pPr indent="0" marL="0">
-              <a:buNone/>
-            </a:pPr>
-            <a:r>
-              <a:rPr lang="en-US" sz="3600" b="1" dirty="0">
-                <a:solidFill>
-                  <a:srgbClr val="FF6B4A"/>
-                </a:solidFill>
-                <a:latin typeface="Calibri" pitchFamily="34" charset="0"/>
-                <a:ea typeface="Calibri" pitchFamily="34" charset="-122"/>
-                <a:cs typeface="Calibri" pitchFamily="34" charset="-120"/>
-              </a:rPr>
-              <a:t>22.4%</a:t>
-            </a:r>
-            <a:endParaRPr lang="en-US" sz="3600" dirty="0"/>
-          </a:p>
-        </p:txBody>
-      </p:sp>
-      <p:sp>
-        <p:nvSpPr>
-          <p:cNvPr id="14" name="Text 12"/>
-          <p:cNvSpPr txBox="1"/>
-          <p:nvPr/>
-        </p:nvSpPr>
-        <p:spPr>
-          <a:xfrm>
-            <a:off x="5897880" y="2788920"/>
-            <a:ext cx="2468880" cy="201168"/>
-          </a:xfrm>
-          <a:prstGeom prst="rect">
-            <a:avLst/>
-          </a:prstGeom>
-          <a:noFill/>
-          <a:ln/>
-        </p:spPr>
-        <p:txBody>
-          <a:bodyPr wrap="square" lIns="0" tIns="0" rIns="0" bIns="0" rtlCol="0" anchor="t"/>
-          <a:lstStyle/>
-          <a:p>
-            <a:pPr indent="0" marL="0">
-              <a:buNone/>
-            </a:pPr>
-            <a:r>
-              <a:rPr lang="en-US" sz="1050" dirty="0">
-                <a:solidFill>
-                  <a:srgbClr val="5F7371"/>
-                </a:solidFill>
-                <a:latin typeface="Calibri" pitchFamily="34" charset="0"/>
-                <a:ea typeface="Calibri" pitchFamily="34" charset="-122"/>
-                <a:cs typeface="Calibri" pitchFamily="34" charset="-120"/>
-              </a:rPr>
-              <a:t>what actually happened</a:t>
-            </a:r>
-            <a:endParaRPr lang="en-US" sz="1050" dirty="0"/>
-          </a:p>
-        </p:txBody>
-      </p:sp>
-      <p:sp>
-        <p:nvSpPr>
-          <p:cNvPr id="15" name="Text 13"/>
-          <p:cNvSpPr txBox="1"/>
-          <p:nvPr/>
-        </p:nvSpPr>
-        <p:spPr>
-          <a:xfrm>
-            <a:off x="5897880" y="3154680"/>
-            <a:ext cx="2468880" cy="182880"/>
-          </a:xfrm>
-          <a:prstGeom prst="rect">
-            <a:avLst/>
-          </a:prstGeom>
-          <a:noFill/>
-          <a:ln/>
-        </p:spPr>
-        <p:txBody>
-          <a:bodyPr wrap="square" lIns="0" tIns="0" rIns="0" bIns="0" rtlCol="0" anchor="t"/>
-          <a:lstStyle/>
-          <a:p>
-            <a:pPr indent="0" marL="0">
-              <a:buNone/>
-            </a:pPr>
-            <a:r>
-              <a:rPr lang="en-US" sz="900" i="1" dirty="0">
-                <a:solidFill>
-                  <a:srgbClr val="5F7371"/>
-                </a:solidFill>
-                <a:latin typeface="Calibri" pitchFamily="34" charset="0"/>
-                <a:ea typeface="Calibri" pitchFamily="34" charset="-122"/>
-                <a:cs typeface="Calibri" pitchFamily="34" charset="-120"/>
-              </a:rPr>
-              <a:t>Apple, Sep 30, 2026 · yearly rate · source: DoltHub</a:t>
-            </a:r>
-            <a:endParaRPr lang="en-US" sz="900" dirty="0"/>
-          </a:p>
-        </p:txBody>
-      </p:sp>
-      <p:sp>
-        <p:nvSpPr>
-          <p:cNvPr id="16" name="Shape 14"/>
+            <a:endParaRPr lang="en-US" sz="1100" dirty="0"/>
+          </a:p>
+        </p:txBody>
+      </p:sp>
+      <p:sp>
+        <p:nvSpPr>
+          <p:cNvPr id="13" name="Shape 11"/>
           <p:cNvSpPr/>
           <p:nvPr/>
         </p:nvSpPr>
         <p:spPr>
           <a:xfrm>
-            <a:off x="548640" y="3749040"/>
-            <a:ext cx="3931920" cy="914400"/>
+            <a:off x="5394960" y="2450592"/>
+            <a:ext cx="3200400" cy="960120"/>
           </a:xfrm>
           <a:prstGeom prst="roundRect">
             <a:avLst>
-              <a:gd name="adj" fmla="val 8000"/>
+              <a:gd name="adj" fmla="val 15238"/>
             </a:avLst>
           </a:prstGeom>
           <a:solidFill>
-            <a:srgbClr val="E8F3F1"/>
+            <a:srgbClr val="F5F5F7"/>
           </a:solidFill>
           <a:ln w="12700">
             <a:solidFill>
-              <a:srgbClr val="E8F3F1"/>
+              <a:srgbClr val="F5F5F7"/>
             </a:solidFill>
             <a:prstDash val="solid"/>
           </a:ln>
@@ -3039,104 +2944,143 @@
       </p:sp>
       <p:sp>
         <p:nvSpPr>
-          <p:cNvPr id="17" name="Text 15"/>
-          <p:cNvSpPr txBox="1"/>
-          <p:nvPr/>
-        </p:nvSpPr>
-        <p:spPr>
-          <a:xfrm>
-            <a:off x="731520" y="3858768"/>
-            <a:ext cx="3566160" cy="182880"/>
-          </a:xfrm>
-          <a:prstGeom prst="rect">
-            <a:avLst/>
-          </a:prstGeom>
-          <a:noFill/>
-          <a:ln/>
-        </p:spPr>
-        <p:txBody>
-          <a:bodyPr wrap="square" lIns="0" tIns="0" rIns="0" bIns="0" rtlCol="0" anchor="t"/>
+          <p:cNvPr id="14" name="Text 12"/>
+          <p:cNvSpPr txBox="1"/>
+          <p:nvPr/>
+        </p:nvSpPr>
+        <p:spPr>
+          <a:xfrm>
+            <a:off x="5623560" y="2633472"/>
+            <a:ext cx="1600200" cy="594360"/>
+          </a:xfrm>
+          <a:prstGeom prst="rect">
+            <a:avLst/>
+          </a:prstGeom>
+          <a:noFill/>
+          <a:ln/>
+        </p:spPr>
+        <p:txBody>
+          <a:bodyPr wrap="square" lIns="0" tIns="0" rIns="0" bIns="0" rtlCol="0" anchor="ctr"/>
           <a:lstStyle/>
           <a:p>
             <a:pPr indent="0" marL="0">
               <a:buNone/>
             </a:pPr>
             <a:r>
-              <a:rPr lang="en-US" sz="950" b="1" spc="200" kern="0" dirty="0">
-                <a:solidFill>
-                  <a:srgbClr val="FF6B4A"/>
-                </a:solidFill>
-                <a:latin typeface="Calibri" pitchFamily="34" charset="0"/>
-                <a:ea typeface="Calibri" pitchFamily="34" charset="-122"/>
-                <a:cs typeface="Calibri" pitchFamily="34" charset="-120"/>
-              </a:rPr>
-              <a:t>HYPOTHESIS 1</a:t>
-            </a:r>
-            <a:endParaRPr lang="en-US" sz="950" dirty="0"/>
-          </a:p>
-        </p:txBody>
-      </p:sp>
-      <p:sp>
-        <p:nvSpPr>
-          <p:cNvPr id="18" name="Text 16"/>
-          <p:cNvSpPr txBox="1"/>
-          <p:nvPr/>
-        </p:nvSpPr>
-        <p:spPr>
-          <a:xfrm>
-            <a:off x="731520" y="4069080"/>
-            <a:ext cx="3566160" cy="502920"/>
-          </a:xfrm>
-          <a:prstGeom prst="rect">
-            <a:avLst/>
-          </a:prstGeom>
-          <a:noFill/>
-          <a:ln/>
-        </p:spPr>
-        <p:txBody>
-          <a:bodyPr wrap="square" lIns="0" tIns="0" rIns="0" bIns="0" rtlCol="0" anchor="t"/>
+              <a:rPr lang="en-US" sz="3400" b="1" dirty="0">
+                <a:solidFill>
+                  <a:srgbClr val="0071E3"/>
+                </a:solidFill>
+                <a:latin typeface="Helvetica Neue" pitchFamily="34" charset="0"/>
+                <a:ea typeface="Helvetica Neue" pitchFamily="34" charset="-122"/>
+                <a:cs typeface="Helvetica Neue" pitchFamily="34" charset="-120"/>
+              </a:rPr>
+              <a:t>22.4%</a:t>
+            </a:r>
+            <a:endParaRPr lang="en-US" sz="3400" dirty="0"/>
+          </a:p>
+        </p:txBody>
+      </p:sp>
+      <p:sp>
+        <p:nvSpPr>
+          <p:cNvPr id="15" name="Text 13"/>
+          <p:cNvSpPr txBox="1"/>
+          <p:nvPr/>
+        </p:nvSpPr>
+        <p:spPr>
+          <a:xfrm>
+            <a:off x="7223760" y="2633472"/>
+            <a:ext cx="1234440" cy="594360"/>
+          </a:xfrm>
+          <a:prstGeom prst="rect">
+            <a:avLst/>
+          </a:prstGeom>
+          <a:noFill/>
+          <a:ln/>
+        </p:spPr>
+        <p:txBody>
+          <a:bodyPr wrap="square" lIns="0" tIns="0" rIns="0" bIns="0" rtlCol="0" anchor="ctr"/>
           <a:lstStyle/>
           <a:p>
             <a:pPr indent="0" marL="0">
               <a:buNone/>
             </a:pPr>
             <a:r>
-              <a:rPr lang="en-US" sz="1200" b="1" dirty="0">
-                <a:solidFill>
-                  <a:srgbClr val="0F2A2A"/>
-                </a:solidFill>
-                <a:latin typeface="Calibri" pitchFamily="34" charset="0"/>
-                <a:ea typeface="Calibri" pitchFamily="34" charset="-122"/>
-                <a:cs typeface="Calibri" pitchFamily="34" charset="-120"/>
-              </a:rPr>
-              <a:t>Traders' guesses are too high most of the time.</a:t>
-            </a:r>
-            <a:endParaRPr lang="en-US" sz="1200" dirty="0"/>
-          </a:p>
-        </p:txBody>
-      </p:sp>
-      <p:sp>
-        <p:nvSpPr>
-          <p:cNvPr id="19" name="Shape 17"/>
+              <a:rPr lang="en-US" sz="1100" dirty="0">
+                <a:solidFill>
+                  <a:srgbClr val="6E6E73"/>
+                </a:solidFill>
+                <a:latin typeface="Helvetica Neue" pitchFamily="34" charset="0"/>
+                <a:ea typeface="Helvetica Neue" pitchFamily="34" charset="-122"/>
+                <a:cs typeface="Helvetica Neue" pitchFamily="34" charset="-120"/>
+              </a:rPr>
+              <a:t>what actually happened</a:t>
+            </a:r>
+            <a:endParaRPr lang="en-US" sz="1100" dirty="0"/>
+          </a:p>
+        </p:txBody>
+      </p:sp>
+      <p:sp>
+        <p:nvSpPr>
+          <p:cNvPr id="16" name="Text 14"/>
+          <p:cNvSpPr txBox="1"/>
+          <p:nvPr/>
+        </p:nvSpPr>
+        <p:spPr>
+          <a:xfrm>
+            <a:off x="5394960" y="3502152"/>
+            <a:ext cx="3200400" cy="182880"/>
+          </a:xfrm>
+          <a:prstGeom prst="rect">
+            <a:avLst/>
+          </a:prstGeom>
+          <a:noFill/>
+          <a:ln/>
+        </p:spPr>
+        <p:txBody>
+          <a:bodyPr wrap="square" lIns="0" tIns="0" rIns="0" bIns="0" rtlCol="0" anchor="t"/>
+          <a:lstStyle/>
+          <a:p>
+            <a:pPr indent="0" marL="0">
+              <a:buNone/>
+            </a:pPr>
+            <a:r>
+              <a:rPr lang="en-US" sz="900" dirty="0">
+                <a:solidFill>
+                  <a:srgbClr val="6E6E73"/>
+                </a:solidFill>
+                <a:latin typeface="Helvetica Neue" pitchFamily="34" charset="0"/>
+                <a:ea typeface="Helvetica Neue" pitchFamily="34" charset="-122"/>
+                <a:cs typeface="Helvetica Neue" pitchFamily="34" charset="-120"/>
+              </a:rPr>
+              <a:t>Apple, Sep 30, 2026 · yearly rate · source: DoltHub</a:t>
+            </a:r>
+            <a:endParaRPr lang="en-US" sz="900" dirty="0"/>
+          </a:p>
+        </p:txBody>
+      </p:sp>
+      <p:sp>
+        <p:nvSpPr>
+          <p:cNvPr id="17" name="Shape 15"/>
           <p:cNvSpPr/>
           <p:nvPr/>
         </p:nvSpPr>
         <p:spPr>
           <a:xfrm>
-            <a:off x="4663440" y="3749040"/>
-            <a:ext cx="3931920" cy="914400"/>
+            <a:off x="548640" y="3840480"/>
+            <a:ext cx="3931920" cy="868680"/>
           </a:xfrm>
           <a:prstGeom prst="roundRect">
             <a:avLst>
-              <a:gd name="adj" fmla="val 8000"/>
+              <a:gd name="adj" fmla="val 16842"/>
             </a:avLst>
           </a:prstGeom>
           <a:solidFill>
-            <a:srgbClr val="E8F3F1"/>
+            <a:srgbClr val="F5F5F7"/>
           </a:solidFill>
           <a:ln w="12700">
             <a:solidFill>
-              <a:srgbClr val="E8F3F1"/>
+              <a:srgbClr val="F5F5F7"/>
             </a:solidFill>
             <a:prstDash val="solid"/>
           </a:ln>
@@ -3144,14 +3088,14 @@
       </p:sp>
       <p:sp>
         <p:nvSpPr>
-          <p:cNvPr id="20" name="Text 18"/>
-          <p:cNvSpPr txBox="1"/>
-          <p:nvPr/>
-        </p:nvSpPr>
-        <p:spPr>
-          <a:xfrm>
-            <a:off x="4846320" y="3858768"/>
-            <a:ext cx="3566160" cy="182880"/>
+          <p:cNvPr id="18" name="Text 16"/>
+          <p:cNvSpPr txBox="1"/>
+          <p:nvPr/>
+        </p:nvSpPr>
+        <p:spPr>
+          <a:xfrm>
+            <a:off x="777240" y="3959352"/>
+            <a:ext cx="3474720" cy="182880"/>
           </a:xfrm>
           <a:prstGeom prst="rect">
             <a:avLst/>
@@ -3167,19 +3111,85 @@
               <a:buNone/>
             </a:pPr>
             <a:r>
-              <a:rPr lang="en-US" sz="950" b="1" spc="200" kern="0" dirty="0">
-                <a:solidFill>
-                  <a:srgbClr val="FF6B4A"/>
-                </a:solidFill>
-                <a:latin typeface="Calibri" pitchFamily="34" charset="0"/>
-                <a:ea typeface="Calibri" pitchFamily="34" charset="-122"/>
-                <a:cs typeface="Calibri" pitchFamily="34" charset="-120"/>
-              </a:rPr>
-              <a:t>HYPOTHESIS 2</a:t>
-            </a:r>
-            <a:endParaRPr lang="en-US" sz="950" dirty="0"/>
-          </a:p>
-        </p:txBody>
+              <a:rPr lang="en-US" sz="1000" dirty="0">
+                <a:solidFill>
+                  <a:srgbClr val="6E6E73"/>
+                </a:solidFill>
+                <a:latin typeface="Helvetica Neue" pitchFamily="34" charset="0"/>
+                <a:ea typeface="Helvetica Neue" pitchFamily="34" charset="-122"/>
+                <a:cs typeface="Helvetica Neue" pitchFamily="34" charset="-120"/>
+              </a:rPr>
+              <a:t>Hypothesis 1</a:t>
+            </a:r>
+            <a:endParaRPr lang="en-US" sz="1000" dirty="0"/>
+          </a:p>
+        </p:txBody>
+      </p:sp>
+      <p:sp>
+        <p:nvSpPr>
+          <p:cNvPr id="19" name="Text 17"/>
+          <p:cNvSpPr txBox="1"/>
+          <p:nvPr/>
+        </p:nvSpPr>
+        <p:spPr>
+          <a:xfrm>
+            <a:off x="777240" y="4160520"/>
+            <a:ext cx="3474720" cy="457200"/>
+          </a:xfrm>
+          <a:prstGeom prst="rect">
+            <a:avLst/>
+          </a:prstGeom>
+          <a:noFill/>
+          <a:ln/>
+        </p:spPr>
+        <p:txBody>
+          <a:bodyPr wrap="square" lIns="0" tIns="0" rIns="0" bIns="0" rtlCol="0" anchor="t"/>
+          <a:lstStyle/>
+          <a:p>
+            <a:pPr indent="0" marL="0">
+              <a:buNone/>
+            </a:pPr>
+            <a:r>
+              <a:rPr lang="en-US" sz="1200" b="1" dirty="0">
+                <a:solidFill>
+                  <a:srgbClr val="1D1D1F"/>
+                </a:solidFill>
+                <a:latin typeface="Helvetica Neue" pitchFamily="34" charset="0"/>
+                <a:ea typeface="Helvetica Neue" pitchFamily="34" charset="-122"/>
+                <a:cs typeface="Helvetica Neue" pitchFamily="34" charset="-120"/>
+              </a:rPr>
+              <a:t>Traders' guesses are too high most of the time.</a:t>
+            </a:r>
+            <a:endParaRPr lang="en-US" sz="1200" dirty="0"/>
+          </a:p>
+        </p:txBody>
+      </p:sp>
+      <p:sp>
+        <p:nvSpPr>
+          <p:cNvPr id="20" name="Shape 18"/>
+          <p:cNvSpPr/>
+          <p:nvPr/>
+        </p:nvSpPr>
+        <p:spPr>
+          <a:xfrm>
+            <a:off x="4663440" y="3840480"/>
+            <a:ext cx="3931920" cy="868680"/>
+          </a:xfrm>
+          <a:prstGeom prst="roundRect">
+            <a:avLst>
+              <a:gd name="adj" fmla="val 16842"/>
+            </a:avLst>
+          </a:prstGeom>
+          <a:solidFill>
+            <a:srgbClr val="F5F5F7"/>
+          </a:solidFill>
+          <a:ln w="12700">
+            <a:solidFill>
+              <a:srgbClr val="F5F5F7"/>
+            </a:solidFill>
+            <a:prstDash val="solid"/>
+          </a:ln>
+        </p:spPr>
       </p:sp>
       <p:sp>
         <p:nvSpPr>
@@ -3189,8 +3199,8 @@
         </p:nvSpPr>
         <p:spPr>
           <a:xfrm>
-            <a:off x="4846320" y="4069080"/>
-            <a:ext cx="3566160" cy="502920"/>
+            <a:off x="4892040" y="3959352"/>
+            <a:ext cx="3474720" cy="182880"/>
           </a:xfrm>
           <a:prstGeom prst="rect">
             <a:avLst/>
@@ -3206,13 +3216,52 @@
               <a:buNone/>
             </a:pPr>
             <a:r>
+              <a:rPr lang="en-US" sz="1000" dirty="0">
+                <a:solidFill>
+                  <a:srgbClr val="6E6E73"/>
+                </a:solidFill>
+                <a:latin typeface="Helvetica Neue" pitchFamily="34" charset="0"/>
+                <a:ea typeface="Helvetica Neue" pitchFamily="34" charset="-122"/>
+                <a:cs typeface="Helvetica Neue" pitchFamily="34" charset="-120"/>
+              </a:rPr>
+              <a:t>Hypothesis 2</a:t>
+            </a:r>
+            <a:endParaRPr lang="en-US" sz="1000" dirty="0"/>
+          </a:p>
+        </p:txBody>
+      </p:sp>
+      <p:sp>
+        <p:nvSpPr>
+          <p:cNvPr id="22" name="Text 20"/>
+          <p:cNvSpPr txBox="1"/>
+          <p:nvPr/>
+        </p:nvSpPr>
+        <p:spPr>
+          <a:xfrm>
+            <a:off x="4892040" y="4160520"/>
+            <a:ext cx="3474720" cy="457200"/>
+          </a:xfrm>
+          <a:prstGeom prst="rect">
+            <a:avLst/>
+          </a:prstGeom>
+          <a:noFill/>
+          <a:ln/>
+        </p:spPr>
+        <p:txBody>
+          <a:bodyPr wrap="square" lIns="0" tIns="0" rIns="0" bIns="0" rtlCol="0" anchor="t"/>
+          <a:lstStyle/>
+          <a:p>
+            <a:pPr indent="0" marL="0">
+              <a:buNone/>
+            </a:pPr>
+            <a:r>
               <a:rPr lang="en-US" sz="1200" b="1" dirty="0">
                 <a:solidFill>
-                  <a:srgbClr val="0F2A2A"/>
-                </a:solidFill>
-                <a:latin typeface="Calibri" pitchFamily="34" charset="0"/>
-                <a:ea typeface="Calibri" pitchFamily="34" charset="-122"/>
-                <a:cs typeface="Calibri" pitchFamily="34" charset="-120"/>
+                  <a:srgbClr val="1D1D1F"/>
+                </a:solidFill>
+                <a:latin typeface="Helvetica Neue" pitchFamily="34" charset="0"/>
+                <a:ea typeface="Helvetica Neue" pitchFamily="34" charset="-122"/>
+                <a:cs typeface="Helvetica Neue" pitchFamily="34" charset="-120"/>
               </a:rPr>
               <a:t>Traders pay more to protect against drops than to bet on gains, especially in rough markets.</a:t>
             </a:r>
@@ -3260,7 +3309,7 @@
         </p:nvSpPr>
         <p:spPr>
           <a:xfrm>
-            <a:off x="548640" y="365760"/>
+            <a:off x="548640" y="411480"/>
             <a:ext cx="8046720" cy="228600"/>
           </a:xfrm>
           <a:prstGeom prst="rect">
@@ -3277,17 +3326,17 @@
               <a:buNone/>
             </a:pPr>
             <a:r>
-              <a:rPr lang="en-US" sz="1100" b="1" spc="300" kern="0" dirty="0">
-                <a:solidFill>
-                  <a:srgbClr val="FF6B4A"/>
-                </a:solidFill>
-                <a:latin typeface="Calibri" pitchFamily="34" charset="0"/>
-                <a:ea typeface="Calibri" pitchFamily="34" charset="-122"/>
-                <a:cs typeface="Calibri" pitchFamily="34" charset="-120"/>
-              </a:rPr>
-              <a:t>THE DATA</a:t>
-            </a:r>
-            <a:endParaRPr lang="en-US" sz="1100" dirty="0"/>
+              <a:rPr lang="en-US" sz="1300" dirty="0">
+                <a:solidFill>
+                  <a:srgbClr val="6E6E73"/>
+                </a:solidFill>
+                <a:latin typeface="Helvetica Neue" pitchFamily="34" charset="0"/>
+                <a:ea typeface="Helvetica Neue" pitchFamily="34" charset="-122"/>
+                <a:cs typeface="Helvetica Neue" pitchFamily="34" charset="-120"/>
+              </a:rPr>
+              <a:t>Data</a:t>
+            </a:r>
+            <a:endParaRPr lang="en-US" sz="1300" dirty="0"/>
           </a:p>
         </p:txBody>
       </p:sp>
@@ -3299,7 +3348,7 @@
         </p:nvSpPr>
         <p:spPr>
           <a:xfrm>
-            <a:off x="548640" y="621792"/>
+            <a:off x="548640" y="676656"/>
             <a:ext cx="8046720" cy="502920"/>
           </a:xfrm>
           <a:prstGeom prst="rect">
@@ -3318,11 +3367,11 @@
             <a:r>
               <a:rPr lang="en-US" sz="3000" b="1" dirty="0">
                 <a:solidFill>
-                  <a:srgbClr val="1F2A2A"/>
-                </a:solidFill>
-                <a:latin typeface="Calibri" pitchFamily="34" charset="0"/>
-                <a:ea typeface="Calibri" pitchFamily="34" charset="-122"/>
-                <a:cs typeface="Calibri" pitchFamily="34" charset="-120"/>
+                  <a:srgbClr val="1D1D1F"/>
+                </a:solidFill>
+                <a:latin typeface="Helvetica Neue" pitchFamily="34" charset="0"/>
+                <a:ea typeface="Helvetica Neue" pitchFamily="34" charset="-122"/>
+                <a:cs typeface="Helvetica Neue" pitchFamily="34" charset="-120"/>
               </a:rPr>
               <a:t>DoltHub options database, 2019 to 2026</a:t>
             </a:r>
@@ -3338,8 +3387,8 @@
         </p:nvSpPr>
         <p:spPr>
           <a:xfrm>
-            <a:off x="548640" y="1344168"/>
-            <a:ext cx="1005840" cy="182880"/>
+            <a:off x="548640" y="1371600"/>
+            <a:ext cx="960120" cy="182880"/>
           </a:xfrm>
           <a:prstGeom prst="rect">
             <a:avLst/>
@@ -3355,17 +3404,17 @@
               <a:buNone/>
             </a:pPr>
             <a:r>
-              <a:rPr lang="en-US" sz="900" b="1" spc="150" kern="0" dirty="0">
-                <a:solidFill>
-                  <a:srgbClr val="FF6B4A"/>
-                </a:solidFill>
-                <a:latin typeface="Calibri" pitchFamily="34" charset="0"/>
-                <a:ea typeface="Calibri" pitchFamily="34" charset="-122"/>
-                <a:cs typeface="Calibri" pitchFamily="34" charset="-120"/>
-              </a:rPr>
-              <a:t>SOURCE</a:t>
-            </a:r>
-            <a:endParaRPr lang="en-US" sz="900" dirty="0"/>
+              <a:rPr lang="en-US" sz="1050" b="1" dirty="0">
+                <a:solidFill>
+                  <a:srgbClr val="1D1D1F"/>
+                </a:solidFill>
+                <a:latin typeface="Helvetica Neue" pitchFamily="34" charset="0"/>
+                <a:ea typeface="Helvetica Neue" pitchFamily="34" charset="-122"/>
+                <a:cs typeface="Helvetica Neue" pitchFamily="34" charset="-120"/>
+              </a:rPr>
+              <a:t>Source</a:t>
+            </a:r>
+            <a:endParaRPr lang="en-US" sz="1050" dirty="0"/>
           </a:p>
         </p:txBody>
       </p:sp>
@@ -3377,8 +3426,8 @@
         </p:nvSpPr>
         <p:spPr>
           <a:xfrm>
-            <a:off x="1600200" y="1325880"/>
-            <a:ext cx="3063240" cy="475488"/>
+            <a:off x="1554480" y="1371600"/>
+            <a:ext cx="3108960" cy="384048"/>
           </a:xfrm>
           <a:prstGeom prst="rect">
             <a:avLst/>
@@ -3394,30 +3443,53 @@
               <a:buNone/>
             </a:pPr>
             <a:r>
-              <a:rPr lang="en-US" sz="1100" dirty="0">
-                <a:solidFill>
-                  <a:srgbClr val="1F2A2A"/>
-                </a:solidFill>
-                <a:latin typeface="Calibri" pitchFamily="34" charset="0"/>
-                <a:ea typeface="Calibri" pitchFamily="34" charset="-122"/>
-                <a:cs typeface="Calibri" pitchFamily="34" charset="-120"/>
+              <a:rPr lang="en-US" sz="1050" dirty="0">
+                <a:solidFill>
+                  <a:srgbClr val="424245"/>
+                </a:solidFill>
+                <a:latin typeface="Helvetica Neue" pitchFamily="34" charset="0"/>
+                <a:ea typeface="Helvetica Neue" pitchFamily="34" charset="-122"/>
+                <a:cs typeface="Helvetica Neue" pitchFamily="34" charset="-120"/>
               </a:rPr>
               <a:t>DoltHub "options" database. Free, no signup. We ran live queries against it on Oct 1, 2026.</a:t>
             </a:r>
-            <a:endParaRPr lang="en-US" sz="1100" dirty="0"/>
-          </a:p>
-        </p:txBody>
-      </p:sp>
-      <p:sp>
-        <p:nvSpPr>
-          <p:cNvPr id="6" name="Text 4"/>
-          <p:cNvSpPr txBox="1"/>
-          <p:nvPr/>
-        </p:nvSpPr>
-        <p:spPr>
-          <a:xfrm>
-            <a:off x="548640" y="1874520"/>
-            <a:ext cx="1005840" cy="182880"/>
+            <a:endParaRPr lang="en-US" sz="1050" dirty="0"/>
+          </a:p>
+        </p:txBody>
+      </p:sp>
+      <p:sp>
+        <p:nvSpPr>
+          <p:cNvPr id="6" name="Shape 4"/>
+          <p:cNvSpPr/>
+          <p:nvPr/>
+        </p:nvSpPr>
+        <p:spPr>
+          <a:xfrm>
+            <a:off x="548640" y="1837944"/>
+            <a:ext cx="4114800" cy="0"/>
+          </a:xfrm>
+          <a:prstGeom prst="line">
+            <a:avLst/>
+          </a:prstGeom>
+          <a:noFill/>
+          <a:ln w="6350">
+            <a:solidFill>
+              <a:srgbClr val="D2D2D7"/>
+            </a:solidFill>
+            <a:prstDash val="solid"/>
+          </a:ln>
+        </p:spPr>
+      </p:sp>
+      <p:sp>
+        <p:nvSpPr>
+          <p:cNvPr id="7" name="Text 5"/>
+          <p:cNvSpPr txBox="1"/>
+          <p:nvPr/>
+        </p:nvSpPr>
+        <p:spPr>
+          <a:xfrm>
+            <a:off x="548640" y="1920240"/>
+            <a:ext cx="960120" cy="182880"/>
           </a:xfrm>
           <a:prstGeom prst="rect">
             <a:avLst/>
@@ -3433,30 +3505,30 @@
               <a:buNone/>
             </a:pPr>
             <a:r>
-              <a:rPr lang="en-US" sz="900" b="1" spc="150" kern="0" dirty="0">
-                <a:solidFill>
-                  <a:srgbClr val="FF6B4A"/>
-                </a:solidFill>
-                <a:latin typeface="Calibri" pitchFamily="34" charset="0"/>
-                <a:ea typeface="Calibri" pitchFamily="34" charset="-122"/>
-                <a:cs typeface="Calibri" pitchFamily="34" charset="-120"/>
-              </a:rPr>
-              <a:t>COVERAGE</a:t>
-            </a:r>
-            <a:endParaRPr lang="en-US" sz="900" dirty="0"/>
-          </a:p>
-        </p:txBody>
-      </p:sp>
-      <p:sp>
-        <p:nvSpPr>
-          <p:cNvPr id="7" name="Text 5"/>
-          <p:cNvSpPr txBox="1"/>
-          <p:nvPr/>
-        </p:nvSpPr>
-        <p:spPr>
-          <a:xfrm>
-            <a:off x="1600200" y="1856232"/>
-            <a:ext cx="3063240" cy="475488"/>
+              <a:rPr lang="en-US" sz="1050" b="1" dirty="0">
+                <a:solidFill>
+                  <a:srgbClr val="1D1D1F"/>
+                </a:solidFill>
+                <a:latin typeface="Helvetica Neue" pitchFamily="34" charset="0"/>
+                <a:ea typeface="Helvetica Neue" pitchFamily="34" charset="-122"/>
+                <a:cs typeface="Helvetica Neue" pitchFamily="34" charset="-120"/>
+              </a:rPr>
+              <a:t>Coverage</a:t>
+            </a:r>
+            <a:endParaRPr lang="en-US" sz="1050" dirty="0"/>
+          </a:p>
+        </p:txBody>
+      </p:sp>
+      <p:sp>
+        <p:nvSpPr>
+          <p:cNvPr id="8" name="Text 6"/>
+          <p:cNvSpPr txBox="1"/>
+          <p:nvPr/>
+        </p:nvSpPr>
+        <p:spPr>
+          <a:xfrm>
+            <a:off x="1554480" y="1920240"/>
+            <a:ext cx="3108960" cy="384048"/>
           </a:xfrm>
           <a:prstGeom prst="rect">
             <a:avLst/>
@@ -3472,30 +3544,53 @@
               <a:buNone/>
             </a:pPr>
             <a:r>
-              <a:rPr lang="en-US" sz="1100" dirty="0">
-                <a:solidFill>
-                  <a:srgbClr val="1F2A2A"/>
-                </a:solidFill>
-                <a:latin typeface="Calibri" pitchFamily="34" charset="0"/>
-                <a:ea typeface="Calibri" pitchFamily="34" charset="-122"/>
-                <a:cs typeface="Calibri" pitchFamily="34" charset="-120"/>
+              <a:rPr lang="en-US" sz="1050" dirty="0">
+                <a:solidFill>
+                  <a:srgbClr val="424245"/>
+                </a:solidFill>
+                <a:latin typeface="Helvetica Neue" pitchFamily="34" charset="0"/>
+                <a:ea typeface="Helvetica Neue" pitchFamily="34" charset="-122"/>
+                <a:cs typeface="Helvetica Neue" pitchFamily="34" charset="-120"/>
               </a:rPr>
               <a:t>Feb 2019 to Sep 30, 2026. New snapshots about 3 times a week.</a:t>
             </a:r>
-            <a:endParaRPr lang="en-US" sz="1100" dirty="0"/>
-          </a:p>
-        </p:txBody>
-      </p:sp>
-      <p:sp>
-        <p:nvSpPr>
-          <p:cNvPr id="8" name="Text 6"/>
-          <p:cNvSpPr txBox="1"/>
-          <p:nvPr/>
-        </p:nvSpPr>
-        <p:spPr>
-          <a:xfrm>
-            <a:off x="548640" y="2404872"/>
-            <a:ext cx="1005840" cy="182880"/>
+            <a:endParaRPr lang="en-US" sz="1050" dirty="0"/>
+          </a:p>
+        </p:txBody>
+      </p:sp>
+      <p:sp>
+        <p:nvSpPr>
+          <p:cNvPr id="9" name="Shape 7"/>
+          <p:cNvSpPr/>
+          <p:nvPr/>
+        </p:nvSpPr>
+        <p:spPr>
+          <a:xfrm>
+            <a:off x="548640" y="2386584"/>
+            <a:ext cx="4114800" cy="0"/>
+          </a:xfrm>
+          <a:prstGeom prst="line">
+            <a:avLst/>
+          </a:prstGeom>
+          <a:noFill/>
+          <a:ln w="6350">
+            <a:solidFill>
+              <a:srgbClr val="D2D2D7"/>
+            </a:solidFill>
+            <a:prstDash val="solid"/>
+          </a:ln>
+        </p:spPr>
+      </p:sp>
+      <p:sp>
+        <p:nvSpPr>
+          <p:cNvPr id="10" name="Text 8"/>
+          <p:cNvSpPr txBox="1"/>
+          <p:nvPr/>
+        </p:nvSpPr>
+        <p:spPr>
+          <a:xfrm>
+            <a:off x="548640" y="2468880"/>
+            <a:ext cx="960120" cy="182880"/>
           </a:xfrm>
           <a:prstGeom prst="rect">
             <a:avLst/>
@@ -3511,30 +3606,30 @@
               <a:buNone/>
             </a:pPr>
             <a:r>
-              <a:rPr lang="en-US" sz="900" b="1" spc="150" kern="0" dirty="0">
-                <a:solidFill>
-                  <a:srgbClr val="FF6B4A"/>
-                </a:solidFill>
-                <a:latin typeface="Calibri" pitchFamily="34" charset="0"/>
-                <a:ea typeface="Calibri" pitchFamily="34" charset="-122"/>
-                <a:cs typeface="Calibri" pitchFamily="34" charset="-120"/>
-              </a:rPr>
-              <a:t>WHAT'S IN IT</a:t>
-            </a:r>
-            <a:endParaRPr lang="en-US" sz="900" dirty="0"/>
-          </a:p>
-        </p:txBody>
-      </p:sp>
-      <p:sp>
-        <p:nvSpPr>
-          <p:cNvPr id="9" name="Text 7"/>
-          <p:cNvSpPr txBox="1"/>
-          <p:nvPr/>
-        </p:nvSpPr>
-        <p:spPr>
-          <a:xfrm>
-            <a:off x="1600200" y="2386584"/>
-            <a:ext cx="3063240" cy="786384"/>
+              <a:rPr lang="en-US" sz="1050" b="1" dirty="0">
+                <a:solidFill>
+                  <a:srgbClr val="1D1D1F"/>
+                </a:solidFill>
+                <a:latin typeface="Helvetica Neue" pitchFamily="34" charset="0"/>
+                <a:ea typeface="Helvetica Neue" pitchFamily="34" charset="-122"/>
+                <a:cs typeface="Helvetica Neue" pitchFamily="34" charset="-120"/>
+              </a:rPr>
+              <a:t>What's in it</a:t>
+            </a:r>
+            <a:endParaRPr lang="en-US" sz="1050" dirty="0"/>
+          </a:p>
+        </p:txBody>
+      </p:sp>
+      <p:sp>
+        <p:nvSpPr>
+          <p:cNvPr id="11" name="Text 9"/>
+          <p:cNvSpPr txBox="1"/>
+          <p:nvPr/>
+        </p:nvSpPr>
+        <p:spPr>
+          <a:xfrm>
+            <a:off x="1554480" y="2468880"/>
+            <a:ext cx="3108960" cy="713232"/>
           </a:xfrm>
           <a:prstGeom prst="rect">
             <a:avLst/>
@@ -3550,30 +3645,53 @@
               <a:buNone/>
             </a:pPr>
             <a:r>
-              <a:rPr lang="en-US" sz="1100" dirty="0">
-                <a:solidFill>
-                  <a:srgbClr val="1F2A2A"/>
-                </a:solidFill>
-                <a:latin typeface="Calibri" pitchFamily="34" charset="0"/>
-                <a:ea typeface="Calibri" pitchFamily="34" charset="-122"/>
-                <a:cs typeface="Calibri" pitchFamily="34" charset="-120"/>
+              <a:rPr lang="en-US" sz="1050" dirty="0">
+                <a:solidFill>
+                  <a:srgbClr val="424245"/>
+                </a:solidFill>
+                <a:latin typeface="Helvetica Neue" pitchFamily="34" charset="0"/>
+                <a:ea typeface="Helvetica Neue" pitchFamily="34" charset="-122"/>
+                <a:cs typeface="Helvetica Neue" pitchFamily="34" charset="-120"/>
               </a:rPr>
               <a:t>Per option: date, stock, expiration, strike, call or put, bid, ask, and implied volatility (the traders' guess). A second table has the guess and the actual move per stock.</a:t>
             </a:r>
-            <a:endParaRPr lang="en-US" sz="1100" dirty="0"/>
-          </a:p>
-        </p:txBody>
-      </p:sp>
-      <p:sp>
-        <p:nvSpPr>
-          <p:cNvPr id="10" name="Text 8"/>
-          <p:cNvSpPr txBox="1"/>
-          <p:nvPr/>
-        </p:nvSpPr>
-        <p:spPr>
-          <a:xfrm>
-            <a:off x="548640" y="3246120"/>
-            <a:ext cx="1005840" cy="182880"/>
+            <a:endParaRPr lang="en-US" sz="1050" dirty="0"/>
+          </a:p>
+        </p:txBody>
+      </p:sp>
+      <p:sp>
+        <p:nvSpPr>
+          <p:cNvPr id="12" name="Shape 10"/>
+          <p:cNvSpPr/>
+          <p:nvPr/>
+        </p:nvSpPr>
+        <p:spPr>
+          <a:xfrm>
+            <a:off x="548640" y="3264408"/>
+            <a:ext cx="4114800" cy="0"/>
+          </a:xfrm>
+          <a:prstGeom prst="line">
+            <a:avLst/>
+          </a:prstGeom>
+          <a:noFill/>
+          <a:ln w="6350">
+            <a:solidFill>
+              <a:srgbClr val="D2D2D7"/>
+            </a:solidFill>
+            <a:prstDash val="solid"/>
+          </a:ln>
+        </p:spPr>
+      </p:sp>
+      <p:sp>
+        <p:nvSpPr>
+          <p:cNvPr id="13" name="Text 11"/>
+          <p:cNvSpPr txBox="1"/>
+          <p:nvPr/>
+        </p:nvSpPr>
+        <p:spPr>
+          <a:xfrm>
+            <a:off x="548640" y="3346704"/>
+            <a:ext cx="960120" cy="182880"/>
           </a:xfrm>
           <a:prstGeom prst="rect">
             <a:avLst/>
@@ -3589,30 +3707,30 @@
               <a:buNone/>
             </a:pPr>
             <a:r>
-              <a:rPr lang="en-US" sz="900" b="1" spc="150" kern="0" dirty="0">
-                <a:solidFill>
-                  <a:srgbClr val="FF6B4A"/>
-                </a:solidFill>
-                <a:latin typeface="Calibri" pitchFamily="34" charset="0"/>
-                <a:ea typeface="Calibri" pitchFamily="34" charset="-122"/>
-                <a:cs typeface="Calibri" pitchFamily="34" charset="-120"/>
-              </a:rPr>
-              <a:t>SIZE</a:t>
-            </a:r>
-            <a:endParaRPr lang="en-US" sz="900" dirty="0"/>
-          </a:p>
-        </p:txBody>
-      </p:sp>
-      <p:sp>
-        <p:nvSpPr>
-          <p:cNvPr id="11" name="Text 9"/>
-          <p:cNvSpPr txBox="1"/>
-          <p:nvPr/>
-        </p:nvSpPr>
-        <p:spPr>
-          <a:xfrm>
-            <a:off x="1600200" y="3227832"/>
-            <a:ext cx="3063240" cy="630936"/>
+              <a:rPr lang="en-US" sz="1050" b="1" dirty="0">
+                <a:solidFill>
+                  <a:srgbClr val="1D1D1F"/>
+                </a:solidFill>
+                <a:latin typeface="Helvetica Neue" pitchFamily="34" charset="0"/>
+                <a:ea typeface="Helvetica Neue" pitchFamily="34" charset="-122"/>
+                <a:cs typeface="Helvetica Neue" pitchFamily="34" charset="-120"/>
+              </a:rPr>
+              <a:t>Size</a:t>
+            </a:r>
+            <a:endParaRPr lang="en-US" sz="1050" dirty="0"/>
+          </a:p>
+        </p:txBody>
+      </p:sp>
+      <p:sp>
+        <p:nvSpPr>
+          <p:cNvPr id="14" name="Text 12"/>
+          <p:cNvSpPr txBox="1"/>
+          <p:nvPr/>
+        </p:nvSpPr>
+        <p:spPr>
+          <a:xfrm>
+            <a:off x="1554480" y="3346704"/>
+            <a:ext cx="3108960" cy="548640"/>
           </a:xfrm>
           <a:prstGeom prst="rect">
             <a:avLst/>
@@ -3628,30 +3746,53 @@
               <a:buNone/>
             </a:pPr>
             <a:r>
-              <a:rPr lang="en-US" sz="1100" dirty="0">
-                <a:solidFill>
-                  <a:srgbClr val="1F2A2A"/>
-                </a:solidFill>
-                <a:latin typeface="Calibri" pitchFamily="34" charset="0"/>
-                <a:ea typeface="Calibri" pitchFamily="34" charset="-122"/>
-                <a:cs typeface="Calibri" pitchFamily="34" charset="-120"/>
+              <a:rPr lang="en-US" sz="1050" dirty="0">
+                <a:solidFill>
+                  <a:srgbClr val="424245"/>
+                </a:solidFill>
+                <a:latin typeface="Helvetica Neue" pitchFamily="34" charset="0"/>
+                <a:ea typeface="Helvetica Neue" pitchFamily="34" charset="-122"/>
+                <a:cs typeface="Helvetica Neue" pitchFamily="34" charset="-120"/>
               </a:rPr>
               <a:t>About 150 rows per stock per snapshot. For ~10 well-known stocks we estimate 1M+ rows, all numeric tables.</a:t>
             </a:r>
-            <a:endParaRPr lang="en-US" sz="1100" dirty="0"/>
-          </a:p>
-        </p:txBody>
-      </p:sp>
-      <p:sp>
-        <p:nvSpPr>
-          <p:cNvPr id="12" name="Text 10"/>
-          <p:cNvSpPr txBox="1"/>
-          <p:nvPr/>
-        </p:nvSpPr>
-        <p:spPr>
-          <a:xfrm>
-            <a:off x="548640" y="3931920"/>
-            <a:ext cx="1005840" cy="182880"/>
+            <a:endParaRPr lang="en-US" sz="1050" dirty="0"/>
+          </a:p>
+        </p:txBody>
+      </p:sp>
+      <p:sp>
+        <p:nvSpPr>
+          <p:cNvPr id="15" name="Shape 13"/>
+          <p:cNvSpPr/>
+          <p:nvPr/>
+        </p:nvSpPr>
+        <p:spPr>
+          <a:xfrm>
+            <a:off x="548640" y="3977640"/>
+            <a:ext cx="4114800" cy="0"/>
+          </a:xfrm>
+          <a:prstGeom prst="line">
+            <a:avLst/>
+          </a:prstGeom>
+          <a:noFill/>
+          <a:ln w="6350">
+            <a:solidFill>
+              <a:srgbClr val="D2D2D7"/>
+            </a:solidFill>
+            <a:prstDash val="solid"/>
+          </a:ln>
+        </p:spPr>
+      </p:sp>
+      <p:sp>
+        <p:nvSpPr>
+          <p:cNvPr id="16" name="Text 14"/>
+          <p:cNvSpPr txBox="1"/>
+          <p:nvPr/>
+        </p:nvSpPr>
+        <p:spPr>
+          <a:xfrm>
+            <a:off x="548640" y="4059936"/>
+            <a:ext cx="960120" cy="182880"/>
           </a:xfrm>
           <a:prstGeom prst="rect">
             <a:avLst/>
@@ -3667,30 +3808,30 @@
               <a:buNone/>
             </a:pPr>
             <a:r>
-              <a:rPr lang="en-US" sz="900" b="1" spc="150" kern="0" dirty="0">
-                <a:solidFill>
-                  <a:srgbClr val="FF6B4A"/>
-                </a:solidFill>
-                <a:latin typeface="Calibri" pitchFamily="34" charset="0"/>
-                <a:ea typeface="Calibri" pitchFamily="34" charset="-122"/>
-                <a:cs typeface="Calibri" pitchFamily="34" charset="-120"/>
-              </a:rPr>
-              <a:t>EFFORT</a:t>
-            </a:r>
-            <a:endParaRPr lang="en-US" sz="900" dirty="0"/>
-          </a:p>
-        </p:txBody>
-      </p:sp>
-      <p:sp>
-        <p:nvSpPr>
-          <p:cNvPr id="13" name="Text 11"/>
-          <p:cNvSpPr txBox="1"/>
-          <p:nvPr/>
-        </p:nvSpPr>
-        <p:spPr>
-          <a:xfrm>
-            <a:off x="1600200" y="3913632"/>
-            <a:ext cx="3063240" cy="320040"/>
+              <a:rPr lang="en-US" sz="1050" b="1" dirty="0">
+                <a:solidFill>
+                  <a:srgbClr val="1D1D1F"/>
+                </a:solidFill>
+                <a:latin typeface="Helvetica Neue" pitchFamily="34" charset="0"/>
+                <a:ea typeface="Helvetica Neue" pitchFamily="34" charset="-122"/>
+                <a:cs typeface="Helvetica Neue" pitchFamily="34" charset="-120"/>
+              </a:rPr>
+              <a:t>Effort</a:t>
+            </a:r>
+            <a:endParaRPr lang="en-US" sz="1050" dirty="0"/>
+          </a:p>
+        </p:txBody>
+      </p:sp>
+      <p:sp>
+        <p:nvSpPr>
+          <p:cNvPr id="17" name="Text 15"/>
+          <p:cNvSpPr txBox="1"/>
+          <p:nvPr/>
+        </p:nvSpPr>
+        <p:spPr>
+          <a:xfrm>
+            <a:off x="1554480" y="4059936"/>
+            <a:ext cx="3108960" cy="219456"/>
           </a:xfrm>
           <a:prstGeom prst="rect">
             <a:avLst/>
@@ -3706,30 +3847,53 @@
               <a:buNone/>
             </a:pPr>
             <a:r>
-              <a:rPr lang="en-US" sz="1100" dirty="0">
-                <a:solidFill>
-                  <a:srgbClr val="1F2A2A"/>
-                </a:solidFill>
-                <a:latin typeface="Calibri" pitchFamily="34" charset="0"/>
-                <a:ea typeface="Calibri" pitchFamily="34" charset="-122"/>
-                <a:cs typeface="Calibri" pitchFamily="34" charset="-120"/>
+              <a:rPr lang="en-US" sz="1050" dirty="0">
+                <a:solidFill>
+                  <a:srgbClr val="424245"/>
+                </a:solidFill>
+                <a:latin typeface="Helvetica Neue" pitchFamily="34" charset="0"/>
+                <a:ea typeface="Helvetica Neue" pitchFamily="34" charset="-122"/>
+                <a:cs typeface="Helvetica Neue" pitchFamily="34" charset="-120"/>
               </a:rPr>
               <a:t>Low. A short Python script downloads it with SQL.</a:t>
             </a:r>
-            <a:endParaRPr lang="en-US" sz="1100" dirty="0"/>
-          </a:p>
-        </p:txBody>
-      </p:sp>
-      <p:sp>
-        <p:nvSpPr>
-          <p:cNvPr id="14" name="Text 12"/>
-          <p:cNvSpPr txBox="1"/>
-          <p:nvPr/>
-        </p:nvSpPr>
-        <p:spPr>
-          <a:xfrm>
-            <a:off x="548640" y="4306824"/>
-            <a:ext cx="1005840" cy="182880"/>
+            <a:endParaRPr lang="en-US" sz="1050" dirty="0"/>
+          </a:p>
+        </p:txBody>
+      </p:sp>
+      <p:sp>
+        <p:nvSpPr>
+          <p:cNvPr id="18" name="Shape 16"/>
+          <p:cNvSpPr/>
+          <p:nvPr/>
+        </p:nvSpPr>
+        <p:spPr>
+          <a:xfrm>
+            <a:off x="548640" y="4361688"/>
+            <a:ext cx="4114800" cy="0"/>
+          </a:xfrm>
+          <a:prstGeom prst="line">
+            <a:avLst/>
+          </a:prstGeom>
+          <a:noFill/>
+          <a:ln w="6350">
+            <a:solidFill>
+              <a:srgbClr val="D2D2D7"/>
+            </a:solidFill>
+            <a:prstDash val="solid"/>
+          </a:ln>
+        </p:spPr>
+      </p:sp>
+      <p:sp>
+        <p:nvSpPr>
+          <p:cNvPr id="19" name="Text 17"/>
+          <p:cNvSpPr txBox="1"/>
+          <p:nvPr/>
+        </p:nvSpPr>
+        <p:spPr>
+          <a:xfrm>
+            <a:off x="548640" y="4443984"/>
+            <a:ext cx="960120" cy="182880"/>
           </a:xfrm>
           <a:prstGeom prst="rect">
             <a:avLst/>
@@ -3745,30 +3909,30 @@
               <a:buNone/>
             </a:pPr>
             <a:r>
-              <a:rPr lang="en-US" sz="900" b="1" spc="150" kern="0" dirty="0">
-                <a:solidFill>
-                  <a:srgbClr val="FF6B4A"/>
-                </a:solidFill>
-                <a:latin typeface="Calibri" pitchFamily="34" charset="0"/>
-                <a:ea typeface="Calibri" pitchFamily="34" charset="-122"/>
-                <a:cs typeface="Calibri" pitchFamily="34" charset="-120"/>
-              </a:rPr>
-              <a:t>LIMITS</a:t>
-            </a:r>
-            <a:endParaRPr lang="en-US" sz="900" dirty="0"/>
-          </a:p>
-        </p:txBody>
-      </p:sp>
-      <p:sp>
-        <p:nvSpPr>
-          <p:cNvPr id="15" name="Text 13"/>
-          <p:cNvSpPr txBox="1"/>
-          <p:nvPr/>
-        </p:nvSpPr>
-        <p:spPr>
-          <a:xfrm>
-            <a:off x="1600200" y="4288536"/>
-            <a:ext cx="3063240" cy="365760"/>
+              <a:rPr lang="en-US" sz="1050" b="1" dirty="0">
+                <a:solidFill>
+                  <a:srgbClr val="1D1D1F"/>
+                </a:solidFill>
+                <a:latin typeface="Helvetica Neue" pitchFamily="34" charset="0"/>
+                <a:ea typeface="Helvetica Neue" pitchFamily="34" charset="-122"/>
+                <a:cs typeface="Helvetica Neue" pitchFamily="34" charset="-120"/>
+              </a:rPr>
+              <a:t>Limits</a:t>
+            </a:r>
+            <a:endParaRPr lang="en-US" sz="1050" dirty="0"/>
+          </a:p>
+        </p:txBody>
+      </p:sp>
+      <p:sp>
+        <p:nvSpPr>
+          <p:cNvPr id="20" name="Text 18"/>
+          <p:cNvSpPr txBox="1"/>
+          <p:nvPr/>
+        </p:nvSpPr>
+        <p:spPr>
+          <a:xfrm>
+            <a:off x="1554480" y="4443984"/>
+            <a:ext cx="3108960" cy="384048"/>
           </a:xfrm>
           <a:prstGeom prst="rect">
             <a:avLst/>
@@ -3784,42 +3948,42 @@
               <a:buNone/>
             </a:pPr>
             <a:r>
-              <a:rPr lang="en-US" sz="1100" dirty="0">
-                <a:solidFill>
-                  <a:srgbClr val="1F2A2A"/>
-                </a:solidFill>
-                <a:latin typeface="Calibri" pitchFamily="34" charset="0"/>
-                <a:ea typeface="Calibri" pitchFamily="34" charset="-122"/>
-                <a:cs typeface="Calibri" pitchFamily="34" charset="-120"/>
+              <a:rPr lang="en-US" sz="1050" dirty="0">
+                <a:solidFill>
+                  <a:srgbClr val="424245"/>
+                </a:solidFill>
+                <a:latin typeface="Helvetica Neue" pitchFamily="34" charset="0"/>
+                <a:ea typeface="Helvetica Neue" pitchFamily="34" charset="-122"/>
+                <a:cs typeface="Helvetica Neue" pitchFamily="34" charset="-120"/>
               </a:rPr>
               <a:t>Only 3 expiration dates per snapshot, and no trading volume.</a:t>
             </a:r>
-            <a:endParaRPr lang="en-US" sz="1100" dirty="0"/>
-          </a:p>
-        </p:txBody>
-      </p:sp>
-      <p:sp>
-        <p:nvSpPr>
-          <p:cNvPr id="16" name="Shape 14"/>
+            <a:endParaRPr lang="en-US" sz="1050" dirty="0"/>
+          </a:p>
+        </p:txBody>
+      </p:sp>
+      <p:sp>
+        <p:nvSpPr>
+          <p:cNvPr id="21" name="Shape 19"/>
           <p:cNvSpPr/>
           <p:nvPr/>
         </p:nvSpPr>
         <p:spPr>
           <a:xfrm>
-            <a:off x="5029200" y="1325880"/>
+            <a:off x="5029200" y="1371600"/>
             <a:ext cx="3566160" cy="3337560"/>
           </a:xfrm>
           <a:prstGeom prst="roundRect">
             <a:avLst>
-              <a:gd name="adj" fmla="val 2192"/>
+              <a:gd name="adj" fmla="val 4384"/>
             </a:avLst>
           </a:prstGeom>
           <a:solidFill>
-            <a:srgbClr val="E8F3F1"/>
+            <a:srgbClr val="F5F5F7"/>
           </a:solidFill>
           <a:ln w="12700">
             <a:solidFill>
-              <a:srgbClr val="E8F3F1"/>
+              <a:srgbClr val="F5F5F7"/>
             </a:solidFill>
             <a:prstDash val="solid"/>
           </a:ln>
@@ -3827,14 +3991,14 @@
       </p:sp>
       <p:sp>
         <p:nvSpPr>
-          <p:cNvPr id="17" name="Text 15"/>
-          <p:cNvSpPr txBox="1"/>
-          <p:nvPr/>
-        </p:nvSpPr>
-        <p:spPr>
-          <a:xfrm>
-            <a:off x="5166360" y="1463040"/>
-            <a:ext cx="3337560" cy="228600"/>
+          <p:cNvPr id="22" name="Text 20"/>
+          <p:cNvSpPr txBox="1"/>
+          <p:nvPr/>
+        </p:nvSpPr>
+        <p:spPr>
+          <a:xfrm>
+            <a:off x="5257800" y="1554480"/>
+            <a:ext cx="3154680" cy="228600"/>
           </a:xfrm>
           <a:prstGeom prst="rect">
             <a:avLst/>
@@ -3852,11 +4016,11 @@
             <a:r>
               <a:rPr lang="en-US" sz="1050" b="1" dirty="0">
                 <a:solidFill>
-                  <a:srgbClr val="0F2A2A"/>
-                </a:solidFill>
-                <a:latin typeface="Calibri" pitchFamily="34" charset="0"/>
-                <a:ea typeface="Calibri" pitchFamily="34" charset="-122"/>
-                <a:cs typeface="Calibri" pitchFamily="34" charset="-120"/>
+                  <a:srgbClr val="1D1D1F"/>
+                </a:solidFill>
+                <a:latin typeface="Helvetica Neue" pitchFamily="34" charset="0"/>
+                <a:ea typeface="Helvetica Neue" pitchFamily="34" charset="-122"/>
+                <a:cs typeface="Helvetica Neue" pitchFamily="34" charset="-120"/>
               </a:rPr>
               <a:t>Apple: expected move by strike price, Sep 30, 2026</a:t>
             </a:r>
@@ -3866,13 +4030,13 @@
       </p:sp>
       <p:graphicFrame>
         <p:nvGraphicFramePr>
-          <p:cNvPr id="18" name="Chart 0" descr=""/>
+          <p:cNvPr id="23" name="Chart 0" descr=""/>
           <p:cNvGraphicFramePr/>
           <p:nvPr/>
         </p:nvGraphicFramePr>
         <p:xfrm>
-          <a:off x="5120640" y="1691640"/>
-          <a:ext cx="3383280" cy="2286000"/>
+          <a:off x="5120640" y="1783080"/>
+          <a:ext cx="3383280" cy="2240280"/>
         </p:xfrm>
         <a:graphic xmlns:a="http://schemas.openxmlformats.org/drawingml/2006/main">
           <a:graphicData uri="http://schemas.openxmlformats.org/drawingml/2006/chart">
@@ -3882,14 +4046,14 @@
       </p:graphicFrame>
       <p:sp>
         <p:nvSpPr>
-          <p:cNvPr id="19" name="Text 16"/>
-          <p:cNvSpPr txBox="1"/>
-          <p:nvPr/>
-        </p:nvSpPr>
-        <p:spPr>
-          <a:xfrm>
-            <a:off x="5212080" y="4041648"/>
-            <a:ext cx="3200400" cy="502920"/>
+          <p:cNvPr id="24" name="Text 21"/>
+          <p:cNvSpPr txBox="1"/>
+          <p:nvPr/>
+        </p:nvSpPr>
+        <p:spPr>
+          <a:xfrm>
+            <a:off x="5257800" y="4069080"/>
+            <a:ext cx="3154680" cy="502920"/>
           </a:xfrm>
           <a:prstGeom prst="rect">
             <a:avLst/>
@@ -3905,17 +4069,17 @@
               <a:buNone/>
             </a:pPr>
             <a:r>
-              <a:rPr lang="en-US" sz="950" i="1" dirty="0">
-                <a:solidFill>
-                  <a:srgbClr val="5F7371"/>
-                </a:solidFill>
-                <a:latin typeface="Calibri" pitchFamily="34" charset="0"/>
-                <a:ea typeface="Calibri" pitchFamily="34" charset="-122"/>
-                <a:cs typeface="Calibri" pitchFamily="34" charset="-120"/>
+              <a:rPr lang="en-US" sz="900" dirty="0">
+                <a:solidFill>
+                  <a:srgbClr val="6E6E73"/>
+                </a:solidFill>
+                <a:latin typeface="Helvetica Neue" pitchFamily="34" charset="0"/>
+                <a:ea typeface="Helvetica Neue" pitchFamily="34" charset="-122"/>
+                <a:cs typeface="Helvetica Neue" pitchFamily="34" charset="-120"/>
               </a:rPr>
               <a:t>Each dot is a real option expiring Oct 30. Options far from today's price (~$335) are priced for bigger moves, so the curve rises at both ends.</a:t>
             </a:r>
-            <a:endParaRPr lang="en-US" sz="950" dirty="0"/>
+            <a:endParaRPr lang="en-US" sz="900" dirty="0"/>
           </a:p>
         </p:txBody>
       </p:sp>
@@ -3959,7 +4123,7 @@
         </p:nvSpPr>
         <p:spPr>
           <a:xfrm>
-            <a:off x="548640" y="365760"/>
+            <a:off x="548640" y="411480"/>
             <a:ext cx="8046720" cy="228600"/>
           </a:xfrm>
           <a:prstGeom prst="rect">
@@ -3976,17 +4140,17 @@
               <a:buNone/>
             </a:pPr>
             <a:r>
-              <a:rPr lang="en-US" sz="1100" b="1" spc="300" kern="0" dirty="0">
-                <a:solidFill>
-                  <a:srgbClr val="FF6B4A"/>
-                </a:solidFill>
-                <a:latin typeface="Calibri" pitchFamily="34" charset="0"/>
-                <a:ea typeface="Calibri" pitchFamily="34" charset="-122"/>
-                <a:cs typeface="Calibri" pitchFamily="34" charset="-120"/>
-              </a:rPr>
-              <a:t>OUR SOLUTION</a:t>
-            </a:r>
-            <a:endParaRPr lang="en-US" sz="1100" dirty="0"/>
+              <a:rPr lang="en-US" sz="1300" dirty="0">
+                <a:solidFill>
+                  <a:srgbClr val="6E6E73"/>
+                </a:solidFill>
+                <a:latin typeface="Helvetica Neue" pitchFamily="34" charset="0"/>
+                <a:ea typeface="Helvetica Neue" pitchFamily="34" charset="-122"/>
+                <a:cs typeface="Helvetica Neue" pitchFamily="34" charset="-120"/>
+              </a:rPr>
+              <a:t>Solution</a:t>
+            </a:r>
+            <a:endParaRPr lang="en-US" sz="1300" dirty="0"/>
           </a:p>
         </p:txBody>
       </p:sp>
@@ -3998,7 +4162,7 @@
         </p:nvSpPr>
         <p:spPr>
           <a:xfrm>
-            <a:off x="548640" y="621792"/>
+            <a:off x="548640" y="676656"/>
             <a:ext cx="8046720" cy="502920"/>
           </a:xfrm>
           <a:prstGeom prst="rect">
@@ -4017,11 +4181,11 @@
             <a:r>
               <a:rPr lang="en-US" sz="3000" b="1" dirty="0">
                 <a:solidFill>
-                  <a:srgbClr val="1F2A2A"/>
-                </a:solidFill>
-                <a:latin typeface="Calibri" pitchFamily="34" charset="0"/>
-                <a:ea typeface="Calibri" pitchFamily="34" charset="-122"/>
-                <a:cs typeface="Calibri" pitchFamily="34" charset="-120"/>
+                  <a:srgbClr val="1D1D1F"/>
+                </a:solidFill>
+                <a:latin typeface="Helvetica Neue" pitchFamily="34" charset="0"/>
+                <a:ea typeface="Helvetica Neue" pitchFamily="34" charset="-122"/>
+                <a:cs typeface="Helvetica Neue" pitchFamily="34" charset="-120"/>
               </a:rPr>
               <a:t>From raw prices to a tool anyone can use</a:t>
             </a:r>
@@ -4037,20 +4201,20 @@
         </p:nvSpPr>
         <p:spPr>
           <a:xfrm>
-            <a:off x="548640" y="1325880"/>
-            <a:ext cx="1874520" cy="2240280"/>
+            <a:off x="548640" y="1371600"/>
+            <a:ext cx="1874520" cy="2148840"/>
           </a:xfrm>
           <a:prstGeom prst="roundRect">
             <a:avLst>
-              <a:gd name="adj" fmla="val 3902"/>
+              <a:gd name="adj" fmla="val 7805"/>
             </a:avLst>
           </a:prstGeom>
           <a:solidFill>
-            <a:srgbClr val="E8F3F1"/>
+            <a:srgbClr val="F5F5F7"/>
           </a:solidFill>
           <a:ln w="12700">
             <a:solidFill>
-              <a:srgbClr val="E8F3F1"/>
+              <a:srgbClr val="F5F5F7"/>
             </a:solidFill>
             <a:prstDash val="solid"/>
           </a:ln>
@@ -4058,24 +4222,143 @@
       </p:sp>
       <p:sp>
         <p:nvSpPr>
-          <p:cNvPr id="5" name="Shape 3"/>
+          <p:cNvPr id="5" name="Text 3"/>
+          <p:cNvSpPr txBox="1"/>
+          <p:nvPr/>
+        </p:nvSpPr>
+        <p:spPr>
+          <a:xfrm>
+            <a:off x="749808" y="1572768"/>
+            <a:ext cx="1508760" cy="182880"/>
+          </a:xfrm>
+          <a:prstGeom prst="rect">
+            <a:avLst/>
+          </a:prstGeom>
+          <a:noFill/>
+          <a:ln/>
+        </p:spPr>
+        <p:txBody>
+          <a:bodyPr wrap="square" lIns="0" tIns="0" rIns="0" bIns="0" rtlCol="0" anchor="t"/>
+          <a:lstStyle/>
+          <a:p>
+            <a:pPr indent="0" marL="0">
+              <a:buNone/>
+            </a:pPr>
+            <a:r>
+              <a:rPr lang="en-US" sz="1000" dirty="0">
+                <a:solidFill>
+                  <a:srgbClr val="6E6E73"/>
+                </a:solidFill>
+                <a:latin typeface="Helvetica Neue" pitchFamily="34" charset="0"/>
+                <a:ea typeface="Helvetica Neue" pitchFamily="34" charset="-122"/>
+                <a:cs typeface="Helvetica Neue" pitchFamily="34" charset="-120"/>
+              </a:rPr>
+              <a:t>Step 1</a:t>
+            </a:r>
+            <a:endParaRPr lang="en-US" sz="1000" dirty="0"/>
+          </a:p>
+        </p:txBody>
+      </p:sp>
+      <p:sp>
+        <p:nvSpPr>
+          <p:cNvPr id="6" name="Text 4"/>
+          <p:cNvSpPr txBox="1"/>
+          <p:nvPr/>
+        </p:nvSpPr>
+        <p:spPr>
+          <a:xfrm>
+            <a:off x="749808" y="1783080"/>
+            <a:ext cx="1508760" cy="274320"/>
+          </a:xfrm>
+          <a:prstGeom prst="rect">
+            <a:avLst/>
+          </a:prstGeom>
+          <a:noFill/>
+          <a:ln/>
+        </p:spPr>
+        <p:txBody>
+          <a:bodyPr wrap="square" lIns="0" tIns="0" rIns="0" bIns="0" rtlCol="0" anchor="t"/>
+          <a:lstStyle/>
+          <a:p>
+            <a:pPr indent="0" marL="0">
+              <a:buNone/>
+            </a:pPr>
+            <a:r>
+              <a:rPr lang="en-US" sz="1500" b="1" dirty="0">
+                <a:solidFill>
+                  <a:srgbClr val="1D1D1F"/>
+                </a:solidFill>
+                <a:latin typeface="Helvetica Neue" pitchFamily="34" charset="0"/>
+                <a:ea typeface="Helvetica Neue" pitchFamily="34" charset="-122"/>
+                <a:cs typeface="Helvetica Neue" pitchFamily="34" charset="-120"/>
+              </a:rPr>
+              <a:t>Collect &amp; clean</a:t>
+            </a:r>
+            <a:endParaRPr lang="en-US" sz="1500" dirty="0"/>
+          </a:p>
+        </p:txBody>
+      </p:sp>
+      <p:sp>
+        <p:nvSpPr>
+          <p:cNvPr id="7" name="Text 5"/>
+          <p:cNvSpPr txBox="1"/>
+          <p:nvPr/>
+        </p:nvSpPr>
+        <p:spPr>
+          <a:xfrm>
+            <a:off x="749808" y="2130552"/>
+            <a:ext cx="1508760" cy="1280160"/>
+          </a:xfrm>
+          <a:prstGeom prst="rect">
+            <a:avLst/>
+          </a:prstGeom>
+          <a:noFill/>
+          <a:ln/>
+        </p:spPr>
+        <p:txBody>
+          <a:bodyPr wrap="square" lIns="0" tIns="0" rIns="0" bIns="0" rtlCol="0" anchor="t"/>
+          <a:lstStyle/>
+          <a:p>
+            <a:pPr indent="0" marL="0">
+              <a:buNone/>
+            </a:pPr>
+            <a:r>
+              <a:rPr lang="en-US" sz="1000" dirty="0">
+                <a:solidFill>
+                  <a:srgbClr val="424245"/>
+                </a:solidFill>
+                <a:latin typeface="Helvetica Neue" pitchFamily="34" charset="0"/>
+                <a:ea typeface="Helvetica Neue" pitchFamily="34" charset="-122"/>
+                <a:cs typeface="Helvetica Neue" pitchFamily="34" charset="-120"/>
+              </a:rPr>
+              <a:t>Pull about 10 stocks with Python. Drop broken quotes (zero bids, extreme values). Line up dates across both tables.</a:t>
+            </a:r>
+            <a:endParaRPr lang="en-US" sz="1000" dirty="0"/>
+          </a:p>
+        </p:txBody>
+      </p:sp>
+      <p:sp>
+        <p:nvSpPr>
+          <p:cNvPr id="8" name="Shape 6"/>
           <p:cNvSpPr/>
           <p:nvPr/>
         </p:nvSpPr>
         <p:spPr>
           <a:xfrm>
-            <a:off x="731520" y="1490472"/>
-            <a:ext cx="384048" cy="384048"/>
-          </a:xfrm>
-          <a:prstGeom prst="ellipse">
-            <a:avLst/>
+            <a:off x="2606040" y="1371600"/>
+            <a:ext cx="1874520" cy="2148840"/>
+          </a:xfrm>
+          <a:prstGeom prst="roundRect">
+            <a:avLst>
+              <a:gd name="adj" fmla="val 7805"/>
+            </a:avLst>
           </a:prstGeom>
           <a:solidFill>
-            <a:srgbClr val="0F2A2A"/>
+            <a:srgbClr val="F5F5F7"/>
           </a:solidFill>
           <a:ln w="12700">
             <a:solidFill>
-              <a:srgbClr val="0F2A2A"/>
+              <a:srgbClr val="F5F5F7"/>
             </a:solidFill>
             <a:prstDash val="solid"/>
           </a:ln>
@@ -4083,53 +4366,14 @@
       </p:sp>
       <p:sp>
         <p:nvSpPr>
-          <p:cNvPr id="6" name="Text 4"/>
-          <p:cNvSpPr txBox="1"/>
-          <p:nvPr/>
-        </p:nvSpPr>
-        <p:spPr>
-          <a:xfrm>
-            <a:off x="731520" y="1490472"/>
-            <a:ext cx="384048" cy="384048"/>
-          </a:xfrm>
-          <a:prstGeom prst="rect">
-            <a:avLst/>
-          </a:prstGeom>
-          <a:noFill/>
-          <a:ln/>
-        </p:spPr>
-        <p:txBody>
-          <a:bodyPr wrap="square" lIns="0" tIns="0" rIns="0" bIns="0" rtlCol="0" anchor="ctr"/>
-          <a:lstStyle/>
-          <a:p>
-            <a:pPr algn="ctr" indent="0" marL="0">
-              <a:buNone/>
-            </a:pPr>
-            <a:r>
-              <a:rPr lang="en-US" sz="1400" b="1" dirty="0">
-                <a:solidFill>
-                  <a:srgbClr val="FFFFFF"/>
-                </a:solidFill>
-                <a:latin typeface="Calibri" pitchFamily="34" charset="0"/>
-                <a:ea typeface="Calibri" pitchFamily="34" charset="-122"/>
-                <a:cs typeface="Calibri" pitchFamily="34" charset="-120"/>
-              </a:rPr>
-              <a:t>1</a:t>
-            </a:r>
-            <a:endParaRPr lang="en-US" sz="1400" dirty="0"/>
-          </a:p>
-        </p:txBody>
-      </p:sp>
-      <p:sp>
-        <p:nvSpPr>
-          <p:cNvPr id="7" name="Text 5"/>
-          <p:cNvSpPr txBox="1"/>
-          <p:nvPr/>
-        </p:nvSpPr>
-        <p:spPr>
-          <a:xfrm>
-            <a:off x="731520" y="1993392"/>
-            <a:ext cx="1554480" cy="237744"/>
+          <p:cNvPr id="9" name="Text 7"/>
+          <p:cNvSpPr txBox="1"/>
+          <p:nvPr/>
+        </p:nvSpPr>
+        <p:spPr>
+          <a:xfrm>
+            <a:off x="2807208" y="1572768"/>
+            <a:ext cx="1508760" cy="182880"/>
           </a:xfrm>
           <a:prstGeom prst="rect">
             <a:avLst/>
@@ -4145,30 +4389,30 @@
               <a:buNone/>
             </a:pPr>
             <a:r>
-              <a:rPr lang="en-US" sz="1400" b="1" dirty="0">
-                <a:solidFill>
-                  <a:srgbClr val="0F2A2A"/>
-                </a:solidFill>
-                <a:latin typeface="Calibri" pitchFamily="34" charset="0"/>
-                <a:ea typeface="Calibri" pitchFamily="34" charset="-122"/>
-                <a:cs typeface="Calibri" pitchFamily="34" charset="-120"/>
-              </a:rPr>
-              <a:t>Collect &amp; clean</a:t>
-            </a:r>
-            <a:endParaRPr lang="en-US" sz="1400" dirty="0"/>
-          </a:p>
-        </p:txBody>
-      </p:sp>
-      <p:sp>
-        <p:nvSpPr>
-          <p:cNvPr id="8" name="Text 6"/>
-          <p:cNvSpPr txBox="1"/>
-          <p:nvPr/>
-        </p:nvSpPr>
-        <p:spPr>
-          <a:xfrm>
-            <a:off x="731520" y="2267712"/>
-            <a:ext cx="1554480" cy="1234440"/>
+              <a:rPr lang="en-US" sz="1000" dirty="0">
+                <a:solidFill>
+                  <a:srgbClr val="6E6E73"/>
+                </a:solidFill>
+                <a:latin typeface="Helvetica Neue" pitchFamily="34" charset="0"/>
+                <a:ea typeface="Helvetica Neue" pitchFamily="34" charset="-122"/>
+                <a:cs typeface="Helvetica Neue" pitchFamily="34" charset="-120"/>
+              </a:rPr>
+              <a:t>Step 2</a:t>
+            </a:r>
+            <a:endParaRPr lang="en-US" sz="1000" dirty="0"/>
+          </a:p>
+        </p:txBody>
+      </p:sp>
+      <p:sp>
+        <p:nvSpPr>
+          <p:cNvPr id="10" name="Text 8"/>
+          <p:cNvSpPr txBox="1"/>
+          <p:nvPr/>
+        </p:nvSpPr>
+        <p:spPr>
+          <a:xfrm>
+            <a:off x="2807208" y="1783080"/>
+            <a:ext cx="1508760" cy="274320"/>
           </a:xfrm>
           <a:prstGeom prst="rect">
             <a:avLst/>
@@ -4184,42 +4428,81 @@
               <a:buNone/>
             </a:pPr>
             <a:r>
-              <a:rPr lang="en-US" sz="1050" dirty="0">
-                <a:solidFill>
-                  <a:srgbClr val="1F2A2A"/>
-                </a:solidFill>
-                <a:latin typeface="Calibri" pitchFamily="34" charset="0"/>
-                <a:ea typeface="Calibri" pitchFamily="34" charset="-122"/>
-                <a:cs typeface="Calibri" pitchFamily="34" charset="-120"/>
-              </a:rPr>
-              <a:t>Pull about 10 stocks with Python. Drop broken quotes (zero bids, extreme values). Line up dates across both tables.</a:t>
-            </a:r>
-            <a:endParaRPr lang="en-US" sz="1050" dirty="0"/>
-          </a:p>
-        </p:txBody>
-      </p:sp>
-      <p:sp>
-        <p:nvSpPr>
-          <p:cNvPr id="9" name="Shape 7"/>
+              <a:rPr lang="en-US" sz="1500" b="1" dirty="0">
+                <a:solidFill>
+                  <a:srgbClr val="1D1D1F"/>
+                </a:solidFill>
+                <a:latin typeface="Helvetica Neue" pitchFamily="34" charset="0"/>
+                <a:ea typeface="Helvetica Neue" pitchFamily="34" charset="-122"/>
+                <a:cs typeface="Helvetica Neue" pitchFamily="34" charset="-120"/>
+              </a:rPr>
+              <a:t>Explore</a:t>
+            </a:r>
+            <a:endParaRPr lang="en-US" sz="1500" dirty="0"/>
+          </a:p>
+        </p:txBody>
+      </p:sp>
+      <p:sp>
+        <p:nvSpPr>
+          <p:cNvPr id="11" name="Text 9"/>
+          <p:cNvSpPr txBox="1"/>
+          <p:nvPr/>
+        </p:nvSpPr>
+        <p:spPr>
+          <a:xfrm>
+            <a:off x="2807208" y="2130552"/>
+            <a:ext cx="1508760" cy="1280160"/>
+          </a:xfrm>
+          <a:prstGeom prst="rect">
+            <a:avLst/>
+          </a:prstGeom>
+          <a:noFill/>
+          <a:ln/>
+        </p:spPr>
+        <p:txBody>
+          <a:bodyPr wrap="square" lIns="0" tIns="0" rIns="0" bIns="0" rtlCol="0" anchor="t"/>
+          <a:lstStyle/>
+          <a:p>
+            <a:pPr indent="0" marL="0">
+              <a:buNone/>
+            </a:pPr>
+            <a:r>
+              <a:rPr lang="en-US" sz="1000" dirty="0">
+                <a:solidFill>
+                  <a:srgbClr val="424245"/>
+                </a:solidFill>
+                <a:latin typeface="Helvetica Neue" pitchFamily="34" charset="0"/>
+                <a:ea typeface="Helvetica Neue" pitchFamily="34" charset="-122"/>
+                <a:cs typeface="Helvetica Neue" pitchFamily="34" charset="-120"/>
+              </a:rPr>
+              <a:t>Chart each stock's curve, then see how it shifts over time and around big news.</a:t>
+            </a:r>
+            <a:endParaRPr lang="en-US" sz="1000" dirty="0"/>
+          </a:p>
+        </p:txBody>
+      </p:sp>
+      <p:sp>
+        <p:nvSpPr>
+          <p:cNvPr id="12" name="Shape 10"/>
           <p:cNvSpPr/>
           <p:nvPr/>
         </p:nvSpPr>
         <p:spPr>
           <a:xfrm>
-            <a:off x="2606040" y="1325880"/>
-            <a:ext cx="1874520" cy="2240280"/>
+            <a:off x="4663440" y="1371600"/>
+            <a:ext cx="1874520" cy="2148840"/>
           </a:xfrm>
           <a:prstGeom prst="roundRect">
             <a:avLst>
-              <a:gd name="adj" fmla="val 3902"/>
+              <a:gd name="adj" fmla="val 7805"/>
             </a:avLst>
           </a:prstGeom>
           <a:solidFill>
-            <a:srgbClr val="E8F3F1"/>
+            <a:srgbClr val="F5F5F7"/>
           </a:solidFill>
           <a:ln w="12700">
             <a:solidFill>
-              <a:srgbClr val="E8F3F1"/>
+              <a:srgbClr val="F5F5F7"/>
             </a:solidFill>
             <a:prstDash val="solid"/>
           </a:ln>
@@ -4227,24 +4510,143 @@
       </p:sp>
       <p:sp>
         <p:nvSpPr>
-          <p:cNvPr id="10" name="Shape 8"/>
+          <p:cNvPr id="13" name="Text 11"/>
+          <p:cNvSpPr txBox="1"/>
+          <p:nvPr/>
+        </p:nvSpPr>
+        <p:spPr>
+          <a:xfrm>
+            <a:off x="4864608" y="1572768"/>
+            <a:ext cx="1508760" cy="182880"/>
+          </a:xfrm>
+          <a:prstGeom prst="rect">
+            <a:avLst/>
+          </a:prstGeom>
+          <a:noFill/>
+          <a:ln/>
+        </p:spPr>
+        <p:txBody>
+          <a:bodyPr wrap="square" lIns="0" tIns="0" rIns="0" bIns="0" rtlCol="0" anchor="t"/>
+          <a:lstStyle/>
+          <a:p>
+            <a:pPr indent="0" marL="0">
+              <a:buNone/>
+            </a:pPr>
+            <a:r>
+              <a:rPr lang="en-US" sz="1000" dirty="0">
+                <a:solidFill>
+                  <a:srgbClr val="6E6E73"/>
+                </a:solidFill>
+                <a:latin typeface="Helvetica Neue" pitchFamily="34" charset="0"/>
+                <a:ea typeface="Helvetica Neue" pitchFamily="34" charset="-122"/>
+                <a:cs typeface="Helvetica Neue" pitchFamily="34" charset="-120"/>
+              </a:rPr>
+              <a:t>Step 3</a:t>
+            </a:r>
+            <a:endParaRPr lang="en-US" sz="1000" dirty="0"/>
+          </a:p>
+        </p:txBody>
+      </p:sp>
+      <p:sp>
+        <p:nvSpPr>
+          <p:cNvPr id="14" name="Text 12"/>
+          <p:cNvSpPr txBox="1"/>
+          <p:nvPr/>
+        </p:nvSpPr>
+        <p:spPr>
+          <a:xfrm>
+            <a:off x="4864608" y="1783080"/>
+            <a:ext cx="1508760" cy="274320"/>
+          </a:xfrm>
+          <a:prstGeom prst="rect">
+            <a:avLst/>
+          </a:prstGeom>
+          <a:noFill/>
+          <a:ln/>
+        </p:spPr>
+        <p:txBody>
+          <a:bodyPr wrap="square" lIns="0" tIns="0" rIns="0" bIns="0" rtlCol="0" anchor="t"/>
+          <a:lstStyle/>
+          <a:p>
+            <a:pPr indent="0" marL="0">
+              <a:buNone/>
+            </a:pPr>
+            <a:r>
+              <a:rPr lang="en-US" sz="1500" b="1" dirty="0">
+                <a:solidFill>
+                  <a:srgbClr val="1D1D1F"/>
+                </a:solidFill>
+                <a:latin typeface="Helvetica Neue" pitchFamily="34" charset="0"/>
+                <a:ea typeface="Helvetica Neue" pitchFamily="34" charset="-122"/>
+                <a:cs typeface="Helvetica Neue" pitchFamily="34" charset="-120"/>
+              </a:rPr>
+              <a:t>Predict</a:t>
+            </a:r>
+            <a:endParaRPr lang="en-US" sz="1500" dirty="0"/>
+          </a:p>
+        </p:txBody>
+      </p:sp>
+      <p:sp>
+        <p:nvSpPr>
+          <p:cNvPr id="15" name="Text 13"/>
+          <p:cNvSpPr txBox="1"/>
+          <p:nvPr/>
+        </p:nvSpPr>
+        <p:spPr>
+          <a:xfrm>
+            <a:off x="4864608" y="2130552"/>
+            <a:ext cx="1508760" cy="1280160"/>
+          </a:xfrm>
+          <a:prstGeom prst="rect">
+            <a:avLst/>
+          </a:prstGeom>
+          <a:noFill/>
+          <a:ln/>
+        </p:spPr>
+        <p:txBody>
+          <a:bodyPr wrap="square" lIns="0" tIns="0" rIns="0" bIns="0" rtlCol="0" anchor="t"/>
+          <a:lstStyle/>
+          <a:p>
+            <a:pPr indent="0" marL="0">
+              <a:buNone/>
+            </a:pPr>
+            <a:r>
+              <a:rPr lang="en-US" sz="1000" dirty="0">
+                <a:solidFill>
+                  <a:srgbClr val="424245"/>
+                </a:solidFill>
+                <a:latin typeface="Helvetica Neue" pitchFamily="34" charset="0"/>
+                <a:ea typeface="Helvetica Neue" pitchFamily="34" charset="-122"/>
+                <a:cs typeface="Helvetica Neue" pitchFamily="34" charset="-120"/>
+              </a:rPr>
+              <a:t>Will the stock move less than traders expected? We try logistic regression, a random forest, and clustering. Baseline: always guess "yes."</a:t>
+            </a:r>
+            <a:endParaRPr lang="en-US" sz="1000" dirty="0"/>
+          </a:p>
+        </p:txBody>
+      </p:sp>
+      <p:sp>
+        <p:nvSpPr>
+          <p:cNvPr id="16" name="Shape 14"/>
           <p:cNvSpPr/>
           <p:nvPr/>
         </p:nvSpPr>
         <p:spPr>
           <a:xfrm>
-            <a:off x="2788920" y="1490472"/>
-            <a:ext cx="384048" cy="384048"/>
-          </a:xfrm>
-          <a:prstGeom prst="ellipse">
-            <a:avLst/>
+            <a:off x="6720840" y="1371600"/>
+            <a:ext cx="1874520" cy="2148840"/>
+          </a:xfrm>
+          <a:prstGeom prst="roundRect">
+            <a:avLst>
+              <a:gd name="adj" fmla="val 7805"/>
+            </a:avLst>
           </a:prstGeom>
           <a:solidFill>
-            <a:srgbClr val="0F2A2A"/>
+            <a:srgbClr val="F5F5F7"/>
           </a:solidFill>
           <a:ln w="12700">
             <a:solidFill>
-              <a:srgbClr val="0F2A2A"/>
+              <a:srgbClr val="F5F5F7"/>
             </a:solidFill>
             <a:prstDash val="solid"/>
           </a:ln>
@@ -4252,53 +4654,14 @@
       </p:sp>
       <p:sp>
         <p:nvSpPr>
-          <p:cNvPr id="11" name="Text 9"/>
-          <p:cNvSpPr txBox="1"/>
-          <p:nvPr/>
-        </p:nvSpPr>
-        <p:spPr>
-          <a:xfrm>
-            <a:off x="2788920" y="1490472"/>
-            <a:ext cx="384048" cy="384048"/>
-          </a:xfrm>
-          <a:prstGeom prst="rect">
-            <a:avLst/>
-          </a:prstGeom>
-          <a:noFill/>
-          <a:ln/>
-        </p:spPr>
-        <p:txBody>
-          <a:bodyPr wrap="square" lIns="0" tIns="0" rIns="0" bIns="0" rtlCol="0" anchor="ctr"/>
-          <a:lstStyle/>
-          <a:p>
-            <a:pPr algn="ctr" indent="0" marL="0">
-              <a:buNone/>
-            </a:pPr>
-            <a:r>
-              <a:rPr lang="en-US" sz="1400" b="1" dirty="0">
-                <a:solidFill>
-                  <a:srgbClr val="FFFFFF"/>
-                </a:solidFill>
-                <a:latin typeface="Calibri" pitchFamily="34" charset="0"/>
-                <a:ea typeface="Calibri" pitchFamily="34" charset="-122"/>
-                <a:cs typeface="Calibri" pitchFamily="34" charset="-120"/>
-              </a:rPr>
-              <a:t>2</a:t>
-            </a:r>
-            <a:endParaRPr lang="en-US" sz="1400" dirty="0"/>
-          </a:p>
-        </p:txBody>
-      </p:sp>
-      <p:sp>
-        <p:nvSpPr>
-          <p:cNvPr id="12" name="Text 10"/>
-          <p:cNvSpPr txBox="1"/>
-          <p:nvPr/>
-        </p:nvSpPr>
-        <p:spPr>
-          <a:xfrm>
-            <a:off x="2788920" y="1993392"/>
-            <a:ext cx="1554480" cy="237744"/>
+          <p:cNvPr id="17" name="Text 15"/>
+          <p:cNvSpPr txBox="1"/>
+          <p:nvPr/>
+        </p:nvSpPr>
+        <p:spPr>
+          <a:xfrm>
+            <a:off x="6922008" y="1572768"/>
+            <a:ext cx="1508760" cy="182880"/>
           </a:xfrm>
           <a:prstGeom prst="rect">
             <a:avLst/>
@@ -4314,30 +4677,30 @@
               <a:buNone/>
             </a:pPr>
             <a:r>
-              <a:rPr lang="en-US" sz="1400" b="1" dirty="0">
-                <a:solidFill>
-                  <a:srgbClr val="0F2A2A"/>
-                </a:solidFill>
-                <a:latin typeface="Calibri" pitchFamily="34" charset="0"/>
-                <a:ea typeface="Calibri" pitchFamily="34" charset="-122"/>
-                <a:cs typeface="Calibri" pitchFamily="34" charset="-120"/>
-              </a:rPr>
-              <a:t>Explore</a:t>
-            </a:r>
-            <a:endParaRPr lang="en-US" sz="1400" dirty="0"/>
-          </a:p>
-        </p:txBody>
-      </p:sp>
-      <p:sp>
-        <p:nvSpPr>
-          <p:cNvPr id="13" name="Text 11"/>
-          <p:cNvSpPr txBox="1"/>
-          <p:nvPr/>
-        </p:nvSpPr>
-        <p:spPr>
-          <a:xfrm>
-            <a:off x="2788920" y="2267712"/>
-            <a:ext cx="1554480" cy="1234440"/>
+              <a:rPr lang="en-US" sz="1000" dirty="0">
+                <a:solidFill>
+                  <a:srgbClr val="6E6E73"/>
+                </a:solidFill>
+                <a:latin typeface="Helvetica Neue" pitchFamily="34" charset="0"/>
+                <a:ea typeface="Helvetica Neue" pitchFamily="34" charset="-122"/>
+                <a:cs typeface="Helvetica Neue" pitchFamily="34" charset="-120"/>
+              </a:rPr>
+              <a:t>Step 4</a:t>
+            </a:r>
+            <a:endParaRPr lang="en-US" sz="1000" dirty="0"/>
+          </a:p>
+        </p:txBody>
+      </p:sp>
+      <p:sp>
+        <p:nvSpPr>
+          <p:cNvPr id="18" name="Text 16"/>
+          <p:cNvSpPr txBox="1"/>
+          <p:nvPr/>
+        </p:nvSpPr>
+        <p:spPr>
+          <a:xfrm>
+            <a:off x="6922008" y="1783080"/>
+            <a:ext cx="1508760" cy="274320"/>
           </a:xfrm>
           <a:prstGeom prst="rect">
             <a:avLst/>
@@ -4353,121 +4716,30 @@
               <a:buNone/>
             </a:pPr>
             <a:r>
-              <a:rPr lang="en-US" sz="1050" dirty="0">
-                <a:solidFill>
-                  <a:srgbClr val="1F2A2A"/>
-                </a:solidFill>
-                <a:latin typeface="Calibri" pitchFamily="34" charset="0"/>
-                <a:ea typeface="Calibri" pitchFamily="34" charset="-122"/>
-                <a:cs typeface="Calibri" pitchFamily="34" charset="-120"/>
-              </a:rPr>
-              <a:t>Chart each stock's curve, then see how it shifts over time and around big news.</a:t>
-            </a:r>
-            <a:endParaRPr lang="en-US" sz="1050" dirty="0"/>
-          </a:p>
-        </p:txBody>
-      </p:sp>
-      <p:sp>
-        <p:nvSpPr>
-          <p:cNvPr id="14" name="Shape 12"/>
-          <p:cNvSpPr/>
-          <p:nvPr/>
-        </p:nvSpPr>
-        <p:spPr>
-          <a:xfrm>
-            <a:off x="4663440" y="1325880"/>
-            <a:ext cx="1874520" cy="2240280"/>
-          </a:xfrm>
-          <a:prstGeom prst="roundRect">
-            <a:avLst>
-              <a:gd name="adj" fmla="val 3902"/>
-            </a:avLst>
-          </a:prstGeom>
-          <a:solidFill>
-            <a:srgbClr val="E8F3F1"/>
-          </a:solidFill>
-          <a:ln w="12700">
-            <a:solidFill>
-              <a:srgbClr val="E8F3F1"/>
-            </a:solidFill>
-            <a:prstDash val="solid"/>
-          </a:ln>
-        </p:spPr>
-      </p:sp>
-      <p:sp>
-        <p:nvSpPr>
-          <p:cNvPr id="15" name="Shape 13"/>
-          <p:cNvSpPr/>
-          <p:nvPr/>
-        </p:nvSpPr>
-        <p:spPr>
-          <a:xfrm>
-            <a:off x="4846320" y="1490472"/>
-            <a:ext cx="384048" cy="384048"/>
-          </a:xfrm>
-          <a:prstGeom prst="ellipse">
-            <a:avLst/>
-          </a:prstGeom>
-          <a:solidFill>
-            <a:srgbClr val="0F2A2A"/>
-          </a:solidFill>
-          <a:ln w="12700">
-            <a:solidFill>
-              <a:srgbClr val="0F2A2A"/>
-            </a:solidFill>
-            <a:prstDash val="solid"/>
-          </a:ln>
-        </p:spPr>
-      </p:sp>
-      <p:sp>
-        <p:nvSpPr>
-          <p:cNvPr id="16" name="Text 14"/>
-          <p:cNvSpPr txBox="1"/>
-          <p:nvPr/>
-        </p:nvSpPr>
-        <p:spPr>
-          <a:xfrm>
-            <a:off x="4846320" y="1490472"/>
-            <a:ext cx="384048" cy="384048"/>
-          </a:xfrm>
-          <a:prstGeom prst="rect">
-            <a:avLst/>
-          </a:prstGeom>
-          <a:noFill/>
-          <a:ln/>
-        </p:spPr>
-        <p:txBody>
-          <a:bodyPr wrap="square" lIns="0" tIns="0" rIns="0" bIns="0" rtlCol="0" anchor="ctr"/>
-          <a:lstStyle/>
-          <a:p>
-            <a:pPr algn="ctr" indent="0" marL="0">
-              <a:buNone/>
-            </a:pPr>
-            <a:r>
-              <a:rPr lang="en-US" sz="1400" b="1" dirty="0">
-                <a:solidFill>
-                  <a:srgbClr val="FFFFFF"/>
-                </a:solidFill>
-                <a:latin typeface="Calibri" pitchFamily="34" charset="0"/>
-                <a:ea typeface="Calibri" pitchFamily="34" charset="-122"/>
-                <a:cs typeface="Calibri" pitchFamily="34" charset="-120"/>
-              </a:rPr>
-              <a:t>3</a:t>
-            </a:r>
-            <a:endParaRPr lang="en-US" sz="1400" dirty="0"/>
-          </a:p>
-        </p:txBody>
-      </p:sp>
-      <p:sp>
-        <p:nvSpPr>
-          <p:cNvPr id="17" name="Text 15"/>
-          <p:cNvSpPr txBox="1"/>
-          <p:nvPr/>
-        </p:nvSpPr>
-        <p:spPr>
-          <a:xfrm>
-            <a:off x="4846320" y="1993392"/>
-            <a:ext cx="1554480" cy="237744"/>
+              <a:rPr lang="en-US" sz="1500" b="1" dirty="0">
+                <a:solidFill>
+                  <a:srgbClr val="1D1D1F"/>
+                </a:solidFill>
+                <a:latin typeface="Helvetica Neue" pitchFamily="34" charset="0"/>
+                <a:ea typeface="Helvetica Neue" pitchFamily="34" charset="-122"/>
+                <a:cs typeface="Helvetica Neue" pitchFamily="34" charset="-120"/>
+              </a:rPr>
+              <a:t>Build</a:t>
+            </a:r>
+            <a:endParaRPr lang="en-US" sz="1500" dirty="0"/>
+          </a:p>
+        </p:txBody>
+      </p:sp>
+      <p:sp>
+        <p:nvSpPr>
+          <p:cNvPr id="19" name="Text 17"/>
+          <p:cNvSpPr txBox="1"/>
+          <p:nvPr/>
+        </p:nvSpPr>
+        <p:spPr>
+          <a:xfrm>
+            <a:off x="6922008" y="2130552"/>
+            <a:ext cx="1508760" cy="1280160"/>
           </a:xfrm>
           <a:prstGeom prst="rect">
             <a:avLst/>
@@ -4483,231 +4755,23 @@
               <a:buNone/>
             </a:pPr>
             <a:r>
-              <a:rPr lang="en-US" sz="1400" b="1" dirty="0">
-                <a:solidFill>
-                  <a:srgbClr val="0F2A2A"/>
-                </a:solidFill>
-                <a:latin typeface="Calibri" pitchFamily="34" charset="0"/>
-                <a:ea typeface="Calibri" pitchFamily="34" charset="-122"/>
-                <a:cs typeface="Calibri" pitchFamily="34" charset="-120"/>
-              </a:rPr>
-              <a:t>Predict</a:t>
-            </a:r>
-            <a:endParaRPr lang="en-US" sz="1400" dirty="0"/>
-          </a:p>
-        </p:txBody>
-      </p:sp>
-      <p:sp>
-        <p:nvSpPr>
-          <p:cNvPr id="18" name="Text 16"/>
-          <p:cNvSpPr txBox="1"/>
-          <p:nvPr/>
-        </p:nvSpPr>
-        <p:spPr>
-          <a:xfrm>
-            <a:off x="4846320" y="2267712"/>
-            <a:ext cx="1554480" cy="1234440"/>
-          </a:xfrm>
-          <a:prstGeom prst="rect">
-            <a:avLst/>
-          </a:prstGeom>
-          <a:noFill/>
-          <a:ln/>
-        </p:spPr>
-        <p:txBody>
-          <a:bodyPr wrap="square" lIns="0" tIns="0" rIns="0" bIns="0" rtlCol="0" anchor="t"/>
-          <a:lstStyle/>
-          <a:p>
-            <a:pPr indent="0" marL="0">
-              <a:buNone/>
-            </a:pPr>
-            <a:r>
-              <a:rPr lang="en-US" sz="1050" dirty="0">
-                <a:solidFill>
-                  <a:srgbClr val="1F2A2A"/>
-                </a:solidFill>
-                <a:latin typeface="Calibri" pitchFamily="34" charset="0"/>
-                <a:ea typeface="Calibri" pitchFamily="34" charset="-122"/>
-                <a:cs typeface="Calibri" pitchFamily="34" charset="-120"/>
-              </a:rPr>
-              <a:t>Will the stock move less than traders expected? We try logistic regression, a random forest, and clustering. Baseline: always guess "yes."</a:t>
-            </a:r>
-            <a:endParaRPr lang="en-US" sz="1050" dirty="0"/>
-          </a:p>
-        </p:txBody>
-      </p:sp>
-      <p:sp>
-        <p:nvSpPr>
-          <p:cNvPr id="19" name="Shape 17"/>
-          <p:cNvSpPr/>
-          <p:nvPr/>
-        </p:nvSpPr>
-        <p:spPr>
-          <a:xfrm>
-            <a:off x="6720840" y="1325880"/>
-            <a:ext cx="1874520" cy="2240280"/>
-          </a:xfrm>
-          <a:prstGeom prst="roundRect">
-            <a:avLst>
-              <a:gd name="adj" fmla="val 3902"/>
-            </a:avLst>
-          </a:prstGeom>
-          <a:solidFill>
-            <a:srgbClr val="E8F3F1"/>
-          </a:solidFill>
-          <a:ln w="12700">
-            <a:solidFill>
-              <a:srgbClr val="E8F3F1"/>
-            </a:solidFill>
-            <a:prstDash val="solid"/>
-          </a:ln>
-        </p:spPr>
-      </p:sp>
-      <p:sp>
-        <p:nvSpPr>
-          <p:cNvPr id="20" name="Shape 18"/>
-          <p:cNvSpPr/>
-          <p:nvPr/>
-        </p:nvSpPr>
-        <p:spPr>
-          <a:xfrm>
-            <a:off x="6903720" y="1490472"/>
-            <a:ext cx="384048" cy="384048"/>
-          </a:xfrm>
-          <a:prstGeom prst="ellipse">
-            <a:avLst/>
-          </a:prstGeom>
-          <a:solidFill>
-            <a:srgbClr val="0F2A2A"/>
-          </a:solidFill>
-          <a:ln w="12700">
-            <a:solidFill>
-              <a:srgbClr val="0F2A2A"/>
-            </a:solidFill>
-            <a:prstDash val="solid"/>
-          </a:ln>
-        </p:spPr>
-      </p:sp>
-      <p:sp>
-        <p:nvSpPr>
-          <p:cNvPr id="21" name="Text 19"/>
-          <p:cNvSpPr txBox="1"/>
-          <p:nvPr/>
-        </p:nvSpPr>
-        <p:spPr>
-          <a:xfrm>
-            <a:off x="6903720" y="1490472"/>
-            <a:ext cx="384048" cy="384048"/>
-          </a:xfrm>
-          <a:prstGeom prst="rect">
-            <a:avLst/>
-          </a:prstGeom>
-          <a:noFill/>
-          <a:ln/>
-        </p:spPr>
-        <p:txBody>
-          <a:bodyPr wrap="square" lIns="0" tIns="0" rIns="0" bIns="0" rtlCol="0" anchor="ctr"/>
-          <a:lstStyle/>
-          <a:p>
-            <a:pPr algn="ctr" indent="0" marL="0">
-              <a:buNone/>
-            </a:pPr>
-            <a:r>
-              <a:rPr lang="en-US" sz="1400" b="1" dirty="0">
-                <a:solidFill>
-                  <a:srgbClr val="FFFFFF"/>
-                </a:solidFill>
-                <a:latin typeface="Calibri" pitchFamily="34" charset="0"/>
-                <a:ea typeface="Calibri" pitchFamily="34" charset="-122"/>
-                <a:cs typeface="Calibri" pitchFamily="34" charset="-120"/>
-              </a:rPr>
-              <a:t>4</a:t>
-            </a:r>
-            <a:endParaRPr lang="en-US" sz="1400" dirty="0"/>
-          </a:p>
-        </p:txBody>
-      </p:sp>
-      <p:sp>
-        <p:nvSpPr>
-          <p:cNvPr id="22" name="Text 20"/>
-          <p:cNvSpPr txBox="1"/>
-          <p:nvPr/>
-        </p:nvSpPr>
-        <p:spPr>
-          <a:xfrm>
-            <a:off x="6903720" y="1993392"/>
-            <a:ext cx="1554480" cy="237744"/>
-          </a:xfrm>
-          <a:prstGeom prst="rect">
-            <a:avLst/>
-          </a:prstGeom>
-          <a:noFill/>
-          <a:ln/>
-        </p:spPr>
-        <p:txBody>
-          <a:bodyPr wrap="square" lIns="0" tIns="0" rIns="0" bIns="0" rtlCol="0" anchor="t"/>
-          <a:lstStyle/>
-          <a:p>
-            <a:pPr indent="0" marL="0">
-              <a:buNone/>
-            </a:pPr>
-            <a:r>
-              <a:rPr lang="en-US" sz="1400" b="1" dirty="0">
-                <a:solidFill>
-                  <a:srgbClr val="0F2A2A"/>
-                </a:solidFill>
-                <a:latin typeface="Calibri" pitchFamily="34" charset="0"/>
-                <a:ea typeface="Calibri" pitchFamily="34" charset="-122"/>
-                <a:cs typeface="Calibri" pitchFamily="34" charset="-120"/>
-              </a:rPr>
-              <a:t>Build</a:t>
-            </a:r>
-            <a:endParaRPr lang="en-US" sz="1400" dirty="0"/>
-          </a:p>
-        </p:txBody>
-      </p:sp>
-      <p:sp>
-        <p:nvSpPr>
-          <p:cNvPr id="23" name="Text 21"/>
-          <p:cNvSpPr txBox="1"/>
-          <p:nvPr/>
-        </p:nvSpPr>
-        <p:spPr>
-          <a:xfrm>
-            <a:off x="6903720" y="2267712"/>
-            <a:ext cx="1554480" cy="1234440"/>
-          </a:xfrm>
-          <a:prstGeom prst="rect">
-            <a:avLst/>
-          </a:prstGeom>
-          <a:noFill/>
-          <a:ln/>
-        </p:spPr>
-        <p:txBody>
-          <a:bodyPr wrap="square" lIns="0" tIns="0" rIns="0" bIns="0" rtlCol="0" anchor="t"/>
-          <a:lstStyle/>
-          <a:p>
-            <a:pPr indent="0" marL="0">
-              <a:buNone/>
-            </a:pPr>
-            <a:r>
-              <a:rPr lang="en-US" sz="1050" dirty="0">
-                <a:solidFill>
-                  <a:srgbClr val="1F2A2A"/>
-                </a:solidFill>
-                <a:latin typeface="Calibri" pitchFamily="34" charset="0"/>
-                <a:ea typeface="Calibri" pitchFamily="34" charset="-122"/>
-                <a:cs typeface="Calibri" pitchFamily="34" charset="-120"/>
+              <a:rPr lang="en-US" sz="1000" dirty="0">
+                <a:solidFill>
+                  <a:srgbClr val="424245"/>
+                </a:solidFill>
+                <a:latin typeface="Helvetica Neue" pitchFamily="34" charset="0"/>
+                <a:ea typeface="Helvetica Neue" pitchFamily="34" charset="-122"/>
+                <a:cs typeface="Helvetica Neue" pitchFamily="34" charset="-120"/>
               </a:rPr>
               <a:t>An interactive page: pick a stock and date, see its curve and whether we think traders guessed too high.</a:t>
             </a:r>
-            <a:endParaRPr lang="en-US" sz="1050" dirty="0"/>
-          </a:p>
-        </p:txBody>
-      </p:sp>
-      <p:sp>
-        <p:nvSpPr>
-          <p:cNvPr id="24" name="Text 22"/>
+            <a:endParaRPr lang="en-US" sz="1000" dirty="0"/>
+          </a:p>
+        </p:txBody>
+      </p:sp>
+      <p:sp>
+        <p:nvSpPr>
+          <p:cNvPr id="20" name="Text 18"/>
           <p:cNvSpPr txBox="1"/>
           <p:nvPr/>
         </p:nvSpPr>
@@ -4730,30 +4794,30 @@
               <a:buNone/>
             </a:pPr>
             <a:r>
-              <a:rPr lang="en-US" sz="950" b="1" spc="200" kern="0" dirty="0">
-                <a:solidFill>
-                  <a:srgbClr val="FF6B4A"/>
-                </a:solidFill>
-                <a:latin typeface="Calibri" pitchFamily="34" charset="0"/>
-                <a:ea typeface="Calibri" pitchFamily="34" charset="-122"/>
-                <a:cs typeface="Calibri" pitchFamily="34" charset="-120"/>
-              </a:rPr>
-              <a:t>WHAT WE EXPECT TO FIND</a:t>
-            </a:r>
-            <a:endParaRPr lang="en-US" sz="950" dirty="0"/>
-          </a:p>
-        </p:txBody>
-      </p:sp>
-      <p:sp>
-        <p:nvSpPr>
-          <p:cNvPr id="25" name="Text 23"/>
+              <a:rPr lang="en-US" sz="1000" dirty="0">
+                <a:solidFill>
+                  <a:srgbClr val="6E6E73"/>
+                </a:solidFill>
+                <a:latin typeface="Helvetica Neue" pitchFamily="34" charset="0"/>
+                <a:ea typeface="Helvetica Neue" pitchFamily="34" charset="-122"/>
+                <a:cs typeface="Helvetica Neue" pitchFamily="34" charset="-120"/>
+              </a:rPr>
+              <a:t>What we expect to find</a:t>
+            </a:r>
+            <a:endParaRPr lang="en-US" sz="1000" dirty="0"/>
+          </a:p>
+        </p:txBody>
+      </p:sp>
+      <p:sp>
+        <p:nvSpPr>
+          <p:cNvPr id="21" name="Text 19"/>
           <p:cNvSpPr txBox="1"/>
           <p:nvPr/>
         </p:nvSpPr>
         <p:spPr>
           <a:xfrm>
             <a:off x="548640" y="4023360"/>
-            <a:ext cx="3840480" cy="548640"/>
+            <a:ext cx="3749040" cy="548640"/>
           </a:xfrm>
           <a:prstGeom prst="rect">
             <a:avLst/>
@@ -4771,11 +4835,11 @@
             <a:r>
               <a:rPr lang="en-US" sz="1250" b="1" dirty="0">
                 <a:solidFill>
-                  <a:srgbClr val="0F2A2A"/>
-                </a:solidFill>
-                <a:latin typeface="Calibri" pitchFamily="34" charset="0"/>
-                <a:ea typeface="Calibri" pitchFamily="34" charset="-122"/>
-                <a:cs typeface="Calibri" pitchFamily="34" charset="-120"/>
+                  <a:srgbClr val="1D1D1F"/>
+                </a:solidFill>
+                <a:latin typeface="Helvetica Neue" pitchFamily="34" charset="0"/>
+                <a:ea typeface="Helvetica Neue" pitchFamily="34" charset="-122"/>
+                <a:cs typeface="Helvetica Neue" pitchFamily="34" charset="-120"/>
               </a:rPr>
               <a:t>Traders guess too high most of the time, but not right before big drops.</a:t>
             </a:r>
@@ -4785,7 +4849,7 @@
       </p:sp>
       <p:sp>
         <p:nvSpPr>
-          <p:cNvPr id="26" name="Text 24"/>
+          <p:cNvPr id="22" name="Text 20"/>
           <p:cNvSpPr txBox="1"/>
           <p:nvPr/>
         </p:nvSpPr>
@@ -4808,30 +4872,30 @@
               <a:buNone/>
             </a:pPr>
             <a:r>
-              <a:rPr lang="en-US" sz="950" b="1" spc="200" kern="0" dirty="0">
-                <a:solidFill>
-                  <a:srgbClr val="FF6B4A"/>
-                </a:solidFill>
-                <a:latin typeface="Calibri" pitchFamily="34" charset="0"/>
-                <a:ea typeface="Calibri" pitchFamily="34" charset="-122"/>
-                <a:cs typeface="Calibri" pitchFamily="34" charset="-120"/>
-              </a:rPr>
-              <a:t>SCOPE</a:t>
-            </a:r>
-            <a:endParaRPr lang="en-US" sz="950" dirty="0"/>
-          </a:p>
-        </p:txBody>
-      </p:sp>
-      <p:sp>
-        <p:nvSpPr>
-          <p:cNvPr id="27" name="Text 25"/>
+              <a:rPr lang="en-US" sz="1000" dirty="0">
+                <a:solidFill>
+                  <a:srgbClr val="6E6E73"/>
+                </a:solidFill>
+                <a:latin typeface="Helvetica Neue" pitchFamily="34" charset="0"/>
+                <a:ea typeface="Helvetica Neue" pitchFamily="34" charset="-122"/>
+                <a:cs typeface="Helvetica Neue" pitchFamily="34" charset="-120"/>
+              </a:rPr>
+              <a:t>Scope</a:t>
+            </a:r>
+            <a:endParaRPr lang="en-US" sz="1000" dirty="0"/>
+          </a:p>
+        </p:txBody>
+      </p:sp>
+      <p:sp>
+        <p:nvSpPr>
+          <p:cNvPr id="23" name="Text 21"/>
           <p:cNvSpPr txBox="1"/>
           <p:nvPr/>
         </p:nvSpPr>
         <p:spPr>
           <a:xfrm>
             <a:off x="4663440" y="4023360"/>
-            <a:ext cx="3840480" cy="548640"/>
+            <a:ext cx="3749040" cy="548640"/>
           </a:xfrm>
           <a:prstGeom prst="rect">
             <a:avLst/>
@@ -4849,11 +4913,11 @@
             <a:r>
               <a:rPr lang="en-US" sz="1250" b="1" dirty="0">
                 <a:solidFill>
-                  <a:srgbClr val="0F2A2A"/>
-                </a:solidFill>
-                <a:latin typeface="Calibri" pitchFamily="34" charset="0"/>
-                <a:ea typeface="Calibri" pitchFamily="34" charset="-122"/>
-                <a:cs typeface="Calibri" pitchFamily="34" charset="-120"/>
+                  <a:srgbClr val="1D1D1F"/>
+                </a:solidFill>
+                <a:latin typeface="Helvetica Neue" pitchFamily="34" charset="0"/>
+                <a:ea typeface="Helvetica Neue" pitchFamily="34" charset="-122"/>
+                <a:cs typeface="Helvetica Neue" pitchFamily="34" charset="-120"/>
               </a:rPr>
               <a:t>About 10 stocks, 2019 to 2026. Our direction may shift before the progress report.</a:t>
             </a:r>
@@ -4875,7 +4939,7 @@
     <p:bg>
       <p:bgPr>
         <a:solidFill>
-          <a:srgbClr val="0F2A2A"/>
+          <a:srgbClr val="FFFFFF"/>
         </a:solidFill>
       </p:bgPr>
     </p:bg>
@@ -4901,7 +4965,7 @@
         </p:nvSpPr>
         <p:spPr>
           <a:xfrm>
-            <a:off x="548640" y="365760"/>
+            <a:off x="548640" y="411480"/>
             <a:ext cx="8046720" cy="228600"/>
           </a:xfrm>
           <a:prstGeom prst="rect">
@@ -4918,17 +4982,17 @@
               <a:buNone/>
             </a:pPr>
             <a:r>
-              <a:rPr lang="en-US" sz="1100" b="1" spc="300" kern="0" dirty="0">
-                <a:solidFill>
-                  <a:srgbClr val="FF6B4A"/>
-                </a:solidFill>
-                <a:latin typeface="Calibri" pitchFamily="34" charset="0"/>
-                <a:ea typeface="Calibri" pitchFamily="34" charset="-122"/>
-                <a:cs typeface="Calibri" pitchFamily="34" charset="-120"/>
-              </a:rPr>
-              <a:t>DELIVERABLES</a:t>
-            </a:r>
-            <a:endParaRPr lang="en-US" sz="1100" dirty="0"/>
+              <a:rPr lang="en-US" sz="1300" dirty="0">
+                <a:solidFill>
+                  <a:srgbClr val="6E6E73"/>
+                </a:solidFill>
+                <a:latin typeface="Helvetica Neue" pitchFamily="34" charset="0"/>
+                <a:ea typeface="Helvetica Neue" pitchFamily="34" charset="-122"/>
+                <a:cs typeface="Helvetica Neue" pitchFamily="34" charset="-120"/>
+              </a:rPr>
+              <a:t>Deliverables</a:t>
+            </a:r>
+            <a:endParaRPr lang="en-US" sz="1300" dirty="0"/>
           </a:p>
         </p:txBody>
       </p:sp>
@@ -4940,7 +5004,7 @@
         </p:nvSpPr>
         <p:spPr>
           <a:xfrm>
-            <a:off x="548640" y="621792"/>
+            <a:off x="548640" y="676656"/>
             <a:ext cx="8046720" cy="502920"/>
           </a:xfrm>
           <a:prstGeom prst="rect">
@@ -4959,11 +5023,11 @@
             <a:r>
               <a:rPr lang="en-US" sz="3000" b="1" dirty="0">
                 <a:solidFill>
-                  <a:srgbClr val="FFFFFF"/>
-                </a:solidFill>
-                <a:latin typeface="Calibri" pitchFamily="34" charset="0"/>
-                <a:ea typeface="Calibri" pitchFamily="34" charset="-122"/>
-                <a:cs typeface="Calibri" pitchFamily="34" charset="-120"/>
+                  <a:srgbClr val="1D1D1F"/>
+                </a:solidFill>
+                <a:latin typeface="Helvetica Neue" pitchFamily="34" charset="0"/>
+                <a:ea typeface="Helvetica Neue" pitchFamily="34" charset="-122"/>
+                <a:cs typeface="Helvetica Neue" pitchFamily="34" charset="-120"/>
               </a:rPr>
               <a:t>Progress report goals and roles</a:t>
             </a:r>
@@ -4980,7 +5044,7 @@
         <p:spPr>
           <a:xfrm>
             <a:off x="548640" y="1371600"/>
-            <a:ext cx="3017520" cy="182880"/>
+            <a:ext cx="2926080" cy="182880"/>
           </a:xfrm>
           <a:prstGeom prst="rect">
             <a:avLst/>
@@ -4996,376 +5060,368 @@
               <a:buNone/>
             </a:pPr>
             <a:r>
-              <a:rPr lang="en-US" sz="950" b="1" spc="200" kern="0" dirty="0">
-                <a:solidFill>
-                  <a:srgbClr val="B7D3CE"/>
-                </a:solidFill>
-                <a:latin typeface="Calibri" pitchFamily="34" charset="0"/>
-                <a:ea typeface="Calibri" pitchFamily="34" charset="-122"/>
-                <a:cs typeface="Calibri" pitchFamily="34" charset="-120"/>
-              </a:rPr>
-              <a:t>BY THE NOV 13 PROGRESS REPORT</a:t>
-            </a:r>
-            <a:endParaRPr lang="en-US" sz="950" dirty="0"/>
-          </a:p>
-        </p:txBody>
-      </p:sp>
-      <p:sp>
-        <p:nvSpPr>
-          <p:cNvPr id="5" name="Shape 3"/>
+              <a:rPr lang="en-US" sz="1000" dirty="0">
+                <a:solidFill>
+                  <a:srgbClr val="6E6E73"/>
+                </a:solidFill>
+                <a:latin typeface="Helvetica Neue" pitchFamily="34" charset="0"/>
+                <a:ea typeface="Helvetica Neue" pitchFamily="34" charset="-122"/>
+                <a:cs typeface="Helvetica Neue" pitchFamily="34" charset="-120"/>
+              </a:rPr>
+              <a:t>By the Nov 13 progress report</a:t>
+            </a:r>
+            <a:endParaRPr lang="en-US" sz="1000" dirty="0"/>
+          </a:p>
+        </p:txBody>
+      </p:sp>
+      <p:sp>
+        <p:nvSpPr>
+          <p:cNvPr id="5" name="Text 3"/>
+          <p:cNvSpPr txBox="1"/>
+          <p:nvPr/>
+        </p:nvSpPr>
+        <p:spPr>
+          <a:xfrm>
+            <a:off x="548640" y="1691640"/>
+            <a:ext cx="2926080" cy="228600"/>
+          </a:xfrm>
+          <a:prstGeom prst="rect">
+            <a:avLst/>
+          </a:prstGeom>
+          <a:noFill/>
+          <a:ln/>
+        </p:spPr>
+        <p:txBody>
+          <a:bodyPr wrap="square" lIns="0" tIns="0" rIns="0" bIns="0" rtlCol="0" anchor="t"/>
+          <a:lstStyle/>
+          <a:p>
+            <a:pPr indent="0" marL="0">
+              <a:buNone/>
+            </a:pPr>
+            <a:r>
+              <a:rPr lang="en-US" sz="1150" b="1" dirty="0">
+                <a:solidFill>
+                  <a:srgbClr val="1D1D1F"/>
+                </a:solidFill>
+                <a:latin typeface="Helvetica Neue" pitchFamily="34" charset="0"/>
+                <a:ea typeface="Helvetica Neue" pitchFamily="34" charset="-122"/>
+                <a:cs typeface="Helvetica Neue" pitchFamily="34" charset="-120"/>
+              </a:rPr>
+              <a:t>Cleaned dataset and scripts in our repo</a:t>
+            </a:r>
+            <a:endParaRPr lang="en-US" sz="1150" dirty="0"/>
+          </a:p>
+        </p:txBody>
+      </p:sp>
+      <p:sp>
+        <p:nvSpPr>
+          <p:cNvPr id="6" name="Shape 4"/>
           <p:cNvSpPr/>
           <p:nvPr/>
         </p:nvSpPr>
         <p:spPr>
           <a:xfrm>
-            <a:off x="548640" y="1755648"/>
-            <a:ext cx="91440" cy="91440"/>
-          </a:xfrm>
-          <a:prstGeom prst="ellipse">
-            <a:avLst/>
+            <a:off x="548640" y="1993392"/>
+            <a:ext cx="2926080" cy="0"/>
+          </a:xfrm>
+          <a:prstGeom prst="line">
+            <a:avLst/>
+          </a:prstGeom>
+          <a:noFill/>
+          <a:ln w="6350">
+            <a:solidFill>
+              <a:srgbClr val="D2D2D7"/>
+            </a:solidFill>
+            <a:prstDash val="solid"/>
+          </a:ln>
+        </p:spPr>
+      </p:sp>
+      <p:sp>
+        <p:nvSpPr>
+          <p:cNvPr id="7" name="Text 5"/>
+          <p:cNvSpPr txBox="1"/>
+          <p:nvPr/>
+        </p:nvSpPr>
+        <p:spPr>
+          <a:xfrm>
+            <a:off x="548640" y="2084832"/>
+            <a:ext cx="2926080" cy="228600"/>
+          </a:xfrm>
+          <a:prstGeom prst="rect">
+            <a:avLst/>
+          </a:prstGeom>
+          <a:noFill/>
+          <a:ln/>
+        </p:spPr>
+        <p:txBody>
+          <a:bodyPr wrap="square" lIns="0" tIns="0" rIns="0" bIns="0" rtlCol="0" anchor="t"/>
+          <a:lstStyle/>
+          <a:p>
+            <a:pPr indent="0" marL="0">
+              <a:buNone/>
+            </a:pPr>
+            <a:r>
+              <a:rPr lang="en-US" sz="1150" b="1" dirty="0">
+                <a:solidFill>
+                  <a:srgbClr val="1D1D1F"/>
+                </a:solidFill>
+                <a:latin typeface="Helvetica Neue" pitchFamily="34" charset="0"/>
+                <a:ea typeface="Helvetica Neue" pitchFamily="34" charset="-122"/>
+                <a:cs typeface="Helvetica Neue" pitchFamily="34" charset="-120"/>
+              </a:rPr>
+              <a:t>5+ charts, each tied to a question</a:t>
+            </a:r>
+            <a:endParaRPr lang="en-US" sz="1150" dirty="0"/>
+          </a:p>
+        </p:txBody>
+      </p:sp>
+      <p:sp>
+        <p:nvSpPr>
+          <p:cNvPr id="8" name="Shape 6"/>
+          <p:cNvSpPr/>
+          <p:nvPr/>
+        </p:nvSpPr>
+        <p:spPr>
+          <a:xfrm>
+            <a:off x="548640" y="2386584"/>
+            <a:ext cx="2926080" cy="0"/>
+          </a:xfrm>
+          <a:prstGeom prst="line">
+            <a:avLst/>
+          </a:prstGeom>
+          <a:noFill/>
+          <a:ln w="6350">
+            <a:solidFill>
+              <a:srgbClr val="D2D2D7"/>
+            </a:solidFill>
+            <a:prstDash val="solid"/>
+          </a:ln>
+        </p:spPr>
+      </p:sp>
+      <p:sp>
+        <p:nvSpPr>
+          <p:cNvPr id="9" name="Text 7"/>
+          <p:cNvSpPr txBox="1"/>
+          <p:nvPr/>
+        </p:nvSpPr>
+        <p:spPr>
+          <a:xfrm>
+            <a:off x="548640" y="2478024"/>
+            <a:ext cx="2926080" cy="228600"/>
+          </a:xfrm>
+          <a:prstGeom prst="rect">
+            <a:avLst/>
+          </a:prstGeom>
+          <a:noFill/>
+          <a:ln/>
+        </p:spPr>
+        <p:txBody>
+          <a:bodyPr wrap="square" lIns="0" tIns="0" rIns="0" bIns="0" rtlCol="0" anchor="t"/>
+          <a:lstStyle/>
+          <a:p>
+            <a:pPr indent="0" marL="0">
+              <a:buNone/>
+            </a:pPr>
+            <a:r>
+              <a:rPr lang="en-US" sz="1150" b="1" dirty="0">
+                <a:solidFill>
+                  <a:srgbClr val="1D1D1F"/>
+                </a:solidFill>
+                <a:latin typeface="Helvetica Neue" pitchFamily="34" charset="0"/>
+                <a:ea typeface="Helvetica Neue" pitchFamily="34" charset="-122"/>
+                <a:cs typeface="Helvetica Neue" pitchFamily="34" charset="-120"/>
+              </a:rPr>
+              <a:t>2 models compared against the baseline</a:t>
+            </a:r>
+            <a:endParaRPr lang="en-US" sz="1150" dirty="0"/>
+          </a:p>
+        </p:txBody>
+      </p:sp>
+      <p:sp>
+        <p:nvSpPr>
+          <p:cNvPr id="10" name="Shape 8"/>
+          <p:cNvSpPr/>
+          <p:nvPr/>
+        </p:nvSpPr>
+        <p:spPr>
+          <a:xfrm>
+            <a:off x="548640" y="2779776"/>
+            <a:ext cx="2926080" cy="0"/>
+          </a:xfrm>
+          <a:prstGeom prst="line">
+            <a:avLst/>
+          </a:prstGeom>
+          <a:noFill/>
+          <a:ln w="6350">
+            <a:solidFill>
+              <a:srgbClr val="D2D2D7"/>
+            </a:solidFill>
+            <a:prstDash val="solid"/>
+          </a:ln>
+        </p:spPr>
+      </p:sp>
+      <p:sp>
+        <p:nvSpPr>
+          <p:cNvPr id="11" name="Text 9"/>
+          <p:cNvSpPr txBox="1"/>
+          <p:nvPr/>
+        </p:nvSpPr>
+        <p:spPr>
+          <a:xfrm>
+            <a:off x="548640" y="2871216"/>
+            <a:ext cx="2926080" cy="228600"/>
+          </a:xfrm>
+          <a:prstGeom prst="rect">
+            <a:avLst/>
+          </a:prstGeom>
+          <a:noFill/>
+          <a:ln/>
+        </p:spPr>
+        <p:txBody>
+          <a:bodyPr wrap="square" lIns="0" tIns="0" rIns="0" bIns="0" rtlCol="0" anchor="t"/>
+          <a:lstStyle/>
+          <a:p>
+            <a:pPr indent="0" marL="0">
+              <a:buNone/>
+            </a:pPr>
+            <a:r>
+              <a:rPr lang="en-US" sz="1150" b="1" dirty="0">
+                <a:solidFill>
+                  <a:srgbClr val="1D1D1F"/>
+                </a:solidFill>
+                <a:latin typeface="Helvetica Neue" pitchFamily="34" charset="0"/>
+                <a:ea typeface="Helvetica Neue" pitchFamily="34" charset="-122"/>
+                <a:cs typeface="Helvetica Neue" pitchFamily="34" charset="-120"/>
+              </a:rPr>
+              <a:t>First version of the interactive page</a:t>
+            </a:r>
+            <a:endParaRPr lang="en-US" sz="1150" dirty="0"/>
+          </a:p>
+        </p:txBody>
+      </p:sp>
+      <p:sp>
+        <p:nvSpPr>
+          <p:cNvPr id="12" name="Shape 10"/>
+          <p:cNvSpPr/>
+          <p:nvPr/>
+        </p:nvSpPr>
+        <p:spPr>
+          <a:xfrm>
+            <a:off x="548640" y="3172968"/>
+            <a:ext cx="2926080" cy="0"/>
+          </a:xfrm>
+          <a:prstGeom prst="line">
+            <a:avLst/>
+          </a:prstGeom>
+          <a:noFill/>
+          <a:ln w="6350">
+            <a:solidFill>
+              <a:srgbClr val="D2D2D7"/>
+            </a:solidFill>
+            <a:prstDash val="solid"/>
+          </a:ln>
+        </p:spPr>
+      </p:sp>
+      <p:sp>
+        <p:nvSpPr>
+          <p:cNvPr id="13" name="Text 11"/>
+          <p:cNvSpPr txBox="1"/>
+          <p:nvPr/>
+        </p:nvSpPr>
+        <p:spPr>
+          <a:xfrm>
+            <a:off x="548640" y="3520440"/>
+            <a:ext cx="2926080" cy="182880"/>
+          </a:xfrm>
+          <a:prstGeom prst="rect">
+            <a:avLst/>
+          </a:prstGeom>
+          <a:noFill/>
+          <a:ln/>
+        </p:spPr>
+        <p:txBody>
+          <a:bodyPr wrap="square" lIns="0" tIns="0" rIns="0" bIns="0" rtlCol="0" anchor="t"/>
+          <a:lstStyle/>
+          <a:p>
+            <a:pPr indent="0" marL="0">
+              <a:buNone/>
+            </a:pPr>
+            <a:r>
+              <a:rPr lang="en-US" sz="1000" dirty="0">
+                <a:solidFill>
+                  <a:srgbClr val="6E6E73"/>
+                </a:solidFill>
+                <a:latin typeface="Helvetica Neue" pitchFamily="34" charset="0"/>
+                <a:ea typeface="Helvetica Neue" pitchFamily="34" charset="-122"/>
+                <a:cs typeface="Helvetica Neue" pitchFamily="34" charset="-120"/>
+              </a:rPr>
+              <a:t>Next steps</a:t>
+            </a:r>
+            <a:endParaRPr lang="en-US" sz="1000" dirty="0"/>
+          </a:p>
+        </p:txBody>
+      </p:sp>
+      <p:sp>
+        <p:nvSpPr>
+          <p:cNvPr id="14" name="Text 12"/>
+          <p:cNvSpPr txBox="1"/>
+          <p:nvPr/>
+        </p:nvSpPr>
+        <p:spPr>
+          <a:xfrm>
+            <a:off x="548640" y="3749040"/>
+            <a:ext cx="2926080" cy="548640"/>
+          </a:xfrm>
+          <a:prstGeom prst="rect">
+            <a:avLst/>
+          </a:prstGeom>
+          <a:noFill/>
+          <a:ln/>
+        </p:spPr>
+        <p:txBody>
+          <a:bodyPr wrap="square" lIns="0" tIns="0" rIns="0" bIns="0" rtlCol="0" anchor="t"/>
+          <a:lstStyle/>
+          <a:p>
+            <a:pPr indent="0" marL="0">
+              <a:buNone/>
+            </a:pPr>
+            <a:r>
+              <a:rPr lang="en-US" sz="1150" dirty="0">
+                <a:solidFill>
+                  <a:srgbClr val="424245"/>
+                </a:solidFill>
+                <a:latin typeface="Helvetica Neue" pitchFamily="34" charset="0"/>
+                <a:ea typeface="Helvetica Neue" pitchFamily="34" charset="-122"/>
+                <a:cs typeface="Helvetica Neue" pitchFamily="34" charset="-120"/>
+              </a:rPr>
+              <a:t>Pick the stock list, pull the data, and draw the first charts.</a:t>
+            </a:r>
+            <a:endParaRPr lang="en-US" sz="1150" dirty="0"/>
+          </a:p>
+        </p:txBody>
+      </p:sp>
+      <p:sp>
+        <p:nvSpPr>
+          <p:cNvPr id="15" name="Shape 13"/>
+          <p:cNvSpPr/>
+          <p:nvPr/>
+        </p:nvSpPr>
+        <p:spPr>
+          <a:xfrm>
+            <a:off x="3840480" y="1371600"/>
+            <a:ext cx="4754880" cy="3337560"/>
+          </a:xfrm>
+          <a:prstGeom prst="roundRect">
+            <a:avLst>
+              <a:gd name="adj" fmla="val 4384"/>
+            </a:avLst>
           </a:prstGeom>
           <a:solidFill>
-            <a:srgbClr val="FF6B4A"/>
+            <a:srgbClr val="F5F5F7"/>
           </a:solidFill>
           <a:ln w="12700">
             <a:solidFill>
-              <a:srgbClr val="FF6B4A"/>
-            </a:solidFill>
-            <a:prstDash val="solid"/>
-          </a:ln>
-        </p:spPr>
-      </p:sp>
-      <p:sp>
-        <p:nvSpPr>
-          <p:cNvPr id="6" name="Text 4"/>
-          <p:cNvSpPr txBox="1"/>
-          <p:nvPr/>
-        </p:nvSpPr>
-        <p:spPr>
-          <a:xfrm>
-            <a:off x="777240" y="1691640"/>
-            <a:ext cx="2834640" cy="365760"/>
-          </a:xfrm>
-          <a:prstGeom prst="rect">
-            <a:avLst/>
-          </a:prstGeom>
-          <a:noFill/>
-          <a:ln/>
-        </p:spPr>
-        <p:txBody>
-          <a:bodyPr wrap="square" lIns="0" tIns="0" rIns="0" bIns="0" rtlCol="0" anchor="t"/>
-          <a:lstStyle/>
-          <a:p>
-            <a:pPr indent="0" marL="0">
-              <a:buNone/>
-            </a:pPr>
-            <a:r>
-              <a:rPr lang="en-US" sz="1250" dirty="0">
-                <a:solidFill>
-                  <a:srgbClr val="FFFFFF"/>
-                </a:solidFill>
-                <a:latin typeface="Calibri" pitchFamily="34" charset="0"/>
-                <a:ea typeface="Calibri" pitchFamily="34" charset="-122"/>
-                <a:cs typeface="Calibri" pitchFamily="34" charset="-120"/>
-              </a:rPr>
-              <a:t>Cleaned dataset and scripts in our repo</a:t>
-            </a:r>
-            <a:endParaRPr lang="en-US" sz="1250" dirty="0"/>
-          </a:p>
-        </p:txBody>
-      </p:sp>
-      <p:sp>
-        <p:nvSpPr>
-          <p:cNvPr id="7" name="Shape 5"/>
-          <p:cNvSpPr/>
-          <p:nvPr/>
-        </p:nvSpPr>
-        <p:spPr>
-          <a:xfrm>
-            <a:off x="548640" y="2157984"/>
-            <a:ext cx="91440" cy="91440"/>
-          </a:xfrm>
-          <a:prstGeom prst="ellipse">
-            <a:avLst/>
-          </a:prstGeom>
-          <a:solidFill>
-            <a:srgbClr val="FF6B4A"/>
-          </a:solidFill>
-          <a:ln w="12700">
-            <a:solidFill>
-              <a:srgbClr val="FF6B4A"/>
-            </a:solidFill>
-            <a:prstDash val="solid"/>
-          </a:ln>
-        </p:spPr>
-      </p:sp>
-      <p:sp>
-        <p:nvSpPr>
-          <p:cNvPr id="8" name="Text 6"/>
-          <p:cNvSpPr txBox="1"/>
-          <p:nvPr/>
-        </p:nvSpPr>
-        <p:spPr>
-          <a:xfrm>
-            <a:off x="777240" y="2093976"/>
-            <a:ext cx="2834640" cy="365760"/>
-          </a:xfrm>
-          <a:prstGeom prst="rect">
-            <a:avLst/>
-          </a:prstGeom>
-          <a:noFill/>
-          <a:ln/>
-        </p:spPr>
-        <p:txBody>
-          <a:bodyPr wrap="square" lIns="0" tIns="0" rIns="0" bIns="0" rtlCol="0" anchor="t"/>
-          <a:lstStyle/>
-          <a:p>
-            <a:pPr indent="0" marL="0">
-              <a:buNone/>
-            </a:pPr>
-            <a:r>
-              <a:rPr lang="en-US" sz="1250" dirty="0">
-                <a:solidFill>
-                  <a:srgbClr val="FFFFFF"/>
-                </a:solidFill>
-                <a:latin typeface="Calibri" pitchFamily="34" charset="0"/>
-                <a:ea typeface="Calibri" pitchFamily="34" charset="-122"/>
-                <a:cs typeface="Calibri" pitchFamily="34" charset="-120"/>
-              </a:rPr>
-              <a:t>5+ charts, each tied to a question</a:t>
-            </a:r>
-            <a:endParaRPr lang="en-US" sz="1250" dirty="0"/>
-          </a:p>
-        </p:txBody>
-      </p:sp>
-      <p:sp>
-        <p:nvSpPr>
-          <p:cNvPr id="9" name="Shape 7"/>
-          <p:cNvSpPr/>
-          <p:nvPr/>
-        </p:nvSpPr>
-        <p:spPr>
-          <a:xfrm>
-            <a:off x="548640" y="2560320"/>
-            <a:ext cx="91440" cy="91440"/>
-          </a:xfrm>
-          <a:prstGeom prst="ellipse">
-            <a:avLst/>
-          </a:prstGeom>
-          <a:solidFill>
-            <a:srgbClr val="FF6B4A"/>
-          </a:solidFill>
-          <a:ln w="12700">
-            <a:solidFill>
-              <a:srgbClr val="FF6B4A"/>
-            </a:solidFill>
-            <a:prstDash val="solid"/>
-          </a:ln>
-        </p:spPr>
-      </p:sp>
-      <p:sp>
-        <p:nvSpPr>
-          <p:cNvPr id="10" name="Text 8"/>
-          <p:cNvSpPr txBox="1"/>
-          <p:nvPr/>
-        </p:nvSpPr>
-        <p:spPr>
-          <a:xfrm>
-            <a:off x="777240" y="2496312"/>
-            <a:ext cx="2834640" cy="365760"/>
-          </a:xfrm>
-          <a:prstGeom prst="rect">
-            <a:avLst/>
-          </a:prstGeom>
-          <a:noFill/>
-          <a:ln/>
-        </p:spPr>
-        <p:txBody>
-          <a:bodyPr wrap="square" lIns="0" tIns="0" rIns="0" bIns="0" rtlCol="0" anchor="t"/>
-          <a:lstStyle/>
-          <a:p>
-            <a:pPr indent="0" marL="0">
-              <a:buNone/>
-            </a:pPr>
-            <a:r>
-              <a:rPr lang="en-US" sz="1250" dirty="0">
-                <a:solidFill>
-                  <a:srgbClr val="FFFFFF"/>
-                </a:solidFill>
-                <a:latin typeface="Calibri" pitchFamily="34" charset="0"/>
-                <a:ea typeface="Calibri" pitchFamily="34" charset="-122"/>
-                <a:cs typeface="Calibri" pitchFamily="34" charset="-120"/>
-              </a:rPr>
-              <a:t>2 models compared against the baseline</a:t>
-            </a:r>
-            <a:endParaRPr lang="en-US" sz="1250" dirty="0"/>
-          </a:p>
-        </p:txBody>
-      </p:sp>
-      <p:sp>
-        <p:nvSpPr>
-          <p:cNvPr id="11" name="Shape 9"/>
-          <p:cNvSpPr/>
-          <p:nvPr/>
-        </p:nvSpPr>
-        <p:spPr>
-          <a:xfrm>
-            <a:off x="548640" y="2962656"/>
-            <a:ext cx="91440" cy="91440"/>
-          </a:xfrm>
-          <a:prstGeom prst="ellipse">
-            <a:avLst/>
-          </a:prstGeom>
-          <a:solidFill>
-            <a:srgbClr val="FF6B4A"/>
-          </a:solidFill>
-          <a:ln w="12700">
-            <a:solidFill>
-              <a:srgbClr val="FF6B4A"/>
-            </a:solidFill>
-            <a:prstDash val="solid"/>
-          </a:ln>
-        </p:spPr>
-      </p:sp>
-      <p:sp>
-        <p:nvSpPr>
-          <p:cNvPr id="12" name="Text 10"/>
-          <p:cNvSpPr txBox="1"/>
-          <p:nvPr/>
-        </p:nvSpPr>
-        <p:spPr>
-          <a:xfrm>
-            <a:off x="777240" y="2898648"/>
-            <a:ext cx="2834640" cy="365760"/>
-          </a:xfrm>
-          <a:prstGeom prst="rect">
-            <a:avLst/>
-          </a:prstGeom>
-          <a:noFill/>
-          <a:ln/>
-        </p:spPr>
-        <p:txBody>
-          <a:bodyPr wrap="square" lIns="0" tIns="0" rIns="0" bIns="0" rtlCol="0" anchor="t"/>
-          <a:lstStyle/>
-          <a:p>
-            <a:pPr indent="0" marL="0">
-              <a:buNone/>
-            </a:pPr>
-            <a:r>
-              <a:rPr lang="en-US" sz="1250" dirty="0">
-                <a:solidFill>
-                  <a:srgbClr val="FFFFFF"/>
-                </a:solidFill>
-                <a:latin typeface="Calibri" pitchFamily="34" charset="0"/>
-                <a:ea typeface="Calibri" pitchFamily="34" charset="-122"/>
-                <a:cs typeface="Calibri" pitchFamily="34" charset="-120"/>
-              </a:rPr>
-              <a:t>First version of the interactive page</a:t>
-            </a:r>
-            <a:endParaRPr lang="en-US" sz="1250" dirty="0"/>
-          </a:p>
-        </p:txBody>
-      </p:sp>
-      <p:sp>
-        <p:nvSpPr>
-          <p:cNvPr id="13" name="Text 11"/>
-          <p:cNvSpPr txBox="1"/>
-          <p:nvPr/>
-        </p:nvSpPr>
-        <p:spPr>
-          <a:xfrm>
-            <a:off x="548640" y="3429000"/>
-            <a:ext cx="3017520" cy="182880"/>
-          </a:xfrm>
-          <a:prstGeom prst="rect">
-            <a:avLst/>
-          </a:prstGeom>
-          <a:noFill/>
-          <a:ln/>
-        </p:spPr>
-        <p:txBody>
-          <a:bodyPr wrap="square" lIns="0" tIns="0" rIns="0" bIns="0" rtlCol="0" anchor="t"/>
-          <a:lstStyle/>
-          <a:p>
-            <a:pPr indent="0" marL="0">
-              <a:buNone/>
-            </a:pPr>
-            <a:r>
-              <a:rPr lang="en-US" sz="950" b="1" spc="200" kern="0" dirty="0">
-                <a:solidFill>
-                  <a:srgbClr val="B7D3CE"/>
-                </a:solidFill>
-                <a:latin typeface="Calibri" pitchFamily="34" charset="0"/>
-                <a:ea typeface="Calibri" pitchFamily="34" charset="-122"/>
-                <a:cs typeface="Calibri" pitchFamily="34" charset="-120"/>
-              </a:rPr>
-              <a:t>NEXT STEPS</a:t>
-            </a:r>
-            <a:endParaRPr lang="en-US" sz="950" dirty="0"/>
-          </a:p>
-        </p:txBody>
-      </p:sp>
-      <p:sp>
-        <p:nvSpPr>
-          <p:cNvPr id="14" name="Text 12"/>
-          <p:cNvSpPr txBox="1"/>
-          <p:nvPr/>
-        </p:nvSpPr>
-        <p:spPr>
-          <a:xfrm>
-            <a:off x="548640" y="3675888"/>
-            <a:ext cx="3017520" cy="548640"/>
-          </a:xfrm>
-          <a:prstGeom prst="rect">
-            <a:avLst/>
-          </a:prstGeom>
-          <a:noFill/>
-          <a:ln/>
-        </p:spPr>
-        <p:txBody>
-          <a:bodyPr wrap="square" lIns="0" tIns="0" rIns="0" bIns="0" rtlCol="0" anchor="t"/>
-          <a:lstStyle/>
-          <a:p>
-            <a:pPr indent="0" marL="0">
-              <a:buNone/>
-            </a:pPr>
-            <a:r>
-              <a:rPr lang="en-US" sz="1250" dirty="0">
-                <a:solidFill>
-                  <a:srgbClr val="FFFFFF"/>
-                </a:solidFill>
-                <a:latin typeface="Calibri" pitchFamily="34" charset="0"/>
-                <a:ea typeface="Calibri" pitchFamily="34" charset="-122"/>
-                <a:cs typeface="Calibri" pitchFamily="34" charset="-120"/>
-              </a:rPr>
-              <a:t>Pick the stock list, pull the data, and draw the first charts.</a:t>
-            </a:r>
-            <a:endParaRPr lang="en-US" sz="1250" dirty="0"/>
-          </a:p>
-        </p:txBody>
-      </p:sp>
-      <p:sp>
-        <p:nvSpPr>
-          <p:cNvPr id="15" name="Shape 13"/>
-          <p:cNvSpPr/>
-          <p:nvPr/>
-        </p:nvSpPr>
-        <p:spPr>
-          <a:xfrm>
-            <a:off x="3886200" y="1325880"/>
-            <a:ext cx="4709160" cy="3337560"/>
-          </a:xfrm>
-          <a:prstGeom prst="roundRect">
-            <a:avLst>
-              <a:gd name="adj" fmla="val 2192"/>
-            </a:avLst>
-          </a:prstGeom>
-          <a:solidFill>
-            <a:srgbClr val="173B3A"/>
-          </a:solidFill>
-          <a:ln w="12700">
-            <a:solidFill>
-              <a:srgbClr val="173B3A"/>
+              <a:srgbClr val="F5F5F7"/>
             </a:solidFill>
             <a:prstDash val="solid"/>
           </a:ln>
@@ -5386,19 +5442,19 @@
           </p:nvPr>
         </p:nvGraphicFramePr>
         <p:xfrm>
-          <a:off x="4023360" y="1444752"/>
-          <a:ext cx="4434840" cy="914400"/>
+          <a:off x="4023360" y="1481328"/>
+          <a:ext cx="4389120" cy="914400"/>
         </p:xfrm>
         <a:graphic>
           <a:graphicData uri="http://schemas.openxmlformats.org/drawingml/2006/table">
             <a:tbl>
               <a:tblPr/>
               <a:tblGrid>
-                <a:gridCol w="777240"/>
-                <a:gridCol w="1920240"/>
-                <a:gridCol w="1737360"/>
+                <a:gridCol w="1005840"/>
+                <a:gridCol w="1783080"/>
+                <a:gridCol w="1600200"/>
               </a:tblGrid>
-              <a:tr h="457200">
+              <a:tr h="438912">
                 <a:tc>
                   <a:txBody>
                     <a:bodyPr/>
@@ -5408,63 +5464,42 @@
                         <a:buNone/>
                       </a:pPr>
                       <a:r>
-                        <a:rPr lang="en-US" sz="900" b="1" spc="150" kern="0" dirty="0">
+                        <a:rPr lang="en-US" sz="950" dirty="0">
                           <a:solidFill>
-                            <a:srgbClr val="B7D3CE"/>
+                            <a:srgbClr val="6E6E73"/>
                           </a:solidFill>
-                          <a:latin typeface="Calibri" pitchFamily="34" charset="0"/>
-                          <a:ea typeface="Calibri" pitchFamily="34" charset="-122"/>
-                          <a:cs typeface="Calibri" pitchFamily="34" charset="-120"/>
+                          <a:latin typeface="Helvetica Neue" pitchFamily="34" charset="0"/>
+                          <a:ea typeface="Helvetica Neue" pitchFamily="34" charset="-122"/>
+                          <a:cs typeface="Helvetica Neue" pitchFamily="34" charset="-120"/>
                         </a:rPr>
-                        <a:t>OWNER</a:t>
+                        <a:t>Owner</a:t>
                       </a:r>
-                      <a:endParaRPr lang="en-US" sz="900" dirty="0">
-                        <a:latin typeface="Calibri" charset="0"/>
-                        <a:ea typeface="Calibri" charset="0"/>
-                        <a:cs typeface="Calibri" charset="0"/>
+                      <a:endParaRPr lang="en-US" sz="950" dirty="0">
+                        <a:latin typeface="Helvetica Neue" charset="0"/>
+                        <a:ea typeface="Helvetica Neue" charset="0"/>
+                        <a:cs typeface="Helvetica Neue" charset="0"/>
                       </a:endParaRPr>
                     </a:p>
                   </a:txBody>
                   <a:tcPr marL="5486400" marR="5486400" marT="0" marB="0" anchor="ctr">
-                    <a:lnL w="6350" cap="flat" cmpd="sng" algn="ctr">
-                      <a:solidFill>
-                        <a:srgbClr val="2A5553"/>
-                      </a:solidFill>
-                      <a:prstDash val="solid"/>
-                      <a:round/>
-                      <a:headEnd type="none" w="med" len="med"/>
-                      <a:tailEnd type="none" w="med" len="med"/>
+                    <a:lnL w="0" cap="flat" cmpd="sng" algn="ctr">
+                      <a:noFill/>
                     </a:lnL>
-                    <a:lnR w="6350" cap="flat" cmpd="sng" algn="ctr">
-                      <a:solidFill>
-                        <a:srgbClr val="2A5553"/>
-                      </a:solidFill>
-                      <a:prstDash val="solid"/>
-                      <a:round/>
-                      <a:headEnd type="none" w="med" len="med"/>
-                      <a:tailEnd type="none" w="med" len="med"/>
+                    <a:lnR w="0" cap="flat" cmpd="sng" algn="ctr">
+                      <a:noFill/>
                     </a:lnR>
-                    <a:lnT w="6350" cap="flat" cmpd="sng" algn="ctr">
-                      <a:solidFill>
-                        <a:srgbClr val="2A5553"/>
-                      </a:solidFill>
-                      <a:prstDash val="solid"/>
-                      <a:round/>
-                      <a:headEnd type="none" w="med" len="med"/>
-                      <a:tailEnd type="none" w="med" len="med"/>
+                    <a:lnT w="0" cap="flat" cmpd="sng" algn="ctr">
+                      <a:noFill/>
                     </a:lnT>
                     <a:lnB w="6350" cap="flat" cmpd="sng" algn="ctr">
                       <a:solidFill>
-                        <a:srgbClr val="2A5553"/>
+                        <a:srgbClr val="D2D2D7"/>
                       </a:solidFill>
                       <a:prstDash val="solid"/>
                       <a:round/>
                       <a:headEnd type="none" w="med" len="med"/>
                       <a:tailEnd type="none" w="med" len="med"/>
                     </a:lnB>
-                    <a:solidFill>
-                      <a:srgbClr val="173B3A"/>
-                    </a:solidFill>
                   </a:tcPr>
                 </a:tc>
                 <a:tc>
@@ -5476,63 +5511,42 @@
                         <a:buNone/>
                       </a:pPr>
                       <a:r>
-                        <a:rPr lang="en-US" sz="900" b="1" spc="150" kern="0" dirty="0">
+                        <a:rPr lang="en-US" sz="950" dirty="0">
                           <a:solidFill>
-                            <a:srgbClr val="B7D3CE"/>
+                            <a:srgbClr val="6E6E73"/>
                           </a:solidFill>
-                          <a:latin typeface="Calibri" pitchFamily="34" charset="0"/>
-                          <a:ea typeface="Calibri" pitchFamily="34" charset="-122"/>
-                          <a:cs typeface="Calibri" pitchFamily="34" charset="-120"/>
+                          <a:latin typeface="Helvetica Neue" pitchFamily="34" charset="0"/>
+                          <a:ea typeface="Helvetica Neue" pitchFamily="34" charset="-122"/>
+                          <a:cs typeface="Helvetica Neue" pitchFamily="34" charset="-120"/>
                         </a:rPr>
-                        <a:t>ANALYSIS</a:t>
+                        <a:t>Analysis</a:t>
                       </a:r>
-                      <a:endParaRPr lang="en-US" sz="900" dirty="0">
-                        <a:latin typeface="Calibri" charset="0"/>
-                        <a:ea typeface="Calibri" charset="0"/>
-                        <a:cs typeface="Calibri" charset="0"/>
+                      <a:endParaRPr lang="en-US" sz="950" dirty="0">
+                        <a:latin typeface="Helvetica Neue" charset="0"/>
+                        <a:ea typeface="Helvetica Neue" charset="0"/>
+                        <a:cs typeface="Helvetica Neue" charset="0"/>
                       </a:endParaRPr>
                     </a:p>
                   </a:txBody>
                   <a:tcPr marL="5486400" marR="5486400" marT="0" marB="0" anchor="ctr">
-                    <a:lnL w="6350" cap="flat" cmpd="sng" algn="ctr">
-                      <a:solidFill>
-                        <a:srgbClr val="2A5553"/>
-                      </a:solidFill>
-                      <a:prstDash val="solid"/>
-                      <a:round/>
-                      <a:headEnd type="none" w="med" len="med"/>
-                      <a:tailEnd type="none" w="med" len="med"/>
+                    <a:lnL w="0" cap="flat" cmpd="sng" algn="ctr">
+                      <a:noFill/>
                     </a:lnL>
-                    <a:lnR w="6350" cap="flat" cmpd="sng" algn="ctr">
-                      <a:solidFill>
-                        <a:srgbClr val="2A5553"/>
-                      </a:solidFill>
-                      <a:prstDash val="solid"/>
-                      <a:round/>
-                      <a:headEnd type="none" w="med" len="med"/>
-                      <a:tailEnd type="none" w="med" len="med"/>
+                    <a:lnR w="0" cap="flat" cmpd="sng" algn="ctr">
+                      <a:noFill/>
                     </a:lnR>
-                    <a:lnT w="6350" cap="flat" cmpd="sng" algn="ctr">
-                      <a:solidFill>
-                        <a:srgbClr val="2A5553"/>
-                      </a:solidFill>
-                      <a:prstDash val="solid"/>
-                      <a:round/>
-                      <a:headEnd type="none" w="med" len="med"/>
-                      <a:tailEnd type="none" w="med" len="med"/>
+                    <a:lnT w="0" cap="flat" cmpd="sng" algn="ctr">
+                      <a:noFill/>
                     </a:lnT>
                     <a:lnB w="6350" cap="flat" cmpd="sng" algn="ctr">
                       <a:solidFill>
-                        <a:srgbClr val="2A5553"/>
+                        <a:srgbClr val="D2D2D7"/>
                       </a:solidFill>
                       <a:prstDash val="solid"/>
                       <a:round/>
                       <a:headEnd type="none" w="med" len="med"/>
                       <a:tailEnd type="none" w="med" len="med"/>
                     </a:lnB>
-                    <a:solidFill>
-                      <a:srgbClr val="173B3A"/>
-                    </a:solidFill>
                   </a:tcPr>
                 </a:tc>
                 <a:tc>
@@ -5544,67 +5558,46 @@
                         <a:buNone/>
                       </a:pPr>
                       <a:r>
-                        <a:rPr lang="en-US" sz="900" b="1" spc="150" kern="0" dirty="0">
+                        <a:rPr lang="en-US" sz="950" dirty="0">
                           <a:solidFill>
-                            <a:srgbClr val="B7D3CE"/>
+                            <a:srgbClr val="6E6E73"/>
                           </a:solidFill>
-                          <a:latin typeface="Calibri" pitchFamily="34" charset="0"/>
-                          <a:ea typeface="Calibri" pitchFamily="34" charset="-122"/>
-                          <a:cs typeface="Calibri" pitchFamily="34" charset="-120"/>
+                          <a:latin typeface="Helvetica Neue" pitchFamily="34" charset="0"/>
+                          <a:ea typeface="Helvetica Neue" pitchFamily="34" charset="-122"/>
+                          <a:cs typeface="Helvetica Neue" pitchFamily="34" charset="-120"/>
                         </a:rPr>
-                        <a:t>TWO VISUALS</a:t>
+                        <a:t>Two visuals</a:t>
                       </a:r>
-                      <a:endParaRPr lang="en-US" sz="900" dirty="0">
-                        <a:latin typeface="Calibri" charset="0"/>
-                        <a:ea typeface="Calibri" charset="0"/>
-                        <a:cs typeface="Calibri" charset="0"/>
+                      <a:endParaRPr lang="en-US" sz="950" dirty="0">
+                        <a:latin typeface="Helvetica Neue" charset="0"/>
+                        <a:ea typeface="Helvetica Neue" charset="0"/>
+                        <a:cs typeface="Helvetica Neue" charset="0"/>
                       </a:endParaRPr>
                     </a:p>
                   </a:txBody>
                   <a:tcPr marL="5486400" marR="5486400" marT="0" marB="0" anchor="ctr">
-                    <a:lnL w="6350" cap="flat" cmpd="sng" algn="ctr">
-                      <a:solidFill>
-                        <a:srgbClr val="2A5553"/>
-                      </a:solidFill>
-                      <a:prstDash val="solid"/>
-                      <a:round/>
-                      <a:headEnd type="none" w="med" len="med"/>
-                      <a:tailEnd type="none" w="med" len="med"/>
+                    <a:lnL w="0" cap="flat" cmpd="sng" algn="ctr">
+                      <a:noFill/>
                     </a:lnL>
-                    <a:lnR w="6350" cap="flat" cmpd="sng" algn="ctr">
-                      <a:solidFill>
-                        <a:srgbClr val="2A5553"/>
-                      </a:solidFill>
-                      <a:prstDash val="solid"/>
-                      <a:round/>
-                      <a:headEnd type="none" w="med" len="med"/>
-                      <a:tailEnd type="none" w="med" len="med"/>
+                    <a:lnR w="0" cap="flat" cmpd="sng" algn="ctr">
+                      <a:noFill/>
                     </a:lnR>
-                    <a:lnT w="6350" cap="flat" cmpd="sng" algn="ctr">
-                      <a:solidFill>
-                        <a:srgbClr val="2A5553"/>
-                      </a:solidFill>
-                      <a:prstDash val="solid"/>
-                      <a:round/>
-                      <a:headEnd type="none" w="med" len="med"/>
-                      <a:tailEnd type="none" w="med" len="med"/>
+                    <a:lnT w="0" cap="flat" cmpd="sng" algn="ctr">
+                      <a:noFill/>
                     </a:lnT>
                     <a:lnB w="6350" cap="flat" cmpd="sng" algn="ctr">
                       <a:solidFill>
-                        <a:srgbClr val="2A5553"/>
+                        <a:srgbClr val="D2D2D7"/>
                       </a:solidFill>
                       <a:prstDash val="solid"/>
                       <a:round/>
                       <a:headEnd type="none" w="med" len="med"/>
                       <a:tailEnd type="none" w="med" len="med"/>
                     </a:lnB>
-                    <a:solidFill>
-                      <a:srgbClr val="173B3A"/>
-                    </a:solidFill>
                   </a:tcPr>
                 </a:tc>
               </a:tr>
-              <a:tr h="457200">
+              <a:tr h="438912">
                 <a:tc>
                   <a:txBody>
                     <a:bodyPr/>
@@ -5614,63 +5607,42 @@
                         <a:buNone/>
                       </a:pPr>
                       <a:r>
-                        <a:rPr lang="en-US" sz="1050" b="1" dirty="0">
+                        <a:rPr lang="en-US" sz="1000" b="1" dirty="0">
                           <a:solidFill>
-                            <a:srgbClr val="FF6B4A"/>
+                            <a:srgbClr val="1D1D1F"/>
                           </a:solidFill>
-                          <a:latin typeface="Calibri" pitchFamily="34" charset="0"/>
-                          <a:ea typeface="Calibri" pitchFamily="34" charset="-122"/>
-                          <a:cs typeface="Calibri" pitchFamily="34" charset="-120"/>
+                          <a:latin typeface="Helvetica Neue" pitchFamily="34" charset="0"/>
+                          <a:ea typeface="Helvetica Neue" pitchFamily="34" charset="-122"/>
+                          <a:cs typeface="Helvetica Neue" pitchFamily="34" charset="-120"/>
                         </a:rPr>
-                        <a:t>[ name ]</a:t>
+                        <a:t>Kaled Dahleh</a:t>
                       </a:r>
-                      <a:endParaRPr lang="en-US" sz="1050" dirty="0">
-                        <a:latin typeface="Calibri" charset="0"/>
-                        <a:ea typeface="Calibri" charset="0"/>
-                        <a:cs typeface="Calibri" charset="0"/>
+                      <a:endParaRPr lang="en-US" sz="1000" dirty="0">
+                        <a:latin typeface="Helvetica Neue" charset="0"/>
+                        <a:ea typeface="Helvetica Neue" charset="0"/>
+                        <a:cs typeface="Helvetica Neue" charset="0"/>
                       </a:endParaRPr>
                     </a:p>
                   </a:txBody>
                   <a:tcPr marL="5486400" marR="5486400" marT="0" marB="0" anchor="ctr">
-                    <a:lnL w="6350" cap="flat" cmpd="sng" algn="ctr">
-                      <a:solidFill>
-                        <a:srgbClr val="2A5553"/>
-                      </a:solidFill>
-                      <a:prstDash val="solid"/>
-                      <a:round/>
-                      <a:headEnd type="none" w="med" len="med"/>
-                      <a:tailEnd type="none" w="med" len="med"/>
+                    <a:lnL w="0" cap="flat" cmpd="sng" algn="ctr">
+                      <a:noFill/>
                     </a:lnL>
-                    <a:lnR w="6350" cap="flat" cmpd="sng" algn="ctr">
-                      <a:solidFill>
-                        <a:srgbClr val="2A5553"/>
-                      </a:solidFill>
-                      <a:prstDash val="solid"/>
-                      <a:round/>
-                      <a:headEnd type="none" w="med" len="med"/>
-                      <a:tailEnd type="none" w="med" len="med"/>
+                    <a:lnR w="0" cap="flat" cmpd="sng" algn="ctr">
+                      <a:noFill/>
                     </a:lnR>
-                    <a:lnT w="6350" cap="flat" cmpd="sng" algn="ctr">
-                      <a:solidFill>
-                        <a:srgbClr val="2A5553"/>
-                      </a:solidFill>
-                      <a:prstDash val="solid"/>
-                      <a:round/>
-                      <a:headEnd type="none" w="med" len="med"/>
-                      <a:tailEnd type="none" w="med" len="med"/>
+                    <a:lnT w="0" cap="flat" cmpd="sng" algn="ctr">
+                      <a:noFill/>
                     </a:lnT>
                     <a:lnB w="6350" cap="flat" cmpd="sng" algn="ctr">
                       <a:solidFill>
-                        <a:srgbClr val="2A5553"/>
+                        <a:srgbClr val="D2D2D7"/>
                       </a:solidFill>
                       <a:prstDash val="solid"/>
                       <a:round/>
                       <a:headEnd type="none" w="med" len="med"/>
                       <a:tailEnd type="none" w="med" len="med"/>
                     </a:lnB>
-                    <a:solidFill>
-                      <a:srgbClr val="173B3A"/>
-                    </a:solidFill>
                   </a:tcPr>
                 </a:tc>
                 <a:tc>
@@ -5682,63 +5654,42 @@
                         <a:buNone/>
                       </a:pPr>
                       <a:r>
-                        <a:rPr lang="en-US" sz="1050" dirty="0">
+                        <a:rPr lang="en-US" sz="1000" dirty="0">
                           <a:solidFill>
-                            <a:srgbClr val="FFFFFF"/>
+                            <a:srgbClr val="1D1D1F"/>
                           </a:solidFill>
-                          <a:latin typeface="Calibri" pitchFamily="34" charset="0"/>
-                          <a:ea typeface="Calibri" pitchFamily="34" charset="-122"/>
-                          <a:cs typeface="Calibri" pitchFamily="34" charset="-120"/>
+                          <a:latin typeface="Helvetica Neue" pitchFamily="34" charset="0"/>
+                          <a:ea typeface="Helvetica Neue" pitchFamily="34" charset="-122"/>
+                          <a:cs typeface="Helvetica Neue" pitchFamily="34" charset="-120"/>
                         </a:rPr>
                         <a:t>Curve fit: expected move vs. strike price</a:t>
                       </a:r>
-                      <a:endParaRPr lang="en-US" sz="1050" dirty="0">
-                        <a:latin typeface="Calibri" charset="0"/>
-                        <a:ea typeface="Calibri" charset="0"/>
-                        <a:cs typeface="Calibri" charset="0"/>
+                      <a:endParaRPr lang="en-US" sz="1000" dirty="0">
+                        <a:latin typeface="Helvetica Neue" charset="0"/>
+                        <a:ea typeface="Helvetica Neue" charset="0"/>
+                        <a:cs typeface="Helvetica Neue" charset="0"/>
                       </a:endParaRPr>
                     </a:p>
                   </a:txBody>
                   <a:tcPr marL="5486400" marR="5486400" marT="0" marB="0" anchor="ctr">
-                    <a:lnL w="6350" cap="flat" cmpd="sng" algn="ctr">
-                      <a:solidFill>
-                        <a:srgbClr val="2A5553"/>
-                      </a:solidFill>
-                      <a:prstDash val="solid"/>
-                      <a:round/>
-                      <a:headEnd type="none" w="med" len="med"/>
-                      <a:tailEnd type="none" w="med" len="med"/>
+                    <a:lnL w="0" cap="flat" cmpd="sng" algn="ctr">
+                      <a:noFill/>
                     </a:lnL>
-                    <a:lnR w="6350" cap="flat" cmpd="sng" algn="ctr">
-                      <a:solidFill>
-                        <a:srgbClr val="2A5553"/>
-                      </a:solidFill>
-                      <a:prstDash val="solid"/>
-                      <a:round/>
-                      <a:headEnd type="none" w="med" len="med"/>
-                      <a:tailEnd type="none" w="med" len="med"/>
+                    <a:lnR w="0" cap="flat" cmpd="sng" algn="ctr">
+                      <a:noFill/>
                     </a:lnR>
-                    <a:lnT w="6350" cap="flat" cmpd="sng" algn="ctr">
-                      <a:solidFill>
-                        <a:srgbClr val="2A5553"/>
-                      </a:solidFill>
-                      <a:prstDash val="solid"/>
-                      <a:round/>
-                      <a:headEnd type="none" w="med" len="med"/>
-                      <a:tailEnd type="none" w="med" len="med"/>
+                    <a:lnT w="0" cap="flat" cmpd="sng" algn="ctr">
+                      <a:noFill/>
                     </a:lnT>
                     <a:lnB w="6350" cap="flat" cmpd="sng" algn="ctr">
                       <a:solidFill>
-                        <a:srgbClr val="2A5553"/>
+                        <a:srgbClr val="D2D2D7"/>
                       </a:solidFill>
                       <a:prstDash val="solid"/>
                       <a:round/>
                       <a:headEnd type="none" w="med" len="med"/>
                       <a:tailEnd type="none" w="med" len="med"/>
                     </a:lnB>
-                    <a:solidFill>
-                      <a:srgbClr val="173B3A"/>
-                    </a:solidFill>
                   </a:tcPr>
                 </a:tc>
                 <a:tc>
@@ -5750,67 +5701,46 @@
                         <a:buNone/>
                       </a:pPr>
                       <a:r>
-                        <a:rPr lang="en-US" sz="1050" dirty="0">
+                        <a:rPr lang="en-US" sz="1000" dirty="0">
                           <a:solidFill>
-                            <a:srgbClr val="B7D3CE"/>
+                            <a:srgbClr val="6E6E73"/>
                           </a:solidFill>
-                          <a:latin typeface="Calibri" pitchFamily="34" charset="0"/>
-                          <a:ea typeface="Calibri" pitchFamily="34" charset="-122"/>
-                          <a:cs typeface="Calibri" pitchFamily="34" charset="-120"/>
+                          <a:latin typeface="Helvetica Neue" pitchFamily="34" charset="0"/>
+                          <a:ea typeface="Helvetica Neue" pitchFamily="34" charset="-122"/>
+                          <a:cs typeface="Helvetica Neue" pitchFamily="34" charset="-120"/>
                         </a:rPr>
                         <a:t>Curve chart; fit vs. actual</a:t>
                       </a:r>
-                      <a:endParaRPr lang="en-US" sz="1050" dirty="0">
-                        <a:latin typeface="Calibri" charset="0"/>
-                        <a:ea typeface="Calibri" charset="0"/>
-                        <a:cs typeface="Calibri" charset="0"/>
+                      <a:endParaRPr lang="en-US" sz="1000" dirty="0">
+                        <a:latin typeface="Helvetica Neue" charset="0"/>
+                        <a:ea typeface="Helvetica Neue" charset="0"/>
+                        <a:cs typeface="Helvetica Neue" charset="0"/>
                       </a:endParaRPr>
                     </a:p>
                   </a:txBody>
                   <a:tcPr marL="5486400" marR="5486400" marT="0" marB="0" anchor="ctr">
-                    <a:lnL w="6350" cap="flat" cmpd="sng" algn="ctr">
-                      <a:solidFill>
-                        <a:srgbClr val="2A5553"/>
-                      </a:solidFill>
-                      <a:prstDash val="solid"/>
-                      <a:round/>
-                      <a:headEnd type="none" w="med" len="med"/>
-                      <a:tailEnd type="none" w="med" len="med"/>
+                    <a:lnL w="0" cap="flat" cmpd="sng" algn="ctr">
+                      <a:noFill/>
                     </a:lnL>
-                    <a:lnR w="6350" cap="flat" cmpd="sng" algn="ctr">
-                      <a:solidFill>
-                        <a:srgbClr val="2A5553"/>
-                      </a:solidFill>
-                      <a:prstDash val="solid"/>
-                      <a:round/>
-                      <a:headEnd type="none" w="med" len="med"/>
-                      <a:tailEnd type="none" w="med" len="med"/>
+                    <a:lnR w="0" cap="flat" cmpd="sng" algn="ctr">
+                      <a:noFill/>
                     </a:lnR>
-                    <a:lnT w="6350" cap="flat" cmpd="sng" algn="ctr">
-                      <a:solidFill>
-                        <a:srgbClr val="2A5553"/>
-                      </a:solidFill>
-                      <a:prstDash val="solid"/>
-                      <a:round/>
-                      <a:headEnd type="none" w="med" len="med"/>
-                      <a:tailEnd type="none" w="med" len="med"/>
+                    <a:lnT w="0" cap="flat" cmpd="sng" algn="ctr">
+                      <a:noFill/>
                     </a:lnT>
                     <a:lnB w="6350" cap="flat" cmpd="sng" algn="ctr">
                       <a:solidFill>
-                        <a:srgbClr val="2A5553"/>
+                        <a:srgbClr val="D2D2D7"/>
                       </a:solidFill>
                       <a:prstDash val="solid"/>
                       <a:round/>
                       <a:headEnd type="none" w="med" len="med"/>
                       <a:tailEnd type="none" w="med" len="med"/>
                     </a:lnB>
-                    <a:solidFill>
-                      <a:srgbClr val="173B3A"/>
-                    </a:solidFill>
                   </a:tcPr>
                 </a:tc>
               </a:tr>
-              <a:tr h="457200">
+              <a:tr h="438912">
                 <a:tc>
                   <a:txBody>
                     <a:bodyPr/>
@@ -5820,63 +5750,42 @@
                         <a:buNone/>
                       </a:pPr>
                       <a:r>
-                        <a:rPr lang="en-US" sz="1050" b="1" dirty="0">
+                        <a:rPr lang="en-US" sz="1000" b="1" dirty="0">
                           <a:solidFill>
-                            <a:srgbClr val="FF6B4A"/>
+                            <a:srgbClr val="1D1D1F"/>
                           </a:solidFill>
-                          <a:latin typeface="Calibri" pitchFamily="34" charset="0"/>
-                          <a:ea typeface="Calibri" pitchFamily="34" charset="-122"/>
-                          <a:cs typeface="Calibri" pitchFamily="34" charset="-120"/>
+                          <a:latin typeface="Helvetica Neue" pitchFamily="34" charset="0"/>
+                          <a:ea typeface="Helvetica Neue" pitchFamily="34" charset="-122"/>
+                          <a:cs typeface="Helvetica Neue" pitchFamily="34" charset="-120"/>
                         </a:rPr>
-                        <a:t>[ name ]</a:t>
+                        <a:t>Anlil Iwas</a:t>
                       </a:r>
-                      <a:endParaRPr lang="en-US" sz="1050" dirty="0">
-                        <a:latin typeface="Calibri" charset="0"/>
-                        <a:ea typeface="Calibri" charset="0"/>
-                        <a:cs typeface="Calibri" charset="0"/>
+                      <a:endParaRPr lang="en-US" sz="1000" dirty="0">
+                        <a:latin typeface="Helvetica Neue" charset="0"/>
+                        <a:ea typeface="Helvetica Neue" charset="0"/>
+                        <a:cs typeface="Helvetica Neue" charset="0"/>
                       </a:endParaRPr>
                     </a:p>
                   </a:txBody>
                   <a:tcPr marL="5486400" marR="5486400" marT="0" marB="0" anchor="ctr">
-                    <a:lnL w="6350" cap="flat" cmpd="sng" algn="ctr">
-                      <a:solidFill>
-                        <a:srgbClr val="2A5553"/>
-                      </a:solidFill>
-                      <a:prstDash val="solid"/>
-                      <a:round/>
-                      <a:headEnd type="none" w="med" len="med"/>
-                      <a:tailEnd type="none" w="med" len="med"/>
+                    <a:lnL w="0" cap="flat" cmpd="sng" algn="ctr">
+                      <a:noFill/>
                     </a:lnL>
-                    <a:lnR w="6350" cap="flat" cmpd="sng" algn="ctr">
-                      <a:solidFill>
-                        <a:srgbClr val="2A5553"/>
-                      </a:solidFill>
-                      <a:prstDash val="solid"/>
-                      <a:round/>
-                      <a:headEnd type="none" w="med" len="med"/>
-                      <a:tailEnd type="none" w="med" len="med"/>
+                    <a:lnR w="0" cap="flat" cmpd="sng" algn="ctr">
+                      <a:noFill/>
                     </a:lnR>
-                    <a:lnT w="6350" cap="flat" cmpd="sng" algn="ctr">
-                      <a:solidFill>
-                        <a:srgbClr val="2A5553"/>
-                      </a:solidFill>
-                      <a:prstDash val="solid"/>
-                      <a:round/>
-                      <a:headEnd type="none" w="med" len="med"/>
-                      <a:tailEnd type="none" w="med" len="med"/>
+                    <a:lnT w="0" cap="flat" cmpd="sng" algn="ctr">
+                      <a:noFill/>
                     </a:lnT>
                     <a:lnB w="6350" cap="flat" cmpd="sng" algn="ctr">
                       <a:solidFill>
-                        <a:srgbClr val="2A5553"/>
+                        <a:srgbClr val="D2D2D7"/>
                       </a:solidFill>
                       <a:prstDash val="solid"/>
                       <a:round/>
                       <a:headEnd type="none" w="med" len="med"/>
                       <a:tailEnd type="none" w="med" len="med"/>
                     </a:lnB>
-                    <a:solidFill>
-                      <a:srgbClr val="173B3A"/>
-                    </a:solidFill>
                   </a:tcPr>
                 </a:tc>
                 <a:tc>
@@ -5888,63 +5797,42 @@
                         <a:buNone/>
                       </a:pPr>
                       <a:r>
-                        <a:rPr lang="en-US" sz="1050" dirty="0">
+                        <a:rPr lang="en-US" sz="1000" dirty="0">
                           <a:solidFill>
-                            <a:srgbClr val="FFFFFF"/>
+                            <a:srgbClr val="1D1D1F"/>
                           </a:solidFill>
-                          <a:latin typeface="Calibri" pitchFamily="34" charset="0"/>
-                          <a:ea typeface="Calibri" pitchFamily="34" charset="-122"/>
-                          <a:cs typeface="Calibri" pitchFamily="34" charset="-120"/>
+                          <a:latin typeface="Helvetica Neue" pitchFamily="34" charset="0"/>
+                          <a:ea typeface="Helvetica Neue" pitchFamily="34" charset="-122"/>
+                          <a:cs typeface="Helvetica Neue" pitchFamily="34" charset="-120"/>
                         </a:rPr>
                         <a:t>Logistic regression: did traders guess too high?</a:t>
                       </a:r>
-                      <a:endParaRPr lang="en-US" sz="1050" dirty="0">
-                        <a:latin typeface="Calibri" charset="0"/>
-                        <a:ea typeface="Calibri" charset="0"/>
-                        <a:cs typeface="Calibri" charset="0"/>
+                      <a:endParaRPr lang="en-US" sz="1000" dirty="0">
+                        <a:latin typeface="Helvetica Neue" charset="0"/>
+                        <a:ea typeface="Helvetica Neue" charset="0"/>
+                        <a:cs typeface="Helvetica Neue" charset="0"/>
                       </a:endParaRPr>
                     </a:p>
                   </a:txBody>
                   <a:tcPr marL="5486400" marR="5486400" marT="0" marB="0" anchor="ctr">
-                    <a:lnL w="6350" cap="flat" cmpd="sng" algn="ctr">
-                      <a:solidFill>
-                        <a:srgbClr val="2A5553"/>
-                      </a:solidFill>
-                      <a:prstDash val="solid"/>
-                      <a:round/>
-                      <a:headEnd type="none" w="med" len="med"/>
-                      <a:tailEnd type="none" w="med" len="med"/>
+                    <a:lnL w="0" cap="flat" cmpd="sng" algn="ctr">
+                      <a:noFill/>
                     </a:lnL>
-                    <a:lnR w="6350" cap="flat" cmpd="sng" algn="ctr">
-                      <a:solidFill>
-                        <a:srgbClr val="2A5553"/>
-                      </a:solidFill>
-                      <a:prstDash val="solid"/>
-                      <a:round/>
-                      <a:headEnd type="none" w="med" len="med"/>
-                      <a:tailEnd type="none" w="med" len="med"/>
+                    <a:lnR w="0" cap="flat" cmpd="sng" algn="ctr">
+                      <a:noFill/>
                     </a:lnR>
-                    <a:lnT w="6350" cap="flat" cmpd="sng" algn="ctr">
-                      <a:solidFill>
-                        <a:srgbClr val="2A5553"/>
-                      </a:solidFill>
-                      <a:prstDash val="solid"/>
-                      <a:round/>
-                      <a:headEnd type="none" w="med" len="med"/>
-                      <a:tailEnd type="none" w="med" len="med"/>
+                    <a:lnT w="0" cap="flat" cmpd="sng" algn="ctr">
+                      <a:noFill/>
                     </a:lnT>
                     <a:lnB w="6350" cap="flat" cmpd="sng" algn="ctr">
                       <a:solidFill>
-                        <a:srgbClr val="2A5553"/>
+                        <a:srgbClr val="D2D2D7"/>
                       </a:solidFill>
                       <a:prstDash val="solid"/>
                       <a:round/>
                       <a:headEnd type="none" w="med" len="med"/>
                       <a:tailEnd type="none" w="med" len="med"/>
                     </a:lnB>
-                    <a:solidFill>
-                      <a:srgbClr val="173B3A"/>
-                    </a:solidFill>
                   </a:tcPr>
                 </a:tc>
                 <a:tc>
@@ -5956,67 +5844,46 @@
                         <a:buNone/>
                       </a:pPr>
                       <a:r>
-                        <a:rPr lang="en-US" sz="1050" dirty="0">
+                        <a:rPr lang="en-US" sz="1000" dirty="0">
                           <a:solidFill>
-                            <a:srgbClr val="B7D3CE"/>
+                            <a:srgbClr val="6E6E73"/>
                           </a:solidFill>
-                          <a:latin typeface="Calibri" pitchFamily="34" charset="0"/>
-                          <a:ea typeface="Calibri" pitchFamily="34" charset="-122"/>
-                          <a:cs typeface="Calibri" pitchFamily="34" charset="-120"/>
+                          <a:latin typeface="Helvetica Neue" pitchFamily="34" charset="0"/>
+                          <a:ea typeface="Helvetica Neue" pitchFamily="34" charset="-122"/>
+                          <a:cs typeface="Helvetica Neue" pitchFamily="34" charset="-120"/>
                         </a:rPr>
                         <a:t>Expected vs. actual; accuracy by stock</a:t>
                       </a:r>
-                      <a:endParaRPr lang="en-US" sz="1050" dirty="0">
-                        <a:latin typeface="Calibri" charset="0"/>
-                        <a:ea typeface="Calibri" charset="0"/>
-                        <a:cs typeface="Calibri" charset="0"/>
+                      <a:endParaRPr lang="en-US" sz="1000" dirty="0">
+                        <a:latin typeface="Helvetica Neue" charset="0"/>
+                        <a:ea typeface="Helvetica Neue" charset="0"/>
+                        <a:cs typeface="Helvetica Neue" charset="0"/>
                       </a:endParaRPr>
                     </a:p>
                   </a:txBody>
                   <a:tcPr marL="5486400" marR="5486400" marT="0" marB="0" anchor="ctr">
-                    <a:lnL w="6350" cap="flat" cmpd="sng" algn="ctr">
-                      <a:solidFill>
-                        <a:srgbClr val="2A5553"/>
-                      </a:solidFill>
-                      <a:prstDash val="solid"/>
-                      <a:round/>
-                      <a:headEnd type="none" w="med" len="med"/>
-                      <a:tailEnd type="none" w="med" len="med"/>
+                    <a:lnL w="0" cap="flat" cmpd="sng" algn="ctr">
+                      <a:noFill/>
                     </a:lnL>
-                    <a:lnR w="6350" cap="flat" cmpd="sng" algn="ctr">
-                      <a:solidFill>
-                        <a:srgbClr val="2A5553"/>
-                      </a:solidFill>
-                      <a:prstDash val="solid"/>
-                      <a:round/>
-                      <a:headEnd type="none" w="med" len="med"/>
-                      <a:tailEnd type="none" w="med" len="med"/>
+                    <a:lnR w="0" cap="flat" cmpd="sng" algn="ctr">
+                      <a:noFill/>
                     </a:lnR>
-                    <a:lnT w="6350" cap="flat" cmpd="sng" algn="ctr">
-                      <a:solidFill>
-                        <a:srgbClr val="2A5553"/>
-                      </a:solidFill>
-                      <a:prstDash val="solid"/>
-                      <a:round/>
-                      <a:headEnd type="none" w="med" len="med"/>
-                      <a:tailEnd type="none" w="med" len="med"/>
+                    <a:lnT w="0" cap="flat" cmpd="sng" algn="ctr">
+                      <a:noFill/>
                     </a:lnT>
                     <a:lnB w="6350" cap="flat" cmpd="sng" algn="ctr">
                       <a:solidFill>
-                        <a:srgbClr val="2A5553"/>
+                        <a:srgbClr val="D2D2D7"/>
                       </a:solidFill>
                       <a:prstDash val="solid"/>
                       <a:round/>
                       <a:headEnd type="none" w="med" len="med"/>
                       <a:tailEnd type="none" w="med" len="med"/>
                     </a:lnB>
-                    <a:solidFill>
-                      <a:srgbClr val="173B3A"/>
-                    </a:solidFill>
                   </a:tcPr>
                 </a:tc>
               </a:tr>
-              <a:tr h="457200">
+              <a:tr h="438912">
                 <a:tc>
                   <a:txBody>
                     <a:bodyPr/>
@@ -6026,63 +5893,42 @@
                         <a:buNone/>
                       </a:pPr>
                       <a:r>
-                        <a:rPr lang="en-US" sz="1050" b="1" dirty="0">
+                        <a:rPr lang="en-US" sz="1000" b="1" dirty="0">
                           <a:solidFill>
-                            <a:srgbClr val="FF6B4A"/>
+                            <a:srgbClr val="1D1D1F"/>
                           </a:solidFill>
-                          <a:latin typeface="Calibri" pitchFamily="34" charset="0"/>
-                          <a:ea typeface="Calibri" pitchFamily="34" charset="-122"/>
-                          <a:cs typeface="Calibri" pitchFamily="34" charset="-120"/>
+                          <a:latin typeface="Helvetica Neue" pitchFamily="34" charset="0"/>
+                          <a:ea typeface="Helvetica Neue" pitchFamily="34" charset="-122"/>
+                          <a:cs typeface="Helvetica Neue" pitchFamily="34" charset="-120"/>
                         </a:rPr>
-                        <a:t>[ name ]</a:t>
+                        <a:t>Adi Latic</a:t>
                       </a:r>
-                      <a:endParaRPr lang="en-US" sz="1050" dirty="0">
-                        <a:latin typeface="Calibri" charset="0"/>
-                        <a:ea typeface="Calibri" charset="0"/>
-                        <a:cs typeface="Calibri" charset="0"/>
+                      <a:endParaRPr lang="en-US" sz="1000" dirty="0">
+                        <a:latin typeface="Helvetica Neue" charset="0"/>
+                        <a:ea typeface="Helvetica Neue" charset="0"/>
+                        <a:cs typeface="Helvetica Neue" charset="0"/>
                       </a:endParaRPr>
                     </a:p>
                   </a:txBody>
                   <a:tcPr marL="5486400" marR="5486400" marT="0" marB="0" anchor="ctr">
-                    <a:lnL w="6350" cap="flat" cmpd="sng" algn="ctr">
-                      <a:solidFill>
-                        <a:srgbClr val="2A5553"/>
-                      </a:solidFill>
-                      <a:prstDash val="solid"/>
-                      <a:round/>
-                      <a:headEnd type="none" w="med" len="med"/>
-                      <a:tailEnd type="none" w="med" len="med"/>
+                    <a:lnL w="0" cap="flat" cmpd="sng" algn="ctr">
+                      <a:noFill/>
                     </a:lnL>
-                    <a:lnR w="6350" cap="flat" cmpd="sng" algn="ctr">
-                      <a:solidFill>
-                        <a:srgbClr val="2A5553"/>
-                      </a:solidFill>
-                      <a:prstDash val="solid"/>
-                      <a:round/>
-                      <a:headEnd type="none" w="med" len="med"/>
-                      <a:tailEnd type="none" w="med" len="med"/>
+                    <a:lnR w="0" cap="flat" cmpd="sng" algn="ctr">
+                      <a:noFill/>
                     </a:lnR>
-                    <a:lnT w="6350" cap="flat" cmpd="sng" algn="ctr">
-                      <a:solidFill>
-                        <a:srgbClr val="2A5553"/>
-                      </a:solidFill>
-                      <a:prstDash val="solid"/>
-                      <a:round/>
-                      <a:headEnd type="none" w="med" len="med"/>
-                      <a:tailEnd type="none" w="med" len="med"/>
+                    <a:lnT w="0" cap="flat" cmpd="sng" algn="ctr">
+                      <a:noFill/>
                     </a:lnT>
                     <a:lnB w="6350" cap="flat" cmpd="sng" algn="ctr">
                       <a:solidFill>
-                        <a:srgbClr val="2A5553"/>
+                        <a:srgbClr val="D2D2D7"/>
                       </a:solidFill>
                       <a:prstDash val="solid"/>
                       <a:round/>
                       <a:headEnd type="none" w="med" len="med"/>
                       <a:tailEnd type="none" w="med" len="med"/>
                     </a:lnB>
-                    <a:solidFill>
-                      <a:srgbClr val="173B3A"/>
-                    </a:solidFill>
                   </a:tcPr>
                 </a:tc>
                 <a:tc>
@@ -6094,63 +5940,42 @@
                         <a:buNone/>
                       </a:pPr>
                       <a:r>
-                        <a:rPr lang="en-US" sz="1050" dirty="0">
+                        <a:rPr lang="en-US" sz="1000" dirty="0">
                           <a:solidFill>
-                            <a:srgbClr val="FFFFFF"/>
+                            <a:srgbClr val="1D1D1F"/>
                           </a:solidFill>
-                          <a:latin typeface="Calibri" pitchFamily="34" charset="0"/>
-                          <a:ea typeface="Calibri" pitchFamily="34" charset="-122"/>
-                          <a:cs typeface="Calibri" pitchFamily="34" charset="-120"/>
+                          <a:latin typeface="Helvetica Neue" pitchFamily="34" charset="0"/>
+                          <a:ea typeface="Helvetica Neue" pitchFamily="34" charset="-122"/>
+                          <a:cs typeface="Helvetica Neue" pitchFamily="34" charset="-120"/>
                         </a:rPr>
                         <a:t>Random forest on the same question</a:t>
                       </a:r>
-                      <a:endParaRPr lang="en-US" sz="1050" dirty="0">
-                        <a:latin typeface="Calibri" charset="0"/>
-                        <a:ea typeface="Calibri" charset="0"/>
-                        <a:cs typeface="Calibri" charset="0"/>
+                      <a:endParaRPr lang="en-US" sz="1000" dirty="0">
+                        <a:latin typeface="Helvetica Neue" charset="0"/>
+                        <a:ea typeface="Helvetica Neue" charset="0"/>
+                        <a:cs typeface="Helvetica Neue" charset="0"/>
                       </a:endParaRPr>
                     </a:p>
                   </a:txBody>
                   <a:tcPr marL="5486400" marR="5486400" marT="0" marB="0" anchor="ctr">
-                    <a:lnL w="6350" cap="flat" cmpd="sng" algn="ctr">
-                      <a:solidFill>
-                        <a:srgbClr val="2A5553"/>
-                      </a:solidFill>
-                      <a:prstDash val="solid"/>
-                      <a:round/>
-                      <a:headEnd type="none" w="med" len="med"/>
-                      <a:tailEnd type="none" w="med" len="med"/>
+                    <a:lnL w="0" cap="flat" cmpd="sng" algn="ctr">
+                      <a:noFill/>
                     </a:lnL>
-                    <a:lnR w="6350" cap="flat" cmpd="sng" algn="ctr">
-                      <a:solidFill>
-                        <a:srgbClr val="2A5553"/>
-                      </a:solidFill>
-                      <a:prstDash val="solid"/>
-                      <a:round/>
-                      <a:headEnd type="none" w="med" len="med"/>
-                      <a:tailEnd type="none" w="med" len="med"/>
+                    <a:lnR w="0" cap="flat" cmpd="sng" algn="ctr">
+                      <a:noFill/>
                     </a:lnR>
-                    <a:lnT w="6350" cap="flat" cmpd="sng" algn="ctr">
-                      <a:solidFill>
-                        <a:srgbClr val="2A5553"/>
-                      </a:solidFill>
-                      <a:prstDash val="solid"/>
-                      <a:round/>
-                      <a:headEnd type="none" w="med" len="med"/>
-                      <a:tailEnd type="none" w="med" len="med"/>
+                    <a:lnT w="0" cap="flat" cmpd="sng" algn="ctr">
+                      <a:noFill/>
                     </a:lnT>
                     <a:lnB w="6350" cap="flat" cmpd="sng" algn="ctr">
                       <a:solidFill>
-                        <a:srgbClr val="2A5553"/>
+                        <a:srgbClr val="D2D2D7"/>
                       </a:solidFill>
                       <a:prstDash val="solid"/>
                       <a:round/>
                       <a:headEnd type="none" w="med" len="med"/>
                       <a:tailEnd type="none" w="med" len="med"/>
                     </a:lnB>
-                    <a:solidFill>
-                      <a:srgbClr val="173B3A"/>
-                    </a:solidFill>
                   </a:tcPr>
                 </a:tc>
                 <a:tc>
@@ -6162,67 +5987,46 @@
                         <a:buNone/>
                       </a:pPr>
                       <a:r>
-                        <a:rPr lang="en-US" sz="1050" dirty="0">
+                        <a:rPr lang="en-US" sz="1000" dirty="0">
                           <a:solidFill>
-                            <a:srgbClr val="B7D3CE"/>
+                            <a:srgbClr val="6E6E73"/>
                           </a:solidFill>
-                          <a:latin typeface="Calibri" pitchFamily="34" charset="0"/>
-                          <a:ea typeface="Calibri" pitchFamily="34" charset="-122"/>
-                          <a:cs typeface="Calibri" pitchFamily="34" charset="-120"/>
+                          <a:latin typeface="Helvetica Neue" pitchFamily="34" charset="0"/>
+                          <a:ea typeface="Helvetica Neue" pitchFamily="34" charset="-122"/>
+                          <a:cs typeface="Helvetica Neue" pitchFamily="34" charset="-120"/>
                         </a:rPr>
                         <a:t>What drives the prediction; errors over time</a:t>
                       </a:r>
-                      <a:endParaRPr lang="en-US" sz="1050" dirty="0">
-                        <a:latin typeface="Calibri" charset="0"/>
-                        <a:ea typeface="Calibri" charset="0"/>
-                        <a:cs typeface="Calibri" charset="0"/>
+                      <a:endParaRPr lang="en-US" sz="1000" dirty="0">
+                        <a:latin typeface="Helvetica Neue" charset="0"/>
+                        <a:ea typeface="Helvetica Neue" charset="0"/>
+                        <a:cs typeface="Helvetica Neue" charset="0"/>
                       </a:endParaRPr>
                     </a:p>
                   </a:txBody>
                   <a:tcPr marL="5486400" marR="5486400" marT="0" marB="0" anchor="ctr">
-                    <a:lnL w="6350" cap="flat" cmpd="sng" algn="ctr">
-                      <a:solidFill>
-                        <a:srgbClr val="2A5553"/>
-                      </a:solidFill>
-                      <a:prstDash val="solid"/>
-                      <a:round/>
-                      <a:headEnd type="none" w="med" len="med"/>
-                      <a:tailEnd type="none" w="med" len="med"/>
+                    <a:lnL w="0" cap="flat" cmpd="sng" algn="ctr">
+                      <a:noFill/>
                     </a:lnL>
-                    <a:lnR w="6350" cap="flat" cmpd="sng" algn="ctr">
-                      <a:solidFill>
-                        <a:srgbClr val="2A5553"/>
-                      </a:solidFill>
-                      <a:prstDash val="solid"/>
-                      <a:round/>
-                      <a:headEnd type="none" w="med" len="med"/>
-                      <a:tailEnd type="none" w="med" len="med"/>
+                    <a:lnR w="0" cap="flat" cmpd="sng" algn="ctr">
+                      <a:noFill/>
                     </a:lnR>
-                    <a:lnT w="6350" cap="flat" cmpd="sng" algn="ctr">
-                      <a:solidFill>
-                        <a:srgbClr val="2A5553"/>
-                      </a:solidFill>
-                      <a:prstDash val="solid"/>
-                      <a:round/>
-                      <a:headEnd type="none" w="med" len="med"/>
-                      <a:tailEnd type="none" w="med" len="med"/>
+                    <a:lnT w="0" cap="flat" cmpd="sng" algn="ctr">
+                      <a:noFill/>
                     </a:lnT>
                     <a:lnB w="6350" cap="flat" cmpd="sng" algn="ctr">
                       <a:solidFill>
-                        <a:srgbClr val="2A5553"/>
+                        <a:srgbClr val="D2D2D7"/>
                       </a:solidFill>
                       <a:prstDash val="solid"/>
                       <a:round/>
                       <a:headEnd type="none" w="med" len="med"/>
                       <a:tailEnd type="none" w="med" len="med"/>
                     </a:lnB>
-                    <a:solidFill>
-                      <a:srgbClr val="173B3A"/>
-                    </a:solidFill>
                   </a:tcPr>
                 </a:tc>
               </a:tr>
-              <a:tr h="457200">
+              <a:tr h="438912">
                 <a:tc>
                   <a:txBody>
                     <a:bodyPr/>
@@ -6232,63 +6036,42 @@
                         <a:buNone/>
                       </a:pPr>
                       <a:r>
-                        <a:rPr lang="en-US" sz="1050" b="1" dirty="0">
+                        <a:rPr lang="en-US" sz="1000" b="1" dirty="0">
                           <a:solidFill>
-                            <a:srgbClr val="FF6B4A"/>
+                            <a:srgbClr val="1D1D1F"/>
                           </a:solidFill>
-                          <a:latin typeface="Calibri" pitchFamily="34" charset="0"/>
-                          <a:ea typeface="Calibri" pitchFamily="34" charset="-122"/>
-                          <a:cs typeface="Calibri" pitchFamily="34" charset="-120"/>
+                          <a:latin typeface="Helvetica Neue" pitchFamily="34" charset="0"/>
+                          <a:ea typeface="Helvetica Neue" pitchFamily="34" charset="-122"/>
+                          <a:cs typeface="Helvetica Neue" pitchFamily="34" charset="-120"/>
                         </a:rPr>
-                        <a:t>[ name ]</a:t>
+                        <a:t>Neo Uy</a:t>
                       </a:r>
-                      <a:endParaRPr lang="en-US" sz="1050" dirty="0">
-                        <a:latin typeface="Calibri" charset="0"/>
-                        <a:ea typeface="Calibri" charset="0"/>
-                        <a:cs typeface="Calibri" charset="0"/>
+                      <a:endParaRPr lang="en-US" sz="1000" dirty="0">
+                        <a:latin typeface="Helvetica Neue" charset="0"/>
+                        <a:ea typeface="Helvetica Neue" charset="0"/>
+                        <a:cs typeface="Helvetica Neue" charset="0"/>
                       </a:endParaRPr>
                     </a:p>
                   </a:txBody>
                   <a:tcPr marL="5486400" marR="5486400" marT="0" marB="0" anchor="ctr">
-                    <a:lnL w="6350" cap="flat" cmpd="sng" algn="ctr">
-                      <a:solidFill>
-                        <a:srgbClr val="2A5553"/>
-                      </a:solidFill>
-                      <a:prstDash val="solid"/>
-                      <a:round/>
-                      <a:headEnd type="none" w="med" len="med"/>
-                      <a:tailEnd type="none" w="med" len="med"/>
+                    <a:lnL w="0" cap="flat" cmpd="sng" algn="ctr">
+                      <a:noFill/>
                     </a:lnL>
-                    <a:lnR w="6350" cap="flat" cmpd="sng" algn="ctr">
-                      <a:solidFill>
-                        <a:srgbClr val="2A5553"/>
-                      </a:solidFill>
-                      <a:prstDash val="solid"/>
-                      <a:round/>
-                      <a:headEnd type="none" w="med" len="med"/>
-                      <a:tailEnd type="none" w="med" len="med"/>
+                    <a:lnR w="0" cap="flat" cmpd="sng" algn="ctr">
+                      <a:noFill/>
                     </a:lnR>
-                    <a:lnT w="6350" cap="flat" cmpd="sng" algn="ctr">
-                      <a:solidFill>
-                        <a:srgbClr val="2A5553"/>
-                      </a:solidFill>
-                      <a:prstDash val="solid"/>
-                      <a:round/>
-                      <a:headEnd type="none" w="med" len="med"/>
-                      <a:tailEnd type="none" w="med" len="med"/>
+                    <a:lnT w="0" cap="flat" cmpd="sng" algn="ctr">
+                      <a:noFill/>
                     </a:lnT>
                     <a:lnB w="6350" cap="flat" cmpd="sng" algn="ctr">
                       <a:solidFill>
-                        <a:srgbClr val="2A5553"/>
+                        <a:srgbClr val="D2D2D7"/>
                       </a:solidFill>
                       <a:prstDash val="solid"/>
                       <a:round/>
                       <a:headEnd type="none" w="med" len="med"/>
                       <a:tailEnd type="none" w="med" len="med"/>
                     </a:lnB>
-                    <a:solidFill>
-                      <a:srgbClr val="173B3A"/>
-                    </a:solidFill>
                   </a:tcPr>
                 </a:tc>
                 <a:tc>
@@ -6300,63 +6083,42 @@
                         <a:buNone/>
                       </a:pPr>
                       <a:r>
-                        <a:rPr lang="en-US" sz="1050" dirty="0">
+                        <a:rPr lang="en-US" sz="1000" dirty="0">
                           <a:solidFill>
-                            <a:srgbClr val="FFFFFF"/>
+                            <a:srgbClr val="1D1D1F"/>
                           </a:solidFill>
-                          <a:latin typeface="Calibri" pitchFamily="34" charset="0"/>
-                          <a:ea typeface="Calibri" pitchFamily="34" charset="-122"/>
-                          <a:cs typeface="Calibri" pitchFamily="34" charset="-120"/>
+                          <a:latin typeface="Helvetica Neue" pitchFamily="34" charset="0"/>
+                          <a:ea typeface="Helvetica Neue" pitchFamily="34" charset="-122"/>
+                          <a:cs typeface="Helvetica Neue" pitchFamily="34" charset="-120"/>
                         </a:rPr>
                         <a:t>Clustering stocks by curve shape</a:t>
                       </a:r>
-                      <a:endParaRPr lang="en-US" sz="1050" dirty="0">
-                        <a:latin typeface="Calibri" charset="0"/>
-                        <a:ea typeface="Calibri" charset="0"/>
-                        <a:cs typeface="Calibri" charset="0"/>
+                      <a:endParaRPr lang="en-US" sz="1000" dirty="0">
+                        <a:latin typeface="Helvetica Neue" charset="0"/>
+                        <a:ea typeface="Helvetica Neue" charset="0"/>
+                        <a:cs typeface="Helvetica Neue" charset="0"/>
                       </a:endParaRPr>
                     </a:p>
                   </a:txBody>
                   <a:tcPr marL="5486400" marR="5486400" marT="0" marB="0" anchor="ctr">
-                    <a:lnL w="6350" cap="flat" cmpd="sng" algn="ctr">
-                      <a:solidFill>
-                        <a:srgbClr val="2A5553"/>
-                      </a:solidFill>
-                      <a:prstDash val="solid"/>
-                      <a:round/>
-                      <a:headEnd type="none" w="med" len="med"/>
-                      <a:tailEnd type="none" w="med" len="med"/>
+                    <a:lnL w="0" cap="flat" cmpd="sng" algn="ctr">
+                      <a:noFill/>
                     </a:lnL>
-                    <a:lnR w="6350" cap="flat" cmpd="sng" algn="ctr">
-                      <a:solidFill>
-                        <a:srgbClr val="2A5553"/>
-                      </a:solidFill>
-                      <a:prstDash val="solid"/>
-                      <a:round/>
-                      <a:headEnd type="none" w="med" len="med"/>
-                      <a:tailEnd type="none" w="med" len="med"/>
+                    <a:lnR w="0" cap="flat" cmpd="sng" algn="ctr">
+                      <a:noFill/>
                     </a:lnR>
-                    <a:lnT w="6350" cap="flat" cmpd="sng" algn="ctr">
-                      <a:solidFill>
-                        <a:srgbClr val="2A5553"/>
-                      </a:solidFill>
-                      <a:prstDash val="solid"/>
-                      <a:round/>
-                      <a:headEnd type="none" w="med" len="med"/>
-                      <a:tailEnd type="none" w="med" len="med"/>
+                    <a:lnT w="0" cap="flat" cmpd="sng" algn="ctr">
+                      <a:noFill/>
                     </a:lnT>
                     <a:lnB w="6350" cap="flat" cmpd="sng" algn="ctr">
                       <a:solidFill>
-                        <a:srgbClr val="2A5553"/>
+                        <a:srgbClr val="D2D2D7"/>
                       </a:solidFill>
                       <a:prstDash val="solid"/>
                       <a:round/>
                       <a:headEnd type="none" w="med" len="med"/>
                       <a:tailEnd type="none" w="med" len="med"/>
                     </a:lnB>
-                    <a:solidFill>
-                      <a:srgbClr val="173B3A"/>
-                    </a:solidFill>
                   </a:tcPr>
                 </a:tc>
                 <a:tc>
@@ -6368,67 +6130,46 @@
                         <a:buNone/>
                       </a:pPr>
                       <a:r>
-                        <a:rPr lang="en-US" sz="1050" dirty="0">
+                        <a:rPr lang="en-US" sz="1000" dirty="0">
                           <a:solidFill>
-                            <a:srgbClr val="B7D3CE"/>
+                            <a:srgbClr val="6E6E73"/>
                           </a:solidFill>
-                          <a:latin typeface="Calibri" pitchFamily="34" charset="0"/>
-                          <a:ea typeface="Calibri" pitchFamily="34" charset="-122"/>
-                          <a:cs typeface="Calibri" pitchFamily="34" charset="-120"/>
+                          <a:latin typeface="Helvetica Neue" pitchFamily="34" charset="0"/>
+                          <a:ea typeface="Helvetica Neue" pitchFamily="34" charset="-122"/>
+                          <a:cs typeface="Helvetica Neue" pitchFamily="34" charset="-120"/>
                         </a:rPr>
                         <a:t>Cluster map; curves by group</a:t>
                       </a:r>
-                      <a:endParaRPr lang="en-US" sz="1050" dirty="0">
-                        <a:latin typeface="Calibri" charset="0"/>
-                        <a:ea typeface="Calibri" charset="0"/>
-                        <a:cs typeface="Calibri" charset="0"/>
+                      <a:endParaRPr lang="en-US" sz="1000" dirty="0">
+                        <a:latin typeface="Helvetica Neue" charset="0"/>
+                        <a:ea typeface="Helvetica Neue" charset="0"/>
+                        <a:cs typeface="Helvetica Neue" charset="0"/>
                       </a:endParaRPr>
                     </a:p>
                   </a:txBody>
                   <a:tcPr marL="5486400" marR="5486400" marT="0" marB="0" anchor="ctr">
-                    <a:lnL w="6350" cap="flat" cmpd="sng" algn="ctr">
-                      <a:solidFill>
-                        <a:srgbClr val="2A5553"/>
-                      </a:solidFill>
-                      <a:prstDash val="solid"/>
-                      <a:round/>
-                      <a:headEnd type="none" w="med" len="med"/>
-                      <a:tailEnd type="none" w="med" len="med"/>
+                    <a:lnL w="0" cap="flat" cmpd="sng" algn="ctr">
+                      <a:noFill/>
                     </a:lnL>
-                    <a:lnR w="6350" cap="flat" cmpd="sng" algn="ctr">
-                      <a:solidFill>
-                        <a:srgbClr val="2A5553"/>
-                      </a:solidFill>
-                      <a:prstDash val="solid"/>
-                      <a:round/>
-                      <a:headEnd type="none" w="med" len="med"/>
-                      <a:tailEnd type="none" w="med" len="med"/>
+                    <a:lnR w="0" cap="flat" cmpd="sng" algn="ctr">
+                      <a:noFill/>
                     </a:lnR>
-                    <a:lnT w="6350" cap="flat" cmpd="sng" algn="ctr">
-                      <a:solidFill>
-                        <a:srgbClr val="2A5553"/>
-                      </a:solidFill>
-                      <a:prstDash val="solid"/>
-                      <a:round/>
-                      <a:headEnd type="none" w="med" len="med"/>
-                      <a:tailEnd type="none" w="med" len="med"/>
+                    <a:lnT w="0" cap="flat" cmpd="sng" algn="ctr">
+                      <a:noFill/>
                     </a:lnT>
                     <a:lnB w="6350" cap="flat" cmpd="sng" algn="ctr">
                       <a:solidFill>
-                        <a:srgbClr val="2A5553"/>
+                        <a:srgbClr val="D2D2D7"/>
                       </a:solidFill>
                       <a:prstDash val="solid"/>
                       <a:round/>
                       <a:headEnd type="none" w="med" len="med"/>
                       <a:tailEnd type="none" w="med" len="med"/>
                     </a:lnB>
-                    <a:solidFill>
-                      <a:srgbClr val="173B3A"/>
-                    </a:solidFill>
                   </a:tcPr>
                 </a:tc>
               </a:tr>
-              <a:tr h="457200">
+              <a:tr h="438912">
                 <a:tc>
                   <a:txBody>
                     <a:bodyPr/>
@@ -6438,63 +6179,36 @@
                         <a:buNone/>
                       </a:pPr>
                       <a:r>
-                        <a:rPr lang="en-US" sz="1050" b="1" dirty="0">
+                        <a:rPr lang="en-US" sz="1000" b="1" dirty="0">
                           <a:solidFill>
-                            <a:srgbClr val="FF6B4A"/>
+                            <a:srgbClr val="1D1D1F"/>
                           </a:solidFill>
-                          <a:latin typeface="Calibri" pitchFamily="34" charset="0"/>
-                          <a:ea typeface="Calibri" pitchFamily="34" charset="-122"/>
-                          <a:cs typeface="Calibri" pitchFamily="34" charset="-120"/>
+                          <a:latin typeface="Helvetica Neue" pitchFamily="34" charset="0"/>
+                          <a:ea typeface="Helvetica Neue" pitchFamily="34" charset="-122"/>
+                          <a:cs typeface="Helvetica Neue" pitchFamily="34" charset="-120"/>
                         </a:rPr>
-                        <a:t>[ name ]</a:t>
+                        <a:t>Musa Tabally</a:t>
                       </a:r>
-                      <a:endParaRPr lang="en-US" sz="1050" dirty="0">
-                        <a:latin typeface="Calibri" charset="0"/>
-                        <a:ea typeface="Calibri" charset="0"/>
-                        <a:cs typeface="Calibri" charset="0"/>
+                      <a:endParaRPr lang="en-US" sz="1000" dirty="0">
+                        <a:latin typeface="Helvetica Neue" charset="0"/>
+                        <a:ea typeface="Helvetica Neue" charset="0"/>
+                        <a:cs typeface="Helvetica Neue" charset="0"/>
                       </a:endParaRPr>
                     </a:p>
                   </a:txBody>
                   <a:tcPr marL="5486400" marR="5486400" marT="0" marB="0" anchor="ctr">
-                    <a:lnL w="6350" cap="flat" cmpd="sng" algn="ctr">
-                      <a:solidFill>
-                        <a:srgbClr val="2A5553"/>
-                      </a:solidFill>
-                      <a:prstDash val="solid"/>
-                      <a:round/>
-                      <a:headEnd type="none" w="med" len="med"/>
-                      <a:tailEnd type="none" w="med" len="med"/>
+                    <a:lnL w="0" cap="flat" cmpd="sng" algn="ctr">
+                      <a:noFill/>
                     </a:lnL>
-                    <a:lnR w="6350" cap="flat" cmpd="sng" algn="ctr">
-                      <a:solidFill>
-                        <a:srgbClr val="2A5553"/>
-                      </a:solidFill>
-                      <a:prstDash val="solid"/>
-                      <a:round/>
-                      <a:headEnd type="none" w="med" len="med"/>
-                      <a:tailEnd type="none" w="med" len="med"/>
+                    <a:lnR w="0" cap="flat" cmpd="sng" algn="ctr">
+                      <a:noFill/>
                     </a:lnR>
-                    <a:lnT w="6350" cap="flat" cmpd="sng" algn="ctr">
-                      <a:solidFill>
-                        <a:srgbClr val="2A5553"/>
-                      </a:solidFill>
-                      <a:prstDash val="solid"/>
-                      <a:round/>
-                      <a:headEnd type="none" w="med" len="med"/>
-                      <a:tailEnd type="none" w="med" len="med"/>
+                    <a:lnT w="0" cap="flat" cmpd="sng" algn="ctr">
+                      <a:noFill/>
                     </a:lnT>
-                    <a:lnB w="6350" cap="flat" cmpd="sng" algn="ctr">
-                      <a:solidFill>
-                        <a:srgbClr val="2A5553"/>
-                      </a:solidFill>
-                      <a:prstDash val="solid"/>
-                      <a:round/>
-                      <a:headEnd type="none" w="med" len="med"/>
-                      <a:tailEnd type="none" w="med" len="med"/>
+                    <a:lnB w="0" cap="flat" cmpd="sng" algn="ctr">
+                      <a:noFill/>
                     </a:lnB>
-                    <a:solidFill>
-                      <a:srgbClr val="173B3A"/>
-                    </a:solidFill>
                   </a:tcPr>
                 </a:tc>
                 <a:tc>
@@ -6506,63 +6220,36 @@
                         <a:buNone/>
                       </a:pPr>
                       <a:r>
-                        <a:rPr lang="en-US" sz="1050" dirty="0">
+                        <a:rPr lang="en-US" sz="1000" dirty="0">
                           <a:solidFill>
-                            <a:srgbClr val="FFFFFF"/>
+                            <a:srgbClr val="1D1D1F"/>
                           </a:solidFill>
-                          <a:latin typeface="Calibri" pitchFamily="34" charset="0"/>
-                          <a:ea typeface="Calibri" pitchFamily="34" charset="-122"/>
-                          <a:cs typeface="Calibri" pitchFamily="34" charset="-120"/>
+                          <a:latin typeface="Helvetica Neue" pitchFamily="34" charset="0"/>
+                          <a:ea typeface="Helvetica Neue" pitchFamily="34" charset="-122"/>
+                          <a:cs typeface="Helvetica Neue" pitchFamily="34" charset="-120"/>
                         </a:rPr>
                         <a:t>Statistical test: expected vs. actual</a:t>
                       </a:r>
-                      <a:endParaRPr lang="en-US" sz="1050" dirty="0">
-                        <a:latin typeface="Calibri" charset="0"/>
-                        <a:ea typeface="Calibri" charset="0"/>
-                        <a:cs typeface="Calibri" charset="0"/>
+                      <a:endParaRPr lang="en-US" sz="1000" dirty="0">
+                        <a:latin typeface="Helvetica Neue" charset="0"/>
+                        <a:ea typeface="Helvetica Neue" charset="0"/>
+                        <a:cs typeface="Helvetica Neue" charset="0"/>
                       </a:endParaRPr>
                     </a:p>
                   </a:txBody>
                   <a:tcPr marL="5486400" marR="5486400" marT="0" marB="0" anchor="ctr">
-                    <a:lnL w="6350" cap="flat" cmpd="sng" algn="ctr">
-                      <a:solidFill>
-                        <a:srgbClr val="2A5553"/>
-                      </a:solidFill>
-                      <a:prstDash val="solid"/>
-                      <a:round/>
-                      <a:headEnd type="none" w="med" len="med"/>
-                      <a:tailEnd type="none" w="med" len="med"/>
+                    <a:lnL w="0" cap="flat" cmpd="sng" algn="ctr">
+                      <a:noFill/>
                     </a:lnL>
-                    <a:lnR w="6350" cap="flat" cmpd="sng" algn="ctr">
-                      <a:solidFill>
-                        <a:srgbClr val="2A5553"/>
-                      </a:solidFill>
-                      <a:prstDash val="solid"/>
-                      <a:round/>
-                      <a:headEnd type="none" w="med" len="med"/>
-                      <a:tailEnd type="none" w="med" len="med"/>
+                    <a:lnR w="0" cap="flat" cmpd="sng" algn="ctr">
+                      <a:noFill/>
                     </a:lnR>
-                    <a:lnT w="6350" cap="flat" cmpd="sng" algn="ctr">
-                      <a:solidFill>
-                        <a:srgbClr val="2A5553"/>
-                      </a:solidFill>
-                      <a:prstDash val="solid"/>
-                      <a:round/>
-                      <a:headEnd type="none" w="med" len="med"/>
-                      <a:tailEnd type="none" w="med" len="med"/>
+                    <a:lnT w="0" cap="flat" cmpd="sng" algn="ctr">
+                      <a:noFill/>
                     </a:lnT>
-                    <a:lnB w="6350" cap="flat" cmpd="sng" algn="ctr">
-                      <a:solidFill>
-                        <a:srgbClr val="2A5553"/>
-                      </a:solidFill>
-                      <a:prstDash val="solid"/>
-                      <a:round/>
-                      <a:headEnd type="none" w="med" len="med"/>
-                      <a:tailEnd type="none" w="med" len="med"/>
+                    <a:lnB w="0" cap="flat" cmpd="sng" algn="ctr">
+                      <a:noFill/>
                     </a:lnB>
-                    <a:solidFill>
-                      <a:srgbClr val="173B3A"/>
-                    </a:solidFill>
                   </a:tcPr>
                 </a:tc>
                 <a:tc>
@@ -6574,63 +6261,36 @@
                         <a:buNone/>
                       </a:pPr>
                       <a:r>
-                        <a:rPr lang="en-US" sz="1050" dirty="0">
+                        <a:rPr lang="en-US" sz="1000" dirty="0">
                           <a:solidFill>
-                            <a:srgbClr val="B7D3CE"/>
+                            <a:srgbClr val="6E6E73"/>
                           </a:solidFill>
-                          <a:latin typeface="Calibri" pitchFamily="34" charset="0"/>
-                          <a:ea typeface="Calibri" pitchFamily="34" charset="-122"/>
-                          <a:cs typeface="Calibri" pitchFamily="34" charset="-120"/>
+                          <a:latin typeface="Helvetica Neue" pitchFamily="34" charset="0"/>
+                          <a:ea typeface="Helvetica Neue" pitchFamily="34" charset="-122"/>
+                          <a:cs typeface="Helvetica Neue" pitchFamily="34" charset="-120"/>
                         </a:rPr>
                         <a:t>Gap over time; heatmap by month</a:t>
                       </a:r>
-                      <a:endParaRPr lang="en-US" sz="1050" dirty="0">
-                        <a:latin typeface="Calibri" charset="0"/>
-                        <a:ea typeface="Calibri" charset="0"/>
-                        <a:cs typeface="Calibri" charset="0"/>
+                      <a:endParaRPr lang="en-US" sz="1000" dirty="0">
+                        <a:latin typeface="Helvetica Neue" charset="0"/>
+                        <a:ea typeface="Helvetica Neue" charset="0"/>
+                        <a:cs typeface="Helvetica Neue" charset="0"/>
                       </a:endParaRPr>
                     </a:p>
                   </a:txBody>
                   <a:tcPr marL="5486400" marR="5486400" marT="0" marB="0" anchor="ctr">
-                    <a:lnL w="6350" cap="flat" cmpd="sng" algn="ctr">
-                      <a:solidFill>
-                        <a:srgbClr val="2A5553"/>
-                      </a:solidFill>
-                      <a:prstDash val="solid"/>
-                      <a:round/>
-                      <a:headEnd type="none" w="med" len="med"/>
-                      <a:tailEnd type="none" w="med" len="med"/>
+                    <a:lnL w="0" cap="flat" cmpd="sng" algn="ctr">
+                      <a:noFill/>
                     </a:lnL>
-                    <a:lnR w="6350" cap="flat" cmpd="sng" algn="ctr">
-                      <a:solidFill>
-                        <a:srgbClr val="2A5553"/>
-                      </a:solidFill>
-                      <a:prstDash val="solid"/>
-                      <a:round/>
-                      <a:headEnd type="none" w="med" len="med"/>
-                      <a:tailEnd type="none" w="med" len="med"/>
+                    <a:lnR w="0" cap="flat" cmpd="sng" algn="ctr">
+                      <a:noFill/>
                     </a:lnR>
-                    <a:lnT w="6350" cap="flat" cmpd="sng" algn="ctr">
-                      <a:solidFill>
-                        <a:srgbClr val="2A5553"/>
-                      </a:solidFill>
-                      <a:prstDash val="solid"/>
-                      <a:round/>
-                      <a:headEnd type="none" w="med" len="med"/>
-                      <a:tailEnd type="none" w="med" len="med"/>
+                    <a:lnT w="0" cap="flat" cmpd="sng" algn="ctr">
+                      <a:noFill/>
                     </a:lnT>
-                    <a:lnB w="6350" cap="flat" cmpd="sng" algn="ctr">
-                      <a:solidFill>
-                        <a:srgbClr val="2A5553"/>
-                      </a:solidFill>
-                      <a:prstDash val="solid"/>
-                      <a:round/>
-                      <a:headEnd type="none" w="med" len="med"/>
-                      <a:tailEnd type="none" w="med" len="med"/>
+                    <a:lnB w="0" cap="flat" cmpd="sng" algn="ctr">
+                      <a:noFill/>
                     </a:lnB>
-                    <a:solidFill>
-                      <a:srgbClr val="173B3A"/>
-                    </a:solidFill>
                   </a:tcPr>
                 </a:tc>
               </a:tr>
@@ -6646,8 +6306,8 @@
         </p:nvSpPr>
         <p:spPr>
           <a:xfrm>
-            <a:off x="4069080" y="4297680"/>
-            <a:ext cx="4389120" cy="274320"/>
+            <a:off x="4114800" y="4315968"/>
+            <a:ext cx="4297680" cy="228600"/>
           </a:xfrm>
           <a:prstGeom prst="rect">
             <a:avLst/>
@@ -6663,17 +6323,17 @@
               <a:buNone/>
             </a:pPr>
             <a:r>
-              <a:rPr lang="en-US" sz="1050" i="1" dirty="0">
-                <a:solidFill>
-                  <a:srgbClr val="B7D3CE"/>
-                </a:solidFill>
-                <a:latin typeface="Calibri" pitchFamily="34" charset="0"/>
-                <a:ea typeface="Calibri" pitchFamily="34" charset="-122"/>
-                <a:cs typeface="Calibri" pitchFamily="34" charset="-120"/>
+              <a:rPr lang="en-US" sz="950" dirty="0">
+                <a:solidFill>
+                  <a:srgbClr val="6E6E73"/>
+                </a:solidFill>
+                <a:latin typeface="Helvetica Neue" pitchFamily="34" charset="0"/>
+                <a:ea typeface="Helvetica Neue" pitchFamily="34" charset="-122"/>
+                <a:cs typeface="Helvetica Neue" pitchFamily="34" charset="-120"/>
               </a:rPr>
               <a:t>Each member: 1 analysis + 2 visuals. Team extra: the interactive page.</a:t>
             </a:r>
-            <a:endParaRPr lang="en-US" sz="1050" dirty="0"/>
+            <a:endParaRPr lang="en-US" sz="950" dirty="0"/>
           </a:p>
         </p:txBody>
       </p:sp>

--- a/proposal.pptx
+++ b/proposal.pptx
@@ -5427,886 +5427,832 @@
           </a:ln>
         </p:spPr>
       </p:sp>
-      <p:graphicFrame>
-        <p:nvGraphicFramePr>
-          <p:cNvPr id="6" name="Table 0"/>
-          <p:cNvGraphicFramePr>
-            <a:graphicFrameLocks noGrp="1"/>
-          </p:cNvGraphicFramePr>
-          <p:nvPr>
-            <p:extLst>
-              <p:ext uri="{D42A27DB-BD31-4B8C-83A1-F6EECF244321}">
-                <p14:modId xmlns:p14="http://schemas.microsoft.com/office/powerpoint/2010/main" val="1579011935"/>
-              </p:ext>
-            </p:extLst>
-          </p:nvPr>
-        </p:nvGraphicFramePr>
-        <p:xfrm>
-          <a:off x="4023360" y="1481328"/>
-          <a:ext cx="4389120" cy="914400"/>
-        </p:xfrm>
-        <a:graphic>
-          <a:graphicData uri="http://schemas.openxmlformats.org/drawingml/2006/table">
-            <a:tbl>
-              <a:tblPr/>
-              <a:tblGrid>
-                <a:gridCol w="1005840"/>
-                <a:gridCol w="1783080"/>
-                <a:gridCol w="1600200"/>
-              </a:tblGrid>
-              <a:tr h="438912">
-                <a:tc>
-                  <a:txBody>
-                    <a:bodyPr/>
-                    <a:lstStyle/>
-                    <a:p>
-                      <a:pPr indent="0" marL="0">
-                        <a:buNone/>
-                      </a:pPr>
-                      <a:r>
-                        <a:rPr lang="en-US" sz="950" dirty="0">
-                          <a:solidFill>
-                            <a:srgbClr val="6E6E73"/>
-                          </a:solidFill>
-                          <a:latin typeface="Helvetica Neue" pitchFamily="34" charset="0"/>
-                          <a:ea typeface="Helvetica Neue" pitchFamily="34" charset="-122"/>
-                          <a:cs typeface="Helvetica Neue" pitchFamily="34" charset="-120"/>
-                        </a:rPr>
-                        <a:t>Owner</a:t>
-                      </a:r>
-                      <a:endParaRPr lang="en-US" sz="950" dirty="0">
-                        <a:latin typeface="Helvetica Neue" charset="0"/>
-                        <a:ea typeface="Helvetica Neue" charset="0"/>
-                        <a:cs typeface="Helvetica Neue" charset="0"/>
-                      </a:endParaRPr>
-                    </a:p>
-                  </a:txBody>
-                  <a:tcPr marL="5486400" marR="5486400" marT="0" marB="0" anchor="ctr">
-                    <a:lnL w="0" cap="flat" cmpd="sng" algn="ctr">
-                      <a:noFill/>
-                    </a:lnL>
-                    <a:lnR w="0" cap="flat" cmpd="sng" algn="ctr">
-                      <a:noFill/>
-                    </a:lnR>
-                    <a:lnT w="0" cap="flat" cmpd="sng" algn="ctr">
-                      <a:noFill/>
-                    </a:lnT>
-                    <a:lnB w="6350" cap="flat" cmpd="sng" algn="ctr">
-                      <a:solidFill>
-                        <a:srgbClr val="D2D2D7"/>
-                      </a:solidFill>
-                      <a:prstDash val="solid"/>
-                      <a:round/>
-                      <a:headEnd type="none" w="med" len="med"/>
-                      <a:tailEnd type="none" w="med" len="med"/>
-                    </a:lnB>
-                  </a:tcPr>
-                </a:tc>
-                <a:tc>
-                  <a:txBody>
-                    <a:bodyPr/>
-                    <a:lstStyle/>
-                    <a:p>
-                      <a:pPr indent="0" marL="0">
-                        <a:buNone/>
-                      </a:pPr>
-                      <a:r>
-                        <a:rPr lang="en-US" sz="950" dirty="0">
-                          <a:solidFill>
-                            <a:srgbClr val="6E6E73"/>
-                          </a:solidFill>
-                          <a:latin typeface="Helvetica Neue" pitchFamily="34" charset="0"/>
-                          <a:ea typeface="Helvetica Neue" pitchFamily="34" charset="-122"/>
-                          <a:cs typeface="Helvetica Neue" pitchFamily="34" charset="-120"/>
-                        </a:rPr>
-                        <a:t>Analysis</a:t>
-                      </a:r>
-                      <a:endParaRPr lang="en-US" sz="950" dirty="0">
-                        <a:latin typeface="Helvetica Neue" charset="0"/>
-                        <a:ea typeface="Helvetica Neue" charset="0"/>
-                        <a:cs typeface="Helvetica Neue" charset="0"/>
-                      </a:endParaRPr>
-                    </a:p>
-                  </a:txBody>
-                  <a:tcPr marL="5486400" marR="5486400" marT="0" marB="0" anchor="ctr">
-                    <a:lnL w="0" cap="flat" cmpd="sng" algn="ctr">
-                      <a:noFill/>
-                    </a:lnL>
-                    <a:lnR w="0" cap="flat" cmpd="sng" algn="ctr">
-                      <a:noFill/>
-                    </a:lnR>
-                    <a:lnT w="0" cap="flat" cmpd="sng" algn="ctr">
-                      <a:noFill/>
-                    </a:lnT>
-                    <a:lnB w="6350" cap="flat" cmpd="sng" algn="ctr">
-                      <a:solidFill>
-                        <a:srgbClr val="D2D2D7"/>
-                      </a:solidFill>
-                      <a:prstDash val="solid"/>
-                      <a:round/>
-                      <a:headEnd type="none" w="med" len="med"/>
-                      <a:tailEnd type="none" w="med" len="med"/>
-                    </a:lnB>
-                  </a:tcPr>
-                </a:tc>
-                <a:tc>
-                  <a:txBody>
-                    <a:bodyPr/>
-                    <a:lstStyle/>
-                    <a:p>
-                      <a:pPr indent="0" marL="0">
-                        <a:buNone/>
-                      </a:pPr>
-                      <a:r>
-                        <a:rPr lang="en-US" sz="950" dirty="0">
-                          <a:solidFill>
-                            <a:srgbClr val="6E6E73"/>
-                          </a:solidFill>
-                          <a:latin typeface="Helvetica Neue" pitchFamily="34" charset="0"/>
-                          <a:ea typeface="Helvetica Neue" pitchFamily="34" charset="-122"/>
-                          <a:cs typeface="Helvetica Neue" pitchFamily="34" charset="-120"/>
-                        </a:rPr>
-                        <a:t>Two visuals</a:t>
-                      </a:r>
-                      <a:endParaRPr lang="en-US" sz="950" dirty="0">
-                        <a:latin typeface="Helvetica Neue" charset="0"/>
-                        <a:ea typeface="Helvetica Neue" charset="0"/>
-                        <a:cs typeface="Helvetica Neue" charset="0"/>
-                      </a:endParaRPr>
-                    </a:p>
-                  </a:txBody>
-                  <a:tcPr marL="5486400" marR="5486400" marT="0" marB="0" anchor="ctr">
-                    <a:lnL w="0" cap="flat" cmpd="sng" algn="ctr">
-                      <a:noFill/>
-                    </a:lnL>
-                    <a:lnR w="0" cap="flat" cmpd="sng" algn="ctr">
-                      <a:noFill/>
-                    </a:lnR>
-                    <a:lnT w="0" cap="flat" cmpd="sng" algn="ctr">
-                      <a:noFill/>
-                    </a:lnT>
-                    <a:lnB w="6350" cap="flat" cmpd="sng" algn="ctr">
-                      <a:solidFill>
-                        <a:srgbClr val="D2D2D7"/>
-                      </a:solidFill>
-                      <a:prstDash val="solid"/>
-                      <a:round/>
-                      <a:headEnd type="none" w="med" len="med"/>
-                      <a:tailEnd type="none" w="med" len="med"/>
-                    </a:lnB>
-                  </a:tcPr>
-                </a:tc>
-              </a:tr>
-              <a:tr h="438912">
-                <a:tc>
-                  <a:txBody>
-                    <a:bodyPr/>
-                    <a:lstStyle/>
-                    <a:p>
-                      <a:pPr indent="0" marL="0">
-                        <a:buNone/>
-                      </a:pPr>
-                      <a:r>
-                        <a:rPr lang="en-US" sz="1000" b="1" dirty="0">
-                          <a:solidFill>
-                            <a:srgbClr val="1D1D1F"/>
-                          </a:solidFill>
-                          <a:latin typeface="Helvetica Neue" pitchFamily="34" charset="0"/>
-                          <a:ea typeface="Helvetica Neue" pitchFamily="34" charset="-122"/>
-                          <a:cs typeface="Helvetica Neue" pitchFamily="34" charset="-120"/>
-                        </a:rPr>
-                        <a:t>Kaled Dahleh</a:t>
-                      </a:r>
-                      <a:endParaRPr lang="en-US" sz="1000" dirty="0">
-                        <a:latin typeface="Helvetica Neue" charset="0"/>
-                        <a:ea typeface="Helvetica Neue" charset="0"/>
-                        <a:cs typeface="Helvetica Neue" charset="0"/>
-                      </a:endParaRPr>
-                    </a:p>
-                  </a:txBody>
-                  <a:tcPr marL="5486400" marR="5486400" marT="0" marB="0" anchor="ctr">
-                    <a:lnL w="0" cap="flat" cmpd="sng" algn="ctr">
-                      <a:noFill/>
-                    </a:lnL>
-                    <a:lnR w="0" cap="flat" cmpd="sng" algn="ctr">
-                      <a:noFill/>
-                    </a:lnR>
-                    <a:lnT w="0" cap="flat" cmpd="sng" algn="ctr">
-                      <a:noFill/>
-                    </a:lnT>
-                    <a:lnB w="6350" cap="flat" cmpd="sng" algn="ctr">
-                      <a:solidFill>
-                        <a:srgbClr val="D2D2D7"/>
-                      </a:solidFill>
-                      <a:prstDash val="solid"/>
-                      <a:round/>
-                      <a:headEnd type="none" w="med" len="med"/>
-                      <a:tailEnd type="none" w="med" len="med"/>
-                    </a:lnB>
-                  </a:tcPr>
-                </a:tc>
-                <a:tc>
-                  <a:txBody>
-                    <a:bodyPr/>
-                    <a:lstStyle/>
-                    <a:p>
-                      <a:pPr indent="0" marL="0">
-                        <a:buNone/>
-                      </a:pPr>
-                      <a:r>
-                        <a:rPr lang="en-US" sz="1000" dirty="0">
-                          <a:solidFill>
-                            <a:srgbClr val="1D1D1F"/>
-                          </a:solidFill>
-                          <a:latin typeface="Helvetica Neue" pitchFamily="34" charset="0"/>
-                          <a:ea typeface="Helvetica Neue" pitchFamily="34" charset="-122"/>
-                          <a:cs typeface="Helvetica Neue" pitchFamily="34" charset="-120"/>
-                        </a:rPr>
-                        <a:t>Curve fit: expected move vs. strike price</a:t>
-                      </a:r>
-                      <a:endParaRPr lang="en-US" sz="1000" dirty="0">
-                        <a:latin typeface="Helvetica Neue" charset="0"/>
-                        <a:ea typeface="Helvetica Neue" charset="0"/>
-                        <a:cs typeface="Helvetica Neue" charset="0"/>
-                      </a:endParaRPr>
-                    </a:p>
-                  </a:txBody>
-                  <a:tcPr marL="5486400" marR="5486400" marT="0" marB="0" anchor="ctr">
-                    <a:lnL w="0" cap="flat" cmpd="sng" algn="ctr">
-                      <a:noFill/>
-                    </a:lnL>
-                    <a:lnR w="0" cap="flat" cmpd="sng" algn="ctr">
-                      <a:noFill/>
-                    </a:lnR>
-                    <a:lnT w="0" cap="flat" cmpd="sng" algn="ctr">
-                      <a:noFill/>
-                    </a:lnT>
-                    <a:lnB w="6350" cap="flat" cmpd="sng" algn="ctr">
-                      <a:solidFill>
-                        <a:srgbClr val="D2D2D7"/>
-                      </a:solidFill>
-                      <a:prstDash val="solid"/>
-                      <a:round/>
-                      <a:headEnd type="none" w="med" len="med"/>
-                      <a:tailEnd type="none" w="med" len="med"/>
-                    </a:lnB>
-                  </a:tcPr>
-                </a:tc>
-                <a:tc>
-                  <a:txBody>
-                    <a:bodyPr/>
-                    <a:lstStyle/>
-                    <a:p>
-                      <a:pPr indent="0" marL="0">
-                        <a:buNone/>
-                      </a:pPr>
-                      <a:r>
-                        <a:rPr lang="en-US" sz="1000" dirty="0">
-                          <a:solidFill>
-                            <a:srgbClr val="6E6E73"/>
-                          </a:solidFill>
-                          <a:latin typeface="Helvetica Neue" pitchFamily="34" charset="0"/>
-                          <a:ea typeface="Helvetica Neue" pitchFamily="34" charset="-122"/>
-                          <a:cs typeface="Helvetica Neue" pitchFamily="34" charset="-120"/>
-                        </a:rPr>
-                        <a:t>Curve chart; fit vs. actual</a:t>
-                      </a:r>
-                      <a:endParaRPr lang="en-US" sz="1000" dirty="0">
-                        <a:latin typeface="Helvetica Neue" charset="0"/>
-                        <a:ea typeface="Helvetica Neue" charset="0"/>
-                        <a:cs typeface="Helvetica Neue" charset="0"/>
-                      </a:endParaRPr>
-                    </a:p>
-                  </a:txBody>
-                  <a:tcPr marL="5486400" marR="5486400" marT="0" marB="0" anchor="ctr">
-                    <a:lnL w="0" cap="flat" cmpd="sng" algn="ctr">
-                      <a:noFill/>
-                    </a:lnL>
-                    <a:lnR w="0" cap="flat" cmpd="sng" algn="ctr">
-                      <a:noFill/>
-                    </a:lnR>
-                    <a:lnT w="0" cap="flat" cmpd="sng" algn="ctr">
-                      <a:noFill/>
-                    </a:lnT>
-                    <a:lnB w="6350" cap="flat" cmpd="sng" algn="ctr">
-                      <a:solidFill>
-                        <a:srgbClr val="D2D2D7"/>
-                      </a:solidFill>
-                      <a:prstDash val="solid"/>
-                      <a:round/>
-                      <a:headEnd type="none" w="med" len="med"/>
-                      <a:tailEnd type="none" w="med" len="med"/>
-                    </a:lnB>
-                  </a:tcPr>
-                </a:tc>
-              </a:tr>
-              <a:tr h="438912">
-                <a:tc>
-                  <a:txBody>
-                    <a:bodyPr/>
-                    <a:lstStyle/>
-                    <a:p>
-                      <a:pPr indent="0" marL="0">
-                        <a:buNone/>
-                      </a:pPr>
-                      <a:r>
-                        <a:rPr lang="en-US" sz="1000" b="1" dirty="0">
-                          <a:solidFill>
-                            <a:srgbClr val="1D1D1F"/>
-                          </a:solidFill>
-                          <a:latin typeface="Helvetica Neue" pitchFamily="34" charset="0"/>
-                          <a:ea typeface="Helvetica Neue" pitchFamily="34" charset="-122"/>
-                          <a:cs typeface="Helvetica Neue" pitchFamily="34" charset="-120"/>
-                        </a:rPr>
-                        <a:t>Anlil Iwas</a:t>
-                      </a:r>
-                      <a:endParaRPr lang="en-US" sz="1000" dirty="0">
-                        <a:latin typeface="Helvetica Neue" charset="0"/>
-                        <a:ea typeface="Helvetica Neue" charset="0"/>
-                        <a:cs typeface="Helvetica Neue" charset="0"/>
-                      </a:endParaRPr>
-                    </a:p>
-                  </a:txBody>
-                  <a:tcPr marL="5486400" marR="5486400" marT="0" marB="0" anchor="ctr">
-                    <a:lnL w="0" cap="flat" cmpd="sng" algn="ctr">
-                      <a:noFill/>
-                    </a:lnL>
-                    <a:lnR w="0" cap="flat" cmpd="sng" algn="ctr">
-                      <a:noFill/>
-                    </a:lnR>
-                    <a:lnT w="0" cap="flat" cmpd="sng" algn="ctr">
-                      <a:noFill/>
-                    </a:lnT>
-                    <a:lnB w="6350" cap="flat" cmpd="sng" algn="ctr">
-                      <a:solidFill>
-                        <a:srgbClr val="D2D2D7"/>
-                      </a:solidFill>
-                      <a:prstDash val="solid"/>
-                      <a:round/>
-                      <a:headEnd type="none" w="med" len="med"/>
-                      <a:tailEnd type="none" w="med" len="med"/>
-                    </a:lnB>
-                  </a:tcPr>
-                </a:tc>
-                <a:tc>
-                  <a:txBody>
-                    <a:bodyPr/>
-                    <a:lstStyle/>
-                    <a:p>
-                      <a:pPr indent="0" marL="0">
-                        <a:buNone/>
-                      </a:pPr>
-                      <a:r>
-                        <a:rPr lang="en-US" sz="1000" dirty="0">
-                          <a:solidFill>
-                            <a:srgbClr val="1D1D1F"/>
-                          </a:solidFill>
-                          <a:latin typeface="Helvetica Neue" pitchFamily="34" charset="0"/>
-                          <a:ea typeface="Helvetica Neue" pitchFamily="34" charset="-122"/>
-                          <a:cs typeface="Helvetica Neue" pitchFamily="34" charset="-120"/>
-                        </a:rPr>
-                        <a:t>Logistic regression: did traders guess too high?</a:t>
-                      </a:r>
-                      <a:endParaRPr lang="en-US" sz="1000" dirty="0">
-                        <a:latin typeface="Helvetica Neue" charset="0"/>
-                        <a:ea typeface="Helvetica Neue" charset="0"/>
-                        <a:cs typeface="Helvetica Neue" charset="0"/>
-                      </a:endParaRPr>
-                    </a:p>
-                  </a:txBody>
-                  <a:tcPr marL="5486400" marR="5486400" marT="0" marB="0" anchor="ctr">
-                    <a:lnL w="0" cap="flat" cmpd="sng" algn="ctr">
-                      <a:noFill/>
-                    </a:lnL>
-                    <a:lnR w="0" cap="flat" cmpd="sng" algn="ctr">
-                      <a:noFill/>
-                    </a:lnR>
-                    <a:lnT w="0" cap="flat" cmpd="sng" algn="ctr">
-                      <a:noFill/>
-                    </a:lnT>
-                    <a:lnB w="6350" cap="flat" cmpd="sng" algn="ctr">
-                      <a:solidFill>
-                        <a:srgbClr val="D2D2D7"/>
-                      </a:solidFill>
-                      <a:prstDash val="solid"/>
-                      <a:round/>
-                      <a:headEnd type="none" w="med" len="med"/>
-                      <a:tailEnd type="none" w="med" len="med"/>
-                    </a:lnB>
-                  </a:tcPr>
-                </a:tc>
-                <a:tc>
-                  <a:txBody>
-                    <a:bodyPr/>
-                    <a:lstStyle/>
-                    <a:p>
-                      <a:pPr indent="0" marL="0">
-                        <a:buNone/>
-                      </a:pPr>
-                      <a:r>
-                        <a:rPr lang="en-US" sz="1000" dirty="0">
-                          <a:solidFill>
-                            <a:srgbClr val="6E6E73"/>
-                          </a:solidFill>
-                          <a:latin typeface="Helvetica Neue" pitchFamily="34" charset="0"/>
-                          <a:ea typeface="Helvetica Neue" pitchFamily="34" charset="-122"/>
-                          <a:cs typeface="Helvetica Neue" pitchFamily="34" charset="-120"/>
-                        </a:rPr>
-                        <a:t>Expected vs. actual; accuracy by stock</a:t>
-                      </a:r>
-                      <a:endParaRPr lang="en-US" sz="1000" dirty="0">
-                        <a:latin typeface="Helvetica Neue" charset="0"/>
-                        <a:ea typeface="Helvetica Neue" charset="0"/>
-                        <a:cs typeface="Helvetica Neue" charset="0"/>
-                      </a:endParaRPr>
-                    </a:p>
-                  </a:txBody>
-                  <a:tcPr marL="5486400" marR="5486400" marT="0" marB="0" anchor="ctr">
-                    <a:lnL w="0" cap="flat" cmpd="sng" algn="ctr">
-                      <a:noFill/>
-                    </a:lnL>
-                    <a:lnR w="0" cap="flat" cmpd="sng" algn="ctr">
-                      <a:noFill/>
-                    </a:lnR>
-                    <a:lnT w="0" cap="flat" cmpd="sng" algn="ctr">
-                      <a:noFill/>
-                    </a:lnT>
-                    <a:lnB w="6350" cap="flat" cmpd="sng" algn="ctr">
-                      <a:solidFill>
-                        <a:srgbClr val="D2D2D7"/>
-                      </a:solidFill>
-                      <a:prstDash val="solid"/>
-                      <a:round/>
-                      <a:headEnd type="none" w="med" len="med"/>
-                      <a:tailEnd type="none" w="med" len="med"/>
-                    </a:lnB>
-                  </a:tcPr>
-                </a:tc>
-              </a:tr>
-              <a:tr h="438912">
-                <a:tc>
-                  <a:txBody>
-                    <a:bodyPr/>
-                    <a:lstStyle/>
-                    <a:p>
-                      <a:pPr indent="0" marL="0">
-                        <a:buNone/>
-                      </a:pPr>
-                      <a:r>
-                        <a:rPr lang="en-US" sz="1000" b="1" dirty="0">
-                          <a:solidFill>
-                            <a:srgbClr val="1D1D1F"/>
-                          </a:solidFill>
-                          <a:latin typeface="Helvetica Neue" pitchFamily="34" charset="0"/>
-                          <a:ea typeface="Helvetica Neue" pitchFamily="34" charset="-122"/>
-                          <a:cs typeface="Helvetica Neue" pitchFamily="34" charset="-120"/>
-                        </a:rPr>
-                        <a:t>Adi Latic</a:t>
-                      </a:r>
-                      <a:endParaRPr lang="en-US" sz="1000" dirty="0">
-                        <a:latin typeface="Helvetica Neue" charset="0"/>
-                        <a:ea typeface="Helvetica Neue" charset="0"/>
-                        <a:cs typeface="Helvetica Neue" charset="0"/>
-                      </a:endParaRPr>
-                    </a:p>
-                  </a:txBody>
-                  <a:tcPr marL="5486400" marR="5486400" marT="0" marB="0" anchor="ctr">
-                    <a:lnL w="0" cap="flat" cmpd="sng" algn="ctr">
-                      <a:noFill/>
-                    </a:lnL>
-                    <a:lnR w="0" cap="flat" cmpd="sng" algn="ctr">
-                      <a:noFill/>
-                    </a:lnR>
-                    <a:lnT w="0" cap="flat" cmpd="sng" algn="ctr">
-                      <a:noFill/>
-                    </a:lnT>
-                    <a:lnB w="6350" cap="flat" cmpd="sng" algn="ctr">
-                      <a:solidFill>
-                        <a:srgbClr val="D2D2D7"/>
-                      </a:solidFill>
-                      <a:prstDash val="solid"/>
-                      <a:round/>
-                      <a:headEnd type="none" w="med" len="med"/>
-                      <a:tailEnd type="none" w="med" len="med"/>
-                    </a:lnB>
-                  </a:tcPr>
-                </a:tc>
-                <a:tc>
-                  <a:txBody>
-                    <a:bodyPr/>
-                    <a:lstStyle/>
-                    <a:p>
-                      <a:pPr indent="0" marL="0">
-                        <a:buNone/>
-                      </a:pPr>
-                      <a:r>
-                        <a:rPr lang="en-US" sz="1000" dirty="0">
-                          <a:solidFill>
-                            <a:srgbClr val="1D1D1F"/>
-                          </a:solidFill>
-                          <a:latin typeface="Helvetica Neue" pitchFamily="34" charset="0"/>
-                          <a:ea typeface="Helvetica Neue" pitchFamily="34" charset="-122"/>
-                          <a:cs typeface="Helvetica Neue" pitchFamily="34" charset="-120"/>
-                        </a:rPr>
-                        <a:t>Random forest on the same question</a:t>
-                      </a:r>
-                      <a:endParaRPr lang="en-US" sz="1000" dirty="0">
-                        <a:latin typeface="Helvetica Neue" charset="0"/>
-                        <a:ea typeface="Helvetica Neue" charset="0"/>
-                        <a:cs typeface="Helvetica Neue" charset="0"/>
-                      </a:endParaRPr>
-                    </a:p>
-                  </a:txBody>
-                  <a:tcPr marL="5486400" marR="5486400" marT="0" marB="0" anchor="ctr">
-                    <a:lnL w="0" cap="flat" cmpd="sng" algn="ctr">
-                      <a:noFill/>
-                    </a:lnL>
-                    <a:lnR w="0" cap="flat" cmpd="sng" algn="ctr">
-                      <a:noFill/>
-                    </a:lnR>
-                    <a:lnT w="0" cap="flat" cmpd="sng" algn="ctr">
-                      <a:noFill/>
-                    </a:lnT>
-                    <a:lnB w="6350" cap="flat" cmpd="sng" algn="ctr">
-                      <a:solidFill>
-                        <a:srgbClr val="D2D2D7"/>
-                      </a:solidFill>
-                      <a:prstDash val="solid"/>
-                      <a:round/>
-                      <a:headEnd type="none" w="med" len="med"/>
-                      <a:tailEnd type="none" w="med" len="med"/>
-                    </a:lnB>
-                  </a:tcPr>
-                </a:tc>
-                <a:tc>
-                  <a:txBody>
-                    <a:bodyPr/>
-                    <a:lstStyle/>
-                    <a:p>
-                      <a:pPr indent="0" marL="0">
-                        <a:buNone/>
-                      </a:pPr>
-                      <a:r>
-                        <a:rPr lang="en-US" sz="1000" dirty="0">
-                          <a:solidFill>
-                            <a:srgbClr val="6E6E73"/>
-                          </a:solidFill>
-                          <a:latin typeface="Helvetica Neue" pitchFamily="34" charset="0"/>
-                          <a:ea typeface="Helvetica Neue" pitchFamily="34" charset="-122"/>
-                          <a:cs typeface="Helvetica Neue" pitchFamily="34" charset="-120"/>
-                        </a:rPr>
-                        <a:t>What drives the prediction; errors over time</a:t>
-                      </a:r>
-                      <a:endParaRPr lang="en-US" sz="1000" dirty="0">
-                        <a:latin typeface="Helvetica Neue" charset="0"/>
-                        <a:ea typeface="Helvetica Neue" charset="0"/>
-                        <a:cs typeface="Helvetica Neue" charset="0"/>
-                      </a:endParaRPr>
-                    </a:p>
-                  </a:txBody>
-                  <a:tcPr marL="5486400" marR="5486400" marT="0" marB="0" anchor="ctr">
-                    <a:lnL w="0" cap="flat" cmpd="sng" algn="ctr">
-                      <a:noFill/>
-                    </a:lnL>
-                    <a:lnR w="0" cap="flat" cmpd="sng" algn="ctr">
-                      <a:noFill/>
-                    </a:lnR>
-                    <a:lnT w="0" cap="flat" cmpd="sng" algn="ctr">
-                      <a:noFill/>
-                    </a:lnT>
-                    <a:lnB w="6350" cap="flat" cmpd="sng" algn="ctr">
-                      <a:solidFill>
-                        <a:srgbClr val="D2D2D7"/>
-                      </a:solidFill>
-                      <a:prstDash val="solid"/>
-                      <a:round/>
-                      <a:headEnd type="none" w="med" len="med"/>
-                      <a:tailEnd type="none" w="med" len="med"/>
-                    </a:lnB>
-                  </a:tcPr>
-                </a:tc>
-              </a:tr>
-              <a:tr h="438912">
-                <a:tc>
-                  <a:txBody>
-                    <a:bodyPr/>
-                    <a:lstStyle/>
-                    <a:p>
-                      <a:pPr indent="0" marL="0">
-                        <a:buNone/>
-                      </a:pPr>
-                      <a:r>
-                        <a:rPr lang="en-US" sz="1000" b="1" dirty="0">
-                          <a:solidFill>
-                            <a:srgbClr val="1D1D1F"/>
-                          </a:solidFill>
-                          <a:latin typeface="Helvetica Neue" pitchFamily="34" charset="0"/>
-                          <a:ea typeface="Helvetica Neue" pitchFamily="34" charset="-122"/>
-                          <a:cs typeface="Helvetica Neue" pitchFamily="34" charset="-120"/>
-                        </a:rPr>
-                        <a:t>Neo Uy</a:t>
-                      </a:r>
-                      <a:endParaRPr lang="en-US" sz="1000" dirty="0">
-                        <a:latin typeface="Helvetica Neue" charset="0"/>
-                        <a:ea typeface="Helvetica Neue" charset="0"/>
-                        <a:cs typeface="Helvetica Neue" charset="0"/>
-                      </a:endParaRPr>
-                    </a:p>
-                  </a:txBody>
-                  <a:tcPr marL="5486400" marR="5486400" marT="0" marB="0" anchor="ctr">
-                    <a:lnL w="0" cap="flat" cmpd="sng" algn="ctr">
-                      <a:noFill/>
-                    </a:lnL>
-                    <a:lnR w="0" cap="flat" cmpd="sng" algn="ctr">
-                      <a:noFill/>
-                    </a:lnR>
-                    <a:lnT w="0" cap="flat" cmpd="sng" algn="ctr">
-                      <a:noFill/>
-                    </a:lnT>
-                    <a:lnB w="6350" cap="flat" cmpd="sng" algn="ctr">
-                      <a:solidFill>
-                        <a:srgbClr val="D2D2D7"/>
-                      </a:solidFill>
-                      <a:prstDash val="solid"/>
-                      <a:round/>
-                      <a:headEnd type="none" w="med" len="med"/>
-                      <a:tailEnd type="none" w="med" len="med"/>
-                    </a:lnB>
-                  </a:tcPr>
-                </a:tc>
-                <a:tc>
-                  <a:txBody>
-                    <a:bodyPr/>
-                    <a:lstStyle/>
-                    <a:p>
-                      <a:pPr indent="0" marL="0">
-                        <a:buNone/>
-                      </a:pPr>
-                      <a:r>
-                        <a:rPr lang="en-US" sz="1000" dirty="0">
-                          <a:solidFill>
-                            <a:srgbClr val="1D1D1F"/>
-                          </a:solidFill>
-                          <a:latin typeface="Helvetica Neue" pitchFamily="34" charset="0"/>
-                          <a:ea typeface="Helvetica Neue" pitchFamily="34" charset="-122"/>
-                          <a:cs typeface="Helvetica Neue" pitchFamily="34" charset="-120"/>
-                        </a:rPr>
-                        <a:t>Clustering stocks by curve shape</a:t>
-                      </a:r>
-                      <a:endParaRPr lang="en-US" sz="1000" dirty="0">
-                        <a:latin typeface="Helvetica Neue" charset="0"/>
-                        <a:ea typeface="Helvetica Neue" charset="0"/>
-                        <a:cs typeface="Helvetica Neue" charset="0"/>
-                      </a:endParaRPr>
-                    </a:p>
-                  </a:txBody>
-                  <a:tcPr marL="5486400" marR="5486400" marT="0" marB="0" anchor="ctr">
-                    <a:lnL w="0" cap="flat" cmpd="sng" algn="ctr">
-                      <a:noFill/>
-                    </a:lnL>
-                    <a:lnR w="0" cap="flat" cmpd="sng" algn="ctr">
-                      <a:noFill/>
-                    </a:lnR>
-                    <a:lnT w="0" cap="flat" cmpd="sng" algn="ctr">
-                      <a:noFill/>
-                    </a:lnT>
-                    <a:lnB w="6350" cap="flat" cmpd="sng" algn="ctr">
-                      <a:solidFill>
-                        <a:srgbClr val="D2D2D7"/>
-                      </a:solidFill>
-                      <a:prstDash val="solid"/>
-                      <a:round/>
-                      <a:headEnd type="none" w="med" len="med"/>
-                      <a:tailEnd type="none" w="med" len="med"/>
-                    </a:lnB>
-                  </a:tcPr>
-                </a:tc>
-                <a:tc>
-                  <a:txBody>
-                    <a:bodyPr/>
-                    <a:lstStyle/>
-                    <a:p>
-                      <a:pPr indent="0" marL="0">
-                        <a:buNone/>
-                      </a:pPr>
-                      <a:r>
-                        <a:rPr lang="en-US" sz="1000" dirty="0">
-                          <a:solidFill>
-                            <a:srgbClr val="6E6E73"/>
-                          </a:solidFill>
-                          <a:latin typeface="Helvetica Neue" pitchFamily="34" charset="0"/>
-                          <a:ea typeface="Helvetica Neue" pitchFamily="34" charset="-122"/>
-                          <a:cs typeface="Helvetica Neue" pitchFamily="34" charset="-120"/>
-                        </a:rPr>
-                        <a:t>Cluster map; curves by group</a:t>
-                      </a:r>
-                      <a:endParaRPr lang="en-US" sz="1000" dirty="0">
-                        <a:latin typeface="Helvetica Neue" charset="0"/>
-                        <a:ea typeface="Helvetica Neue" charset="0"/>
-                        <a:cs typeface="Helvetica Neue" charset="0"/>
-                      </a:endParaRPr>
-                    </a:p>
-                  </a:txBody>
-                  <a:tcPr marL="5486400" marR="5486400" marT="0" marB="0" anchor="ctr">
-                    <a:lnL w="0" cap="flat" cmpd="sng" algn="ctr">
-                      <a:noFill/>
-                    </a:lnL>
-                    <a:lnR w="0" cap="flat" cmpd="sng" algn="ctr">
-                      <a:noFill/>
-                    </a:lnR>
-                    <a:lnT w="0" cap="flat" cmpd="sng" algn="ctr">
-                      <a:noFill/>
-                    </a:lnT>
-                    <a:lnB w="6350" cap="flat" cmpd="sng" algn="ctr">
-                      <a:solidFill>
-                        <a:srgbClr val="D2D2D7"/>
-                      </a:solidFill>
-                      <a:prstDash val="solid"/>
-                      <a:round/>
-                      <a:headEnd type="none" w="med" len="med"/>
-                      <a:tailEnd type="none" w="med" len="med"/>
-                    </a:lnB>
-                  </a:tcPr>
-                </a:tc>
-              </a:tr>
-              <a:tr h="438912">
-                <a:tc>
-                  <a:txBody>
-                    <a:bodyPr/>
-                    <a:lstStyle/>
-                    <a:p>
-                      <a:pPr indent="0" marL="0">
-                        <a:buNone/>
-                      </a:pPr>
-                      <a:r>
-                        <a:rPr lang="en-US" sz="1000" b="1" dirty="0">
-                          <a:solidFill>
-                            <a:srgbClr val="1D1D1F"/>
-                          </a:solidFill>
-                          <a:latin typeface="Helvetica Neue" pitchFamily="34" charset="0"/>
-                          <a:ea typeface="Helvetica Neue" pitchFamily="34" charset="-122"/>
-                          <a:cs typeface="Helvetica Neue" pitchFamily="34" charset="-120"/>
-                        </a:rPr>
-                        <a:t>Musa Tabally</a:t>
-                      </a:r>
-                      <a:endParaRPr lang="en-US" sz="1000" dirty="0">
-                        <a:latin typeface="Helvetica Neue" charset="0"/>
-                        <a:ea typeface="Helvetica Neue" charset="0"/>
-                        <a:cs typeface="Helvetica Neue" charset="0"/>
-                      </a:endParaRPr>
-                    </a:p>
-                  </a:txBody>
-                  <a:tcPr marL="5486400" marR="5486400" marT="0" marB="0" anchor="ctr">
-                    <a:lnL w="0" cap="flat" cmpd="sng" algn="ctr">
-                      <a:noFill/>
-                    </a:lnL>
-                    <a:lnR w="0" cap="flat" cmpd="sng" algn="ctr">
-                      <a:noFill/>
-                    </a:lnR>
-                    <a:lnT w="0" cap="flat" cmpd="sng" algn="ctr">
-                      <a:noFill/>
-                    </a:lnT>
-                    <a:lnB w="0" cap="flat" cmpd="sng" algn="ctr">
-                      <a:noFill/>
-                    </a:lnB>
-                  </a:tcPr>
-                </a:tc>
-                <a:tc>
-                  <a:txBody>
-                    <a:bodyPr/>
-                    <a:lstStyle/>
-                    <a:p>
-                      <a:pPr indent="0" marL="0">
-                        <a:buNone/>
-                      </a:pPr>
-                      <a:r>
-                        <a:rPr lang="en-US" sz="1000" dirty="0">
-                          <a:solidFill>
-                            <a:srgbClr val="1D1D1F"/>
-                          </a:solidFill>
-                          <a:latin typeface="Helvetica Neue" pitchFamily="34" charset="0"/>
-                          <a:ea typeface="Helvetica Neue" pitchFamily="34" charset="-122"/>
-                          <a:cs typeface="Helvetica Neue" pitchFamily="34" charset="-120"/>
-                        </a:rPr>
-                        <a:t>Statistical test: expected vs. actual</a:t>
-                      </a:r>
-                      <a:endParaRPr lang="en-US" sz="1000" dirty="0">
-                        <a:latin typeface="Helvetica Neue" charset="0"/>
-                        <a:ea typeface="Helvetica Neue" charset="0"/>
-                        <a:cs typeface="Helvetica Neue" charset="0"/>
-                      </a:endParaRPr>
-                    </a:p>
-                  </a:txBody>
-                  <a:tcPr marL="5486400" marR="5486400" marT="0" marB="0" anchor="ctr">
-                    <a:lnL w="0" cap="flat" cmpd="sng" algn="ctr">
-                      <a:noFill/>
-                    </a:lnL>
-                    <a:lnR w="0" cap="flat" cmpd="sng" algn="ctr">
-                      <a:noFill/>
-                    </a:lnR>
-                    <a:lnT w="0" cap="flat" cmpd="sng" algn="ctr">
-                      <a:noFill/>
-                    </a:lnT>
-                    <a:lnB w="0" cap="flat" cmpd="sng" algn="ctr">
-                      <a:noFill/>
-                    </a:lnB>
-                  </a:tcPr>
-                </a:tc>
-                <a:tc>
-                  <a:txBody>
-                    <a:bodyPr/>
-                    <a:lstStyle/>
-                    <a:p>
-                      <a:pPr indent="0" marL="0">
-                        <a:buNone/>
-                      </a:pPr>
-                      <a:r>
-                        <a:rPr lang="en-US" sz="1000" dirty="0">
-                          <a:solidFill>
-                            <a:srgbClr val="6E6E73"/>
-                          </a:solidFill>
-                          <a:latin typeface="Helvetica Neue" pitchFamily="34" charset="0"/>
-                          <a:ea typeface="Helvetica Neue" pitchFamily="34" charset="-122"/>
-                          <a:cs typeface="Helvetica Neue" pitchFamily="34" charset="-120"/>
-                        </a:rPr>
-                        <a:t>Gap over time; heatmap by month</a:t>
-                      </a:r>
-                      <a:endParaRPr lang="en-US" sz="1000" dirty="0">
-                        <a:latin typeface="Helvetica Neue" charset="0"/>
-                        <a:ea typeface="Helvetica Neue" charset="0"/>
-                        <a:cs typeface="Helvetica Neue" charset="0"/>
-                      </a:endParaRPr>
-                    </a:p>
-                  </a:txBody>
-                  <a:tcPr marL="5486400" marR="5486400" marT="0" marB="0" anchor="ctr">
-                    <a:lnL w="0" cap="flat" cmpd="sng" algn="ctr">
-                      <a:noFill/>
-                    </a:lnL>
-                    <a:lnR w="0" cap="flat" cmpd="sng" algn="ctr">
-                      <a:noFill/>
-                    </a:lnR>
-                    <a:lnT w="0" cap="flat" cmpd="sng" algn="ctr">
-                      <a:noFill/>
-                    </a:lnT>
-                    <a:lnB w="0" cap="flat" cmpd="sng" algn="ctr">
-                      <a:noFill/>
-                    </a:lnB>
-                  </a:tcPr>
-                </a:tc>
-              </a:tr>
-            </a:tbl>
-          </a:graphicData>
-        </a:graphic>
-      </p:graphicFrame>
-      <p:sp>
-        <p:nvSpPr>
-          <p:cNvPr id="17" name="Text 14"/>
-          <p:cNvSpPr txBox="1"/>
-          <p:nvPr/>
-        </p:nvSpPr>
-        <p:spPr>
-          <a:xfrm>
-            <a:off x="4114800" y="4315968"/>
+      <p:sp>
+        <p:nvSpPr>
+          <p:cNvPr id="16" name="Text 14"/>
+          <p:cNvSpPr txBox="1"/>
+          <p:nvPr/>
+        </p:nvSpPr>
+        <p:spPr>
+          <a:xfrm>
+            <a:off x="4069080" y="1554480"/>
+            <a:ext cx="914400" cy="182880"/>
+          </a:xfrm>
+          <a:prstGeom prst="rect">
+            <a:avLst/>
+          </a:prstGeom>
+          <a:noFill/>
+          <a:ln/>
+        </p:spPr>
+        <p:txBody>
+          <a:bodyPr wrap="square" lIns="0" tIns="0" rIns="0" bIns="0" rtlCol="0" anchor="t"/>
+          <a:lstStyle/>
+          <a:p>
+            <a:pPr indent="0" marL="0">
+              <a:buNone/>
+            </a:pPr>
+            <a:r>
+              <a:rPr lang="en-US" sz="950" dirty="0">
+                <a:solidFill>
+                  <a:srgbClr val="6E6E73"/>
+                </a:solidFill>
+                <a:latin typeface="Helvetica Neue" pitchFamily="34" charset="0"/>
+                <a:ea typeface="Helvetica Neue" pitchFamily="34" charset="-122"/>
+                <a:cs typeface="Helvetica Neue" pitchFamily="34" charset="-120"/>
+              </a:rPr>
+              <a:t>Owner</a:t>
+            </a:r>
+            <a:endParaRPr lang="en-US" sz="950" dirty="0"/>
+          </a:p>
+        </p:txBody>
+      </p:sp>
+      <p:sp>
+        <p:nvSpPr>
+          <p:cNvPr id="17" name="Text 15"/>
+          <p:cNvSpPr txBox="1"/>
+          <p:nvPr/>
+        </p:nvSpPr>
+        <p:spPr>
+          <a:xfrm>
+            <a:off x="5029200" y="1554480"/>
+            <a:ext cx="1554480" cy="182880"/>
+          </a:xfrm>
+          <a:prstGeom prst="rect">
+            <a:avLst/>
+          </a:prstGeom>
+          <a:noFill/>
+          <a:ln/>
+        </p:spPr>
+        <p:txBody>
+          <a:bodyPr wrap="square" lIns="0" tIns="0" rIns="0" bIns="0" rtlCol="0" anchor="t"/>
+          <a:lstStyle/>
+          <a:p>
+            <a:pPr indent="0" marL="0">
+              <a:buNone/>
+            </a:pPr>
+            <a:r>
+              <a:rPr lang="en-US" sz="950" dirty="0">
+                <a:solidFill>
+                  <a:srgbClr val="6E6E73"/>
+                </a:solidFill>
+                <a:latin typeface="Helvetica Neue" pitchFamily="34" charset="0"/>
+                <a:ea typeface="Helvetica Neue" pitchFamily="34" charset="-122"/>
+                <a:cs typeface="Helvetica Neue" pitchFamily="34" charset="-120"/>
+              </a:rPr>
+              <a:t>Analysis</a:t>
+            </a:r>
+            <a:endParaRPr lang="en-US" sz="950" dirty="0"/>
+          </a:p>
+        </p:txBody>
+      </p:sp>
+      <p:sp>
+        <p:nvSpPr>
+          <p:cNvPr id="18" name="Text 16"/>
+          <p:cNvSpPr txBox="1"/>
+          <p:nvPr/>
+        </p:nvSpPr>
+        <p:spPr>
+          <a:xfrm>
+            <a:off x="6675120" y="1554480"/>
+            <a:ext cx="1783080" cy="182880"/>
+          </a:xfrm>
+          <a:prstGeom prst="rect">
+            <a:avLst/>
+          </a:prstGeom>
+          <a:noFill/>
+          <a:ln/>
+        </p:spPr>
+        <p:txBody>
+          <a:bodyPr wrap="square" lIns="0" tIns="0" rIns="0" bIns="0" rtlCol="0" anchor="t"/>
+          <a:lstStyle/>
+          <a:p>
+            <a:pPr indent="0" marL="0">
+              <a:buNone/>
+            </a:pPr>
+            <a:r>
+              <a:rPr lang="en-US" sz="950" dirty="0">
+                <a:solidFill>
+                  <a:srgbClr val="6E6E73"/>
+                </a:solidFill>
+                <a:latin typeface="Helvetica Neue" pitchFamily="34" charset="0"/>
+                <a:ea typeface="Helvetica Neue" pitchFamily="34" charset="-122"/>
+                <a:cs typeface="Helvetica Neue" pitchFamily="34" charset="-120"/>
+              </a:rPr>
+              <a:t>Two visuals</a:t>
+            </a:r>
+            <a:endParaRPr lang="en-US" sz="950" dirty="0"/>
+          </a:p>
+        </p:txBody>
+      </p:sp>
+      <p:sp>
+        <p:nvSpPr>
+          <p:cNvPr id="19" name="Shape 17"/>
+          <p:cNvSpPr/>
+          <p:nvPr/>
+        </p:nvSpPr>
+        <p:spPr>
+          <a:xfrm>
+            <a:off x="4069080" y="1801368"/>
+            <a:ext cx="4343400" cy="0"/>
+          </a:xfrm>
+          <a:prstGeom prst="line">
+            <a:avLst/>
+          </a:prstGeom>
+          <a:noFill/>
+          <a:ln w="6350">
+            <a:solidFill>
+              <a:srgbClr val="D2D2D7"/>
+            </a:solidFill>
+            <a:prstDash val="solid"/>
+          </a:ln>
+        </p:spPr>
+      </p:sp>
+      <p:sp>
+        <p:nvSpPr>
+          <p:cNvPr id="20" name="Text 18"/>
+          <p:cNvSpPr txBox="1"/>
+          <p:nvPr/>
+        </p:nvSpPr>
+        <p:spPr>
+          <a:xfrm>
+            <a:off x="4069080" y="1874520"/>
+            <a:ext cx="914400" cy="384048"/>
+          </a:xfrm>
+          <a:prstGeom prst="rect">
+            <a:avLst/>
+          </a:prstGeom>
+          <a:noFill/>
+          <a:ln/>
+        </p:spPr>
+        <p:txBody>
+          <a:bodyPr wrap="square" lIns="0" tIns="0" rIns="0" bIns="0" rtlCol="0" anchor="ctr"/>
+          <a:lstStyle/>
+          <a:p>
+            <a:pPr indent="0" marL="0">
+              <a:buNone/>
+            </a:pPr>
+            <a:r>
+              <a:rPr lang="en-US" sz="1000" b="1" dirty="0">
+                <a:solidFill>
+                  <a:srgbClr val="1D1D1F"/>
+                </a:solidFill>
+                <a:latin typeface="Helvetica Neue" pitchFamily="34" charset="0"/>
+                <a:ea typeface="Helvetica Neue" pitchFamily="34" charset="-122"/>
+                <a:cs typeface="Helvetica Neue" pitchFamily="34" charset="-120"/>
+              </a:rPr>
+              <a:t>Kaled Dahleh</a:t>
+            </a:r>
+            <a:endParaRPr lang="en-US" sz="1000" dirty="0"/>
+          </a:p>
+        </p:txBody>
+      </p:sp>
+      <p:sp>
+        <p:nvSpPr>
+          <p:cNvPr id="21" name="Text 19"/>
+          <p:cNvSpPr txBox="1"/>
+          <p:nvPr/>
+        </p:nvSpPr>
+        <p:spPr>
+          <a:xfrm>
+            <a:off x="5029200" y="1874520"/>
+            <a:ext cx="1554480" cy="384048"/>
+          </a:xfrm>
+          <a:prstGeom prst="rect">
+            <a:avLst/>
+          </a:prstGeom>
+          <a:noFill/>
+          <a:ln/>
+        </p:spPr>
+        <p:txBody>
+          <a:bodyPr wrap="square" lIns="0" tIns="0" rIns="0" bIns="0" rtlCol="0" anchor="ctr"/>
+          <a:lstStyle/>
+          <a:p>
+            <a:pPr indent="0" marL="0">
+              <a:buNone/>
+            </a:pPr>
+            <a:r>
+              <a:rPr lang="en-US" sz="1000" dirty="0">
+                <a:solidFill>
+                  <a:srgbClr val="1D1D1F"/>
+                </a:solidFill>
+                <a:latin typeface="Helvetica Neue" pitchFamily="34" charset="0"/>
+                <a:ea typeface="Helvetica Neue" pitchFamily="34" charset="-122"/>
+                <a:cs typeface="Helvetica Neue" pitchFamily="34" charset="-120"/>
+              </a:rPr>
+              <a:t>Curve fit: expected move vs. strike price</a:t>
+            </a:r>
+            <a:endParaRPr lang="en-US" sz="1000" dirty="0"/>
+          </a:p>
+        </p:txBody>
+      </p:sp>
+      <p:sp>
+        <p:nvSpPr>
+          <p:cNvPr id="22" name="Text 20"/>
+          <p:cNvSpPr txBox="1"/>
+          <p:nvPr/>
+        </p:nvSpPr>
+        <p:spPr>
+          <a:xfrm>
+            <a:off x="6675120" y="1874520"/>
+            <a:ext cx="1783080" cy="384048"/>
+          </a:xfrm>
+          <a:prstGeom prst="rect">
+            <a:avLst/>
+          </a:prstGeom>
+          <a:noFill/>
+          <a:ln/>
+        </p:spPr>
+        <p:txBody>
+          <a:bodyPr wrap="square" lIns="0" tIns="0" rIns="0" bIns="0" rtlCol="0" anchor="ctr"/>
+          <a:lstStyle/>
+          <a:p>
+            <a:pPr indent="0" marL="0">
+              <a:buNone/>
+            </a:pPr>
+            <a:r>
+              <a:rPr lang="en-US" sz="950" dirty="0">
+                <a:solidFill>
+                  <a:srgbClr val="6E6E73"/>
+                </a:solidFill>
+                <a:latin typeface="Helvetica Neue" pitchFamily="34" charset="0"/>
+                <a:ea typeface="Helvetica Neue" pitchFamily="34" charset="-122"/>
+                <a:cs typeface="Helvetica Neue" pitchFamily="34" charset="-120"/>
+              </a:rPr>
+              <a:t>Curve chart; fit vs. actual</a:t>
+            </a:r>
+            <a:endParaRPr lang="en-US" sz="950" dirty="0"/>
+          </a:p>
+        </p:txBody>
+      </p:sp>
+      <p:sp>
+        <p:nvSpPr>
+          <p:cNvPr id="23" name="Shape 21"/>
+          <p:cNvSpPr/>
+          <p:nvPr/>
+        </p:nvSpPr>
+        <p:spPr>
+          <a:xfrm>
+            <a:off x="4069080" y="2304288"/>
+            <a:ext cx="4343400" cy="0"/>
+          </a:xfrm>
+          <a:prstGeom prst="line">
+            <a:avLst/>
+          </a:prstGeom>
+          <a:noFill/>
+          <a:ln w="6350">
+            <a:solidFill>
+              <a:srgbClr val="D2D2D7"/>
+            </a:solidFill>
+            <a:prstDash val="solid"/>
+          </a:ln>
+        </p:spPr>
+      </p:sp>
+      <p:sp>
+        <p:nvSpPr>
+          <p:cNvPr id="24" name="Text 22"/>
+          <p:cNvSpPr txBox="1"/>
+          <p:nvPr/>
+        </p:nvSpPr>
+        <p:spPr>
+          <a:xfrm>
+            <a:off x="4069080" y="2350008"/>
+            <a:ext cx="914400" cy="384048"/>
+          </a:xfrm>
+          <a:prstGeom prst="rect">
+            <a:avLst/>
+          </a:prstGeom>
+          <a:noFill/>
+          <a:ln/>
+        </p:spPr>
+        <p:txBody>
+          <a:bodyPr wrap="square" lIns="0" tIns="0" rIns="0" bIns="0" rtlCol="0" anchor="ctr"/>
+          <a:lstStyle/>
+          <a:p>
+            <a:pPr indent="0" marL="0">
+              <a:buNone/>
+            </a:pPr>
+            <a:r>
+              <a:rPr lang="en-US" sz="1000" b="1" dirty="0">
+                <a:solidFill>
+                  <a:srgbClr val="1D1D1F"/>
+                </a:solidFill>
+                <a:latin typeface="Helvetica Neue" pitchFamily="34" charset="0"/>
+                <a:ea typeface="Helvetica Neue" pitchFamily="34" charset="-122"/>
+                <a:cs typeface="Helvetica Neue" pitchFamily="34" charset="-120"/>
+              </a:rPr>
+              <a:t>Anlil Iwas</a:t>
+            </a:r>
+            <a:endParaRPr lang="en-US" sz="1000" dirty="0"/>
+          </a:p>
+        </p:txBody>
+      </p:sp>
+      <p:sp>
+        <p:nvSpPr>
+          <p:cNvPr id="25" name="Text 23"/>
+          <p:cNvSpPr txBox="1"/>
+          <p:nvPr/>
+        </p:nvSpPr>
+        <p:spPr>
+          <a:xfrm>
+            <a:off x="5029200" y="2350008"/>
+            <a:ext cx="1554480" cy="384048"/>
+          </a:xfrm>
+          <a:prstGeom prst="rect">
+            <a:avLst/>
+          </a:prstGeom>
+          <a:noFill/>
+          <a:ln/>
+        </p:spPr>
+        <p:txBody>
+          <a:bodyPr wrap="square" lIns="0" tIns="0" rIns="0" bIns="0" rtlCol="0" anchor="ctr"/>
+          <a:lstStyle/>
+          <a:p>
+            <a:pPr indent="0" marL="0">
+              <a:buNone/>
+            </a:pPr>
+            <a:r>
+              <a:rPr lang="en-US" sz="1000" dirty="0">
+                <a:solidFill>
+                  <a:srgbClr val="1D1D1F"/>
+                </a:solidFill>
+                <a:latin typeface="Helvetica Neue" pitchFamily="34" charset="0"/>
+                <a:ea typeface="Helvetica Neue" pitchFamily="34" charset="-122"/>
+                <a:cs typeface="Helvetica Neue" pitchFamily="34" charset="-120"/>
+              </a:rPr>
+              <a:t>Logistic regression: did traders guess too high?</a:t>
+            </a:r>
+            <a:endParaRPr lang="en-US" sz="1000" dirty="0"/>
+          </a:p>
+        </p:txBody>
+      </p:sp>
+      <p:sp>
+        <p:nvSpPr>
+          <p:cNvPr id="26" name="Text 24"/>
+          <p:cNvSpPr txBox="1"/>
+          <p:nvPr/>
+        </p:nvSpPr>
+        <p:spPr>
+          <a:xfrm>
+            <a:off x="6675120" y="2350008"/>
+            <a:ext cx="1783080" cy="384048"/>
+          </a:xfrm>
+          <a:prstGeom prst="rect">
+            <a:avLst/>
+          </a:prstGeom>
+          <a:noFill/>
+          <a:ln/>
+        </p:spPr>
+        <p:txBody>
+          <a:bodyPr wrap="square" lIns="0" tIns="0" rIns="0" bIns="0" rtlCol="0" anchor="ctr"/>
+          <a:lstStyle/>
+          <a:p>
+            <a:pPr indent="0" marL="0">
+              <a:buNone/>
+            </a:pPr>
+            <a:r>
+              <a:rPr lang="en-US" sz="950" dirty="0">
+                <a:solidFill>
+                  <a:srgbClr val="6E6E73"/>
+                </a:solidFill>
+                <a:latin typeface="Helvetica Neue" pitchFamily="34" charset="0"/>
+                <a:ea typeface="Helvetica Neue" pitchFamily="34" charset="-122"/>
+                <a:cs typeface="Helvetica Neue" pitchFamily="34" charset="-120"/>
+              </a:rPr>
+              <a:t>Expected vs. actual; accuracy by stock</a:t>
+            </a:r>
+            <a:endParaRPr lang="en-US" sz="950" dirty="0"/>
+          </a:p>
+        </p:txBody>
+      </p:sp>
+      <p:sp>
+        <p:nvSpPr>
+          <p:cNvPr id="27" name="Shape 25"/>
+          <p:cNvSpPr/>
+          <p:nvPr/>
+        </p:nvSpPr>
+        <p:spPr>
+          <a:xfrm>
+            <a:off x="4069080" y="2779776"/>
+            <a:ext cx="4343400" cy="0"/>
+          </a:xfrm>
+          <a:prstGeom prst="line">
+            <a:avLst/>
+          </a:prstGeom>
+          <a:noFill/>
+          <a:ln w="6350">
+            <a:solidFill>
+              <a:srgbClr val="D2D2D7"/>
+            </a:solidFill>
+            <a:prstDash val="solid"/>
+          </a:ln>
+        </p:spPr>
+      </p:sp>
+      <p:sp>
+        <p:nvSpPr>
+          <p:cNvPr id="28" name="Text 26"/>
+          <p:cNvSpPr txBox="1"/>
+          <p:nvPr/>
+        </p:nvSpPr>
+        <p:spPr>
+          <a:xfrm>
+            <a:off x="4069080" y="2825496"/>
+            <a:ext cx="914400" cy="384048"/>
+          </a:xfrm>
+          <a:prstGeom prst="rect">
+            <a:avLst/>
+          </a:prstGeom>
+          <a:noFill/>
+          <a:ln/>
+        </p:spPr>
+        <p:txBody>
+          <a:bodyPr wrap="square" lIns="0" tIns="0" rIns="0" bIns="0" rtlCol="0" anchor="ctr"/>
+          <a:lstStyle/>
+          <a:p>
+            <a:pPr indent="0" marL="0">
+              <a:buNone/>
+            </a:pPr>
+            <a:r>
+              <a:rPr lang="en-US" sz="1000" b="1" dirty="0">
+                <a:solidFill>
+                  <a:srgbClr val="1D1D1F"/>
+                </a:solidFill>
+                <a:latin typeface="Helvetica Neue" pitchFamily="34" charset="0"/>
+                <a:ea typeface="Helvetica Neue" pitchFamily="34" charset="-122"/>
+                <a:cs typeface="Helvetica Neue" pitchFamily="34" charset="-120"/>
+              </a:rPr>
+              <a:t>Adi Latic</a:t>
+            </a:r>
+            <a:endParaRPr lang="en-US" sz="1000" dirty="0"/>
+          </a:p>
+        </p:txBody>
+      </p:sp>
+      <p:sp>
+        <p:nvSpPr>
+          <p:cNvPr id="29" name="Text 27"/>
+          <p:cNvSpPr txBox="1"/>
+          <p:nvPr/>
+        </p:nvSpPr>
+        <p:spPr>
+          <a:xfrm>
+            <a:off x="5029200" y="2825496"/>
+            <a:ext cx="1554480" cy="384048"/>
+          </a:xfrm>
+          <a:prstGeom prst="rect">
+            <a:avLst/>
+          </a:prstGeom>
+          <a:noFill/>
+          <a:ln/>
+        </p:spPr>
+        <p:txBody>
+          <a:bodyPr wrap="square" lIns="0" tIns="0" rIns="0" bIns="0" rtlCol="0" anchor="ctr"/>
+          <a:lstStyle/>
+          <a:p>
+            <a:pPr indent="0" marL="0">
+              <a:buNone/>
+            </a:pPr>
+            <a:r>
+              <a:rPr lang="en-US" sz="1000" dirty="0">
+                <a:solidFill>
+                  <a:srgbClr val="1D1D1F"/>
+                </a:solidFill>
+                <a:latin typeface="Helvetica Neue" pitchFamily="34" charset="0"/>
+                <a:ea typeface="Helvetica Neue" pitchFamily="34" charset="-122"/>
+                <a:cs typeface="Helvetica Neue" pitchFamily="34" charset="-120"/>
+              </a:rPr>
+              <a:t>Random forest on the same question</a:t>
+            </a:r>
+            <a:endParaRPr lang="en-US" sz="1000" dirty="0"/>
+          </a:p>
+        </p:txBody>
+      </p:sp>
+      <p:sp>
+        <p:nvSpPr>
+          <p:cNvPr id="30" name="Text 28"/>
+          <p:cNvSpPr txBox="1"/>
+          <p:nvPr/>
+        </p:nvSpPr>
+        <p:spPr>
+          <a:xfrm>
+            <a:off x="6675120" y="2825496"/>
+            <a:ext cx="1783080" cy="384048"/>
+          </a:xfrm>
+          <a:prstGeom prst="rect">
+            <a:avLst/>
+          </a:prstGeom>
+          <a:noFill/>
+          <a:ln/>
+        </p:spPr>
+        <p:txBody>
+          <a:bodyPr wrap="square" lIns="0" tIns="0" rIns="0" bIns="0" rtlCol="0" anchor="ctr"/>
+          <a:lstStyle/>
+          <a:p>
+            <a:pPr indent="0" marL="0">
+              <a:buNone/>
+            </a:pPr>
+            <a:r>
+              <a:rPr lang="en-US" sz="950" dirty="0">
+                <a:solidFill>
+                  <a:srgbClr val="6E6E73"/>
+                </a:solidFill>
+                <a:latin typeface="Helvetica Neue" pitchFamily="34" charset="0"/>
+                <a:ea typeface="Helvetica Neue" pitchFamily="34" charset="-122"/>
+                <a:cs typeface="Helvetica Neue" pitchFamily="34" charset="-120"/>
+              </a:rPr>
+              <a:t>What drives the prediction; errors over time</a:t>
+            </a:r>
+            <a:endParaRPr lang="en-US" sz="950" dirty="0"/>
+          </a:p>
+        </p:txBody>
+      </p:sp>
+      <p:sp>
+        <p:nvSpPr>
+          <p:cNvPr id="31" name="Shape 29"/>
+          <p:cNvSpPr/>
+          <p:nvPr/>
+        </p:nvSpPr>
+        <p:spPr>
+          <a:xfrm>
+            <a:off x="4069080" y="3255264"/>
+            <a:ext cx="4343400" cy="0"/>
+          </a:xfrm>
+          <a:prstGeom prst="line">
+            <a:avLst/>
+          </a:prstGeom>
+          <a:noFill/>
+          <a:ln w="6350">
+            <a:solidFill>
+              <a:srgbClr val="D2D2D7"/>
+            </a:solidFill>
+            <a:prstDash val="solid"/>
+          </a:ln>
+        </p:spPr>
+      </p:sp>
+      <p:sp>
+        <p:nvSpPr>
+          <p:cNvPr id="32" name="Text 30"/>
+          <p:cNvSpPr txBox="1"/>
+          <p:nvPr/>
+        </p:nvSpPr>
+        <p:spPr>
+          <a:xfrm>
+            <a:off x="4069080" y="3300984"/>
+            <a:ext cx="914400" cy="384048"/>
+          </a:xfrm>
+          <a:prstGeom prst="rect">
+            <a:avLst/>
+          </a:prstGeom>
+          <a:noFill/>
+          <a:ln/>
+        </p:spPr>
+        <p:txBody>
+          <a:bodyPr wrap="square" lIns="0" tIns="0" rIns="0" bIns="0" rtlCol="0" anchor="ctr"/>
+          <a:lstStyle/>
+          <a:p>
+            <a:pPr indent="0" marL="0">
+              <a:buNone/>
+            </a:pPr>
+            <a:r>
+              <a:rPr lang="en-US" sz="1000" b="1" dirty="0">
+                <a:solidFill>
+                  <a:srgbClr val="1D1D1F"/>
+                </a:solidFill>
+                <a:latin typeface="Helvetica Neue" pitchFamily="34" charset="0"/>
+                <a:ea typeface="Helvetica Neue" pitchFamily="34" charset="-122"/>
+                <a:cs typeface="Helvetica Neue" pitchFamily="34" charset="-120"/>
+              </a:rPr>
+              <a:t>Neo Uy</a:t>
+            </a:r>
+            <a:endParaRPr lang="en-US" sz="1000" dirty="0"/>
+          </a:p>
+        </p:txBody>
+      </p:sp>
+      <p:sp>
+        <p:nvSpPr>
+          <p:cNvPr id="33" name="Text 31"/>
+          <p:cNvSpPr txBox="1"/>
+          <p:nvPr/>
+        </p:nvSpPr>
+        <p:spPr>
+          <a:xfrm>
+            <a:off x="5029200" y="3300984"/>
+            <a:ext cx="1554480" cy="384048"/>
+          </a:xfrm>
+          <a:prstGeom prst="rect">
+            <a:avLst/>
+          </a:prstGeom>
+          <a:noFill/>
+          <a:ln/>
+        </p:spPr>
+        <p:txBody>
+          <a:bodyPr wrap="square" lIns="0" tIns="0" rIns="0" bIns="0" rtlCol="0" anchor="ctr"/>
+          <a:lstStyle/>
+          <a:p>
+            <a:pPr indent="0" marL="0">
+              <a:buNone/>
+            </a:pPr>
+            <a:r>
+              <a:rPr lang="en-US" sz="1000" dirty="0">
+                <a:solidFill>
+                  <a:srgbClr val="1D1D1F"/>
+                </a:solidFill>
+                <a:latin typeface="Helvetica Neue" pitchFamily="34" charset="0"/>
+                <a:ea typeface="Helvetica Neue" pitchFamily="34" charset="-122"/>
+                <a:cs typeface="Helvetica Neue" pitchFamily="34" charset="-120"/>
+              </a:rPr>
+              <a:t>Clustering stocks by curve shape</a:t>
+            </a:r>
+            <a:endParaRPr lang="en-US" sz="1000" dirty="0"/>
+          </a:p>
+        </p:txBody>
+      </p:sp>
+      <p:sp>
+        <p:nvSpPr>
+          <p:cNvPr id="34" name="Text 32"/>
+          <p:cNvSpPr txBox="1"/>
+          <p:nvPr/>
+        </p:nvSpPr>
+        <p:spPr>
+          <a:xfrm>
+            <a:off x="6675120" y="3300984"/>
+            <a:ext cx="1783080" cy="384048"/>
+          </a:xfrm>
+          <a:prstGeom prst="rect">
+            <a:avLst/>
+          </a:prstGeom>
+          <a:noFill/>
+          <a:ln/>
+        </p:spPr>
+        <p:txBody>
+          <a:bodyPr wrap="square" lIns="0" tIns="0" rIns="0" bIns="0" rtlCol="0" anchor="ctr"/>
+          <a:lstStyle/>
+          <a:p>
+            <a:pPr indent="0" marL="0">
+              <a:buNone/>
+            </a:pPr>
+            <a:r>
+              <a:rPr lang="en-US" sz="950" dirty="0">
+                <a:solidFill>
+                  <a:srgbClr val="6E6E73"/>
+                </a:solidFill>
+                <a:latin typeface="Helvetica Neue" pitchFamily="34" charset="0"/>
+                <a:ea typeface="Helvetica Neue" pitchFamily="34" charset="-122"/>
+                <a:cs typeface="Helvetica Neue" pitchFamily="34" charset="-120"/>
+              </a:rPr>
+              <a:t>Cluster map; curves by group</a:t>
+            </a:r>
+            <a:endParaRPr lang="en-US" sz="950" dirty="0"/>
+          </a:p>
+        </p:txBody>
+      </p:sp>
+      <p:sp>
+        <p:nvSpPr>
+          <p:cNvPr id="35" name="Shape 33"/>
+          <p:cNvSpPr/>
+          <p:nvPr/>
+        </p:nvSpPr>
+        <p:spPr>
+          <a:xfrm>
+            <a:off x="4069080" y="3730752"/>
+            <a:ext cx="4343400" cy="0"/>
+          </a:xfrm>
+          <a:prstGeom prst="line">
+            <a:avLst/>
+          </a:prstGeom>
+          <a:noFill/>
+          <a:ln w="6350">
+            <a:solidFill>
+              <a:srgbClr val="D2D2D7"/>
+            </a:solidFill>
+            <a:prstDash val="solid"/>
+          </a:ln>
+        </p:spPr>
+      </p:sp>
+      <p:sp>
+        <p:nvSpPr>
+          <p:cNvPr id="36" name="Text 34"/>
+          <p:cNvSpPr txBox="1"/>
+          <p:nvPr/>
+        </p:nvSpPr>
+        <p:spPr>
+          <a:xfrm>
+            <a:off x="4069080" y="3776472"/>
+            <a:ext cx="914400" cy="384048"/>
+          </a:xfrm>
+          <a:prstGeom prst="rect">
+            <a:avLst/>
+          </a:prstGeom>
+          <a:noFill/>
+          <a:ln/>
+        </p:spPr>
+        <p:txBody>
+          <a:bodyPr wrap="square" lIns="0" tIns="0" rIns="0" bIns="0" rtlCol="0" anchor="ctr"/>
+          <a:lstStyle/>
+          <a:p>
+            <a:pPr indent="0" marL="0">
+              <a:buNone/>
+            </a:pPr>
+            <a:r>
+              <a:rPr lang="en-US" sz="1000" b="1" dirty="0">
+                <a:solidFill>
+                  <a:srgbClr val="1D1D1F"/>
+                </a:solidFill>
+                <a:latin typeface="Helvetica Neue" pitchFamily="34" charset="0"/>
+                <a:ea typeface="Helvetica Neue" pitchFamily="34" charset="-122"/>
+                <a:cs typeface="Helvetica Neue" pitchFamily="34" charset="-120"/>
+              </a:rPr>
+              <a:t>Musa Tabally</a:t>
+            </a:r>
+            <a:endParaRPr lang="en-US" sz="1000" dirty="0"/>
+          </a:p>
+        </p:txBody>
+      </p:sp>
+      <p:sp>
+        <p:nvSpPr>
+          <p:cNvPr id="37" name="Text 35"/>
+          <p:cNvSpPr txBox="1"/>
+          <p:nvPr/>
+        </p:nvSpPr>
+        <p:spPr>
+          <a:xfrm>
+            <a:off x="5029200" y="3776472"/>
+            <a:ext cx="1554480" cy="384048"/>
+          </a:xfrm>
+          <a:prstGeom prst="rect">
+            <a:avLst/>
+          </a:prstGeom>
+          <a:noFill/>
+          <a:ln/>
+        </p:spPr>
+        <p:txBody>
+          <a:bodyPr wrap="square" lIns="0" tIns="0" rIns="0" bIns="0" rtlCol="0" anchor="ctr"/>
+          <a:lstStyle/>
+          <a:p>
+            <a:pPr indent="0" marL="0">
+              <a:buNone/>
+            </a:pPr>
+            <a:r>
+              <a:rPr lang="en-US" sz="1000" dirty="0">
+                <a:solidFill>
+                  <a:srgbClr val="1D1D1F"/>
+                </a:solidFill>
+                <a:latin typeface="Helvetica Neue" pitchFamily="34" charset="0"/>
+                <a:ea typeface="Helvetica Neue" pitchFamily="34" charset="-122"/>
+                <a:cs typeface="Helvetica Neue" pitchFamily="34" charset="-120"/>
+              </a:rPr>
+              <a:t>Statistical test: expected vs. actual</a:t>
+            </a:r>
+            <a:endParaRPr lang="en-US" sz="1000" dirty="0"/>
+          </a:p>
+        </p:txBody>
+      </p:sp>
+      <p:sp>
+        <p:nvSpPr>
+          <p:cNvPr id="38" name="Text 36"/>
+          <p:cNvSpPr txBox="1"/>
+          <p:nvPr/>
+        </p:nvSpPr>
+        <p:spPr>
+          <a:xfrm>
+            <a:off x="6675120" y="3776472"/>
+            <a:ext cx="1783080" cy="384048"/>
+          </a:xfrm>
+          <a:prstGeom prst="rect">
+            <a:avLst/>
+          </a:prstGeom>
+          <a:noFill/>
+          <a:ln/>
+        </p:spPr>
+        <p:txBody>
+          <a:bodyPr wrap="square" lIns="0" tIns="0" rIns="0" bIns="0" rtlCol="0" anchor="ctr"/>
+          <a:lstStyle/>
+          <a:p>
+            <a:pPr indent="0" marL="0">
+              <a:buNone/>
+            </a:pPr>
+            <a:r>
+              <a:rPr lang="en-US" sz="950" dirty="0">
+                <a:solidFill>
+                  <a:srgbClr val="6E6E73"/>
+                </a:solidFill>
+                <a:latin typeface="Helvetica Neue" pitchFamily="34" charset="0"/>
+                <a:ea typeface="Helvetica Neue" pitchFamily="34" charset="-122"/>
+                <a:cs typeface="Helvetica Neue" pitchFamily="34" charset="-120"/>
+              </a:rPr>
+              <a:t>Gap over time; heatmap by month</a:t>
+            </a:r>
+            <a:endParaRPr lang="en-US" sz="950" dirty="0"/>
+          </a:p>
+        </p:txBody>
+      </p:sp>
+      <p:sp>
+        <p:nvSpPr>
+          <p:cNvPr id="39" name="Text 37"/>
+          <p:cNvSpPr txBox="1"/>
+          <p:nvPr/>
+        </p:nvSpPr>
+        <p:spPr>
+          <a:xfrm>
+            <a:off x="4069080" y="4370832"/>
             <a:ext cx="4297680" cy="228600"/>
           </a:xfrm>
           <a:prstGeom prst="rect">
